--- a/u09a_graphTheory/notes/4a Walks, Trails, Paths, and Cycles/Walks, Trails, Paths, and Cycles.pptx
+++ b/u09a_graphTheory/notes/4a Walks, Trails, Paths, and Cycles/Walks, Trails, Paths, and Cycles.pptx
@@ -5,7 +5,7 @@
     <p:sldMasterId id="2147483649" r:id="rId1"/>
   </p:sldMasterIdLst>
   <p:notesMasterIdLst>
-    <p:notesMasterId r:id="rId25"/>
+    <p:notesMasterId r:id="rId27"/>
   </p:notesMasterIdLst>
   <p:sldIdLst>
     <p:sldId id="682" r:id="rId2"/>
@@ -28,9 +28,11 @@
     <p:sldId id="671" r:id="rId19"/>
     <p:sldId id="672" r:id="rId20"/>
     <p:sldId id="674" r:id="rId21"/>
-    <p:sldId id="675" r:id="rId22"/>
+    <p:sldId id="713" r:id="rId22"/>
     <p:sldId id="703" r:id="rId23"/>
-    <p:sldId id="691" r:id="rId24"/>
+    <p:sldId id="675" r:id="rId24"/>
+    <p:sldId id="714" r:id="rId25"/>
+    <p:sldId id="691" r:id="rId26"/>
   </p:sldIdLst>
   <p:sldSz cx="9144000" cy="6858000" type="screen4x3"/>
   <p:notesSz cx="9296400" cy="7010400"/>
@@ -799,10 +801,10 @@
       </p:grpSpPr>
       <p:sp>
         <p:nvSpPr>
-          <p:cNvPr id="31746" name="Rectangle 7">
+          <p:cNvPr id="29698" name="Rectangle 7">
             <a:extLst>
               <a:ext uri="{FF2B5EF4-FFF2-40B4-BE49-F238E27FC236}">
-                <a16:creationId xmlns:a16="http://schemas.microsoft.com/office/drawing/2014/main" id="{EB2501A6-21C6-49FF-8A23-4451C8F056CA}"/>
+                <a16:creationId xmlns:a16="http://schemas.microsoft.com/office/drawing/2014/main" id="{883EF193-4943-4729-B49A-5F189307301E}"/>
               </a:ext>
             </a:extLst>
           </p:cNvPr>
@@ -957,7 +959,7 @@
                 <a:spcPct val="0"/>
               </a:spcBef>
             </a:pPr>
-            <a:fld id="{9ADB789F-1B28-4C6C-B6CD-B73EEEBDB5A4}" type="slidenum">
+            <a:fld id="{EB03923F-8830-40E5-9515-288C42BF860B}" type="slidenum">
               <a:rPr lang="en-US" altLang="en-US" smtClean="0"/>
               <a:pPr>
                 <a:spcBef>
@@ -972,10 +974,10 @@
       </p:sp>
       <p:sp>
         <p:nvSpPr>
-          <p:cNvPr id="31747" name="Rectangle 2">
+          <p:cNvPr id="29699" name="Rectangle 2">
             <a:extLst>
               <a:ext uri="{FF2B5EF4-FFF2-40B4-BE49-F238E27FC236}">
-                <a16:creationId xmlns:a16="http://schemas.microsoft.com/office/drawing/2014/main" id="{020002E8-CF06-4D4B-96F1-91C5DB2883F3}"/>
+                <a16:creationId xmlns:a16="http://schemas.microsoft.com/office/drawing/2014/main" id="{D7E0BAA8-8C81-4387-8BAD-FC5D7FFE6BF3}"/>
               </a:ext>
             </a:extLst>
           </p:cNvPr>
@@ -992,10 +994,10 @@
       </p:sp>
       <p:sp>
         <p:nvSpPr>
-          <p:cNvPr id="31748" name="Rectangle 3">
+          <p:cNvPr id="29700" name="Rectangle 3">
             <a:extLst>
               <a:ext uri="{FF2B5EF4-FFF2-40B4-BE49-F238E27FC236}">
-                <a16:creationId xmlns:a16="http://schemas.microsoft.com/office/drawing/2014/main" id="{A1769132-EDD7-4970-9FEE-9C7A565BD1C1}"/>
+                <a16:creationId xmlns:a16="http://schemas.microsoft.com/office/drawing/2014/main" id="{48A87836-FFA9-4670-9F79-C7E32C5FFC94}"/>
               </a:ext>
             </a:extLst>
           </p:cNvPr>
@@ -1033,11 +1035,19 @@
           <a:bodyPr/>
           <a:lstStyle/>
           <a:p>
-            <a:endParaRPr lang="en-US" altLang="en-US"/>
+            <a:r>
+              <a:rPr lang="en-US" altLang="en-US" dirty="0"/>
+              <a:t>It’s difficult to be sure you’ve found all walks of a length greater than one by hand, so we multiply matrices instead.</a:t>
+            </a:r>
           </a:p>
         </p:txBody>
       </p:sp>
     </p:spTree>
+    <p:extLst>
+      <p:ext uri="{BB962C8B-B14F-4D97-AF65-F5344CB8AC3E}">
+        <p14:creationId xmlns:p14="http://schemas.microsoft.com/office/powerpoint/2010/main" val="2737330305"/>
+      </p:ext>
+    </p:extLst>
   </p:cSld>
   <p:clrMapOvr>
     <a:masterClrMapping/>
@@ -1306,6 +1316,544 @@
     <p:extLst>
       <p:ext uri="{BB962C8B-B14F-4D97-AF65-F5344CB8AC3E}">
         <p14:creationId xmlns:p14="http://schemas.microsoft.com/office/powerpoint/2010/main" val="3125907493"/>
+      </p:ext>
+    </p:extLst>
+  </p:cSld>
+  <p:clrMapOvr>
+    <a:masterClrMapping/>
+  </p:clrMapOvr>
+</p:notes>
+</file>
+
+<file path=ppt/notesSlides/notesSlide12.xml><?xml version="1.0" encoding="utf-8"?>
+<p:notes xmlns:a="http://schemas.openxmlformats.org/drawingml/2006/main" xmlns:r="http://schemas.openxmlformats.org/officeDocument/2006/relationships" xmlns:p="http://schemas.openxmlformats.org/presentationml/2006/main">
+  <p:cSld>
+    <p:spTree>
+      <p:nvGrpSpPr>
+        <p:cNvPr id="1" name=""/>
+        <p:cNvGrpSpPr/>
+        <p:nvPr/>
+      </p:nvGrpSpPr>
+      <p:grpSpPr>
+        <a:xfrm>
+          <a:off x="0" y="0"/>
+          <a:ext cx="0" cy="0"/>
+          <a:chOff x="0" y="0"/>
+          <a:chExt cx="0" cy="0"/>
+        </a:xfrm>
+      </p:grpSpPr>
+      <p:sp>
+        <p:nvSpPr>
+          <p:cNvPr id="31746" name="Rectangle 7">
+            <a:extLst>
+              <a:ext uri="{FF2B5EF4-FFF2-40B4-BE49-F238E27FC236}">
+                <a16:creationId xmlns:a16="http://schemas.microsoft.com/office/drawing/2014/main" id="{EB2501A6-21C6-49FF-8A23-4451C8F056CA}"/>
+              </a:ext>
+            </a:extLst>
+          </p:cNvPr>
+          <p:cNvSpPr>
+            <a:spLocks noGrp="1" noChangeArrowheads="1"/>
+          </p:cNvSpPr>
+          <p:nvPr>
+            <p:ph type="sldNum" sz="quarter" idx="5"/>
+          </p:nvPr>
+        </p:nvSpPr>
+        <p:spPr>
+          <a:noFill/>
+          <a:ln/>
+          <a:extLst>
+            <a:ext uri="{909E8E84-426E-40DD-AFC4-6F175D3DCCD1}">
+              <a14:hiddenFill xmlns:a14="http://schemas.microsoft.com/office/drawing/2010/main">
+                <a:solidFill>
+                  <a:srgbClr val="FFFFFF"/>
+                </a:solidFill>
+              </a14:hiddenFill>
+            </a:ext>
+            <a:ext uri="{91240B29-F687-4F45-9708-019B960494DF}">
+              <a14:hiddenLine xmlns:a14="http://schemas.microsoft.com/office/drawing/2010/main" w="9525">
+                <a:solidFill>
+                  <a:srgbClr val="000000"/>
+                </a:solidFill>
+                <a:miter lim="800000"/>
+                <a:headEnd/>
+                <a:tailEnd/>
+              </a14:hiddenLine>
+            </a:ext>
+          </a:extLst>
+        </p:spPr>
+        <p:txBody>
+          <a:bodyPr/>
+          <a:lstStyle>
+            <a:lvl1pPr>
+              <a:spcBef>
+                <a:spcPct val="30000"/>
+              </a:spcBef>
+              <a:defRPr sz="1200">
+                <a:solidFill>
+                  <a:schemeClr val="tx1"/>
+                </a:solidFill>
+                <a:latin typeface="Times New Roman" panose="02020603050405020304" pitchFamily="18" charset="0"/>
+              </a:defRPr>
+            </a:lvl1pPr>
+            <a:lvl2pPr marL="755650" indent="-290513">
+              <a:spcBef>
+                <a:spcPct val="30000"/>
+              </a:spcBef>
+              <a:defRPr sz="1200">
+                <a:solidFill>
+                  <a:schemeClr val="tx1"/>
+                </a:solidFill>
+                <a:latin typeface="Times New Roman" panose="02020603050405020304" pitchFamily="18" charset="0"/>
+              </a:defRPr>
+            </a:lvl2pPr>
+            <a:lvl3pPr marL="1163638" indent="-231775">
+              <a:spcBef>
+                <a:spcPct val="30000"/>
+              </a:spcBef>
+              <a:defRPr sz="1200">
+                <a:solidFill>
+                  <a:schemeClr val="tx1"/>
+                </a:solidFill>
+                <a:latin typeface="Times New Roman" panose="02020603050405020304" pitchFamily="18" charset="0"/>
+              </a:defRPr>
+            </a:lvl3pPr>
+            <a:lvl4pPr marL="1630363" indent="-231775">
+              <a:spcBef>
+                <a:spcPct val="30000"/>
+              </a:spcBef>
+              <a:defRPr sz="1200">
+                <a:solidFill>
+                  <a:schemeClr val="tx1"/>
+                </a:solidFill>
+                <a:latin typeface="Times New Roman" panose="02020603050405020304" pitchFamily="18" charset="0"/>
+              </a:defRPr>
+            </a:lvl4pPr>
+            <a:lvl5pPr marL="2095500" indent="-231775">
+              <a:spcBef>
+                <a:spcPct val="30000"/>
+              </a:spcBef>
+              <a:defRPr sz="1200">
+                <a:solidFill>
+                  <a:schemeClr val="tx1"/>
+                </a:solidFill>
+                <a:latin typeface="Times New Roman" panose="02020603050405020304" pitchFamily="18" charset="0"/>
+              </a:defRPr>
+            </a:lvl5pPr>
+            <a:lvl6pPr marL="2552700" indent="-231775" eaLnBrk="0" fontAlgn="base" hangingPunct="0">
+              <a:spcBef>
+                <a:spcPct val="30000"/>
+              </a:spcBef>
+              <a:spcAft>
+                <a:spcPct val="0"/>
+              </a:spcAft>
+              <a:defRPr sz="1200">
+                <a:solidFill>
+                  <a:schemeClr val="tx1"/>
+                </a:solidFill>
+                <a:latin typeface="Times New Roman" panose="02020603050405020304" pitchFamily="18" charset="0"/>
+              </a:defRPr>
+            </a:lvl6pPr>
+            <a:lvl7pPr marL="3009900" indent="-231775" eaLnBrk="0" fontAlgn="base" hangingPunct="0">
+              <a:spcBef>
+                <a:spcPct val="30000"/>
+              </a:spcBef>
+              <a:spcAft>
+                <a:spcPct val="0"/>
+              </a:spcAft>
+              <a:defRPr sz="1200">
+                <a:solidFill>
+                  <a:schemeClr val="tx1"/>
+                </a:solidFill>
+                <a:latin typeface="Times New Roman" panose="02020603050405020304" pitchFamily="18" charset="0"/>
+              </a:defRPr>
+            </a:lvl7pPr>
+            <a:lvl8pPr marL="3467100" indent="-231775" eaLnBrk="0" fontAlgn="base" hangingPunct="0">
+              <a:spcBef>
+                <a:spcPct val="30000"/>
+              </a:spcBef>
+              <a:spcAft>
+                <a:spcPct val="0"/>
+              </a:spcAft>
+              <a:defRPr sz="1200">
+                <a:solidFill>
+                  <a:schemeClr val="tx1"/>
+                </a:solidFill>
+                <a:latin typeface="Times New Roman" panose="02020603050405020304" pitchFamily="18" charset="0"/>
+              </a:defRPr>
+            </a:lvl8pPr>
+            <a:lvl9pPr marL="3924300" indent="-231775" eaLnBrk="0" fontAlgn="base" hangingPunct="0">
+              <a:spcBef>
+                <a:spcPct val="30000"/>
+              </a:spcBef>
+              <a:spcAft>
+                <a:spcPct val="0"/>
+              </a:spcAft>
+              <a:defRPr sz="1200">
+                <a:solidFill>
+                  <a:schemeClr val="tx1"/>
+                </a:solidFill>
+                <a:latin typeface="Times New Roman" panose="02020603050405020304" pitchFamily="18" charset="0"/>
+              </a:defRPr>
+            </a:lvl9pPr>
+          </a:lstStyle>
+          <a:p>
+            <a:pPr>
+              <a:spcBef>
+                <a:spcPct val="0"/>
+              </a:spcBef>
+            </a:pPr>
+            <a:fld id="{9ADB789F-1B28-4C6C-B6CD-B73EEEBDB5A4}" type="slidenum">
+              <a:rPr lang="en-US" altLang="en-US" smtClean="0"/>
+              <a:pPr>
+                <a:spcBef>
+                  <a:spcPct val="0"/>
+                </a:spcBef>
+              </a:pPr>
+              <a:t>23</a:t>
+            </a:fld>
+            <a:endParaRPr lang="en-US" altLang="en-US"/>
+          </a:p>
+        </p:txBody>
+      </p:sp>
+      <p:sp>
+        <p:nvSpPr>
+          <p:cNvPr id="31747" name="Rectangle 2">
+            <a:extLst>
+              <a:ext uri="{FF2B5EF4-FFF2-40B4-BE49-F238E27FC236}">
+                <a16:creationId xmlns:a16="http://schemas.microsoft.com/office/drawing/2014/main" id="{020002E8-CF06-4D4B-96F1-91C5DB2883F3}"/>
+              </a:ext>
+            </a:extLst>
+          </p:cNvPr>
+          <p:cNvSpPr>
+            <a:spLocks noGrp="1" noRot="1" noChangeAspect="1" noChangeArrowheads="1" noTextEdit="1"/>
+          </p:cNvSpPr>
+          <p:nvPr>
+            <p:ph type="sldImg"/>
+          </p:nvPr>
+        </p:nvSpPr>
+        <p:spPr>
+          <a:ln/>
+        </p:spPr>
+      </p:sp>
+      <p:sp>
+        <p:nvSpPr>
+          <p:cNvPr id="31748" name="Rectangle 3">
+            <a:extLst>
+              <a:ext uri="{FF2B5EF4-FFF2-40B4-BE49-F238E27FC236}">
+                <a16:creationId xmlns:a16="http://schemas.microsoft.com/office/drawing/2014/main" id="{A1769132-EDD7-4970-9FEE-9C7A565BD1C1}"/>
+              </a:ext>
+            </a:extLst>
+          </p:cNvPr>
+          <p:cNvSpPr>
+            <a:spLocks noGrp="1" noChangeArrowheads="1"/>
+          </p:cNvSpPr>
+          <p:nvPr>
+            <p:ph type="body" idx="1"/>
+          </p:nvPr>
+        </p:nvSpPr>
+        <p:spPr>
+          <a:noFill/>
+          <a:ln/>
+          <a:extLst>
+            <a:ext uri="{909E8E84-426E-40DD-AFC4-6F175D3DCCD1}">
+              <a14:hiddenFill xmlns:a14="http://schemas.microsoft.com/office/drawing/2010/main">
+                <a:solidFill>
+                  <a:srgbClr val="FFFFFF"/>
+                </a:solidFill>
+              </a14:hiddenFill>
+            </a:ext>
+            <a:ext uri="{91240B29-F687-4F45-9708-019B960494DF}">
+              <a14:hiddenLine xmlns:a14="http://schemas.microsoft.com/office/drawing/2010/main" w="9525">
+                <a:solidFill>
+                  <a:srgbClr val="000000"/>
+                </a:solidFill>
+                <a:miter lim="800000"/>
+                <a:headEnd/>
+                <a:tailEnd/>
+              </a14:hiddenLine>
+            </a:ext>
+          </a:extLst>
+        </p:spPr>
+        <p:txBody>
+          <a:bodyPr/>
+          <a:lstStyle/>
+          <a:p>
+            <a:endParaRPr lang="en-US" altLang="en-US"/>
+          </a:p>
+        </p:txBody>
+      </p:sp>
+    </p:spTree>
+  </p:cSld>
+  <p:clrMapOvr>
+    <a:masterClrMapping/>
+  </p:clrMapOvr>
+</p:notes>
+</file>
+
+<file path=ppt/notesSlides/notesSlide13.xml><?xml version="1.0" encoding="utf-8"?>
+<p:notes xmlns:a="http://schemas.openxmlformats.org/drawingml/2006/main" xmlns:r="http://schemas.openxmlformats.org/officeDocument/2006/relationships" xmlns:p="http://schemas.openxmlformats.org/presentationml/2006/main">
+  <p:cSld>
+    <p:spTree>
+      <p:nvGrpSpPr>
+        <p:cNvPr id="1" name=""/>
+        <p:cNvGrpSpPr/>
+        <p:nvPr/>
+      </p:nvGrpSpPr>
+      <p:grpSpPr>
+        <a:xfrm>
+          <a:off x="0" y="0"/>
+          <a:ext cx="0" cy="0"/>
+          <a:chOff x="0" y="0"/>
+          <a:chExt cx="0" cy="0"/>
+        </a:xfrm>
+      </p:grpSpPr>
+      <p:sp>
+        <p:nvSpPr>
+          <p:cNvPr id="29698" name="Rectangle 7">
+            <a:extLst>
+              <a:ext uri="{FF2B5EF4-FFF2-40B4-BE49-F238E27FC236}">
+                <a16:creationId xmlns:a16="http://schemas.microsoft.com/office/drawing/2014/main" id="{883EF193-4943-4729-B49A-5F189307301E}"/>
+              </a:ext>
+            </a:extLst>
+          </p:cNvPr>
+          <p:cNvSpPr>
+            <a:spLocks noGrp="1" noChangeArrowheads="1"/>
+          </p:cNvSpPr>
+          <p:nvPr>
+            <p:ph type="sldNum" sz="quarter" idx="5"/>
+          </p:nvPr>
+        </p:nvSpPr>
+        <p:spPr>
+          <a:noFill/>
+          <a:ln/>
+          <a:extLst>
+            <a:ext uri="{909E8E84-426E-40DD-AFC4-6F175D3DCCD1}">
+              <a14:hiddenFill xmlns:a14="http://schemas.microsoft.com/office/drawing/2010/main">
+                <a:solidFill>
+                  <a:srgbClr val="FFFFFF"/>
+                </a:solidFill>
+              </a14:hiddenFill>
+            </a:ext>
+            <a:ext uri="{91240B29-F687-4F45-9708-019B960494DF}">
+              <a14:hiddenLine xmlns:a14="http://schemas.microsoft.com/office/drawing/2010/main" w="9525">
+                <a:solidFill>
+                  <a:srgbClr val="000000"/>
+                </a:solidFill>
+                <a:miter lim="800000"/>
+                <a:headEnd/>
+                <a:tailEnd/>
+              </a14:hiddenLine>
+            </a:ext>
+          </a:extLst>
+        </p:spPr>
+        <p:txBody>
+          <a:bodyPr/>
+          <a:lstStyle>
+            <a:lvl1pPr>
+              <a:spcBef>
+                <a:spcPct val="30000"/>
+              </a:spcBef>
+              <a:defRPr sz="1200">
+                <a:solidFill>
+                  <a:schemeClr val="tx1"/>
+                </a:solidFill>
+                <a:latin typeface="Times New Roman" panose="02020603050405020304" pitchFamily="18" charset="0"/>
+              </a:defRPr>
+            </a:lvl1pPr>
+            <a:lvl2pPr marL="755650" indent="-290513">
+              <a:spcBef>
+                <a:spcPct val="30000"/>
+              </a:spcBef>
+              <a:defRPr sz="1200">
+                <a:solidFill>
+                  <a:schemeClr val="tx1"/>
+                </a:solidFill>
+                <a:latin typeface="Times New Roman" panose="02020603050405020304" pitchFamily="18" charset="0"/>
+              </a:defRPr>
+            </a:lvl2pPr>
+            <a:lvl3pPr marL="1163638" indent="-231775">
+              <a:spcBef>
+                <a:spcPct val="30000"/>
+              </a:spcBef>
+              <a:defRPr sz="1200">
+                <a:solidFill>
+                  <a:schemeClr val="tx1"/>
+                </a:solidFill>
+                <a:latin typeface="Times New Roman" panose="02020603050405020304" pitchFamily="18" charset="0"/>
+              </a:defRPr>
+            </a:lvl3pPr>
+            <a:lvl4pPr marL="1630363" indent="-231775">
+              <a:spcBef>
+                <a:spcPct val="30000"/>
+              </a:spcBef>
+              <a:defRPr sz="1200">
+                <a:solidFill>
+                  <a:schemeClr val="tx1"/>
+                </a:solidFill>
+                <a:latin typeface="Times New Roman" panose="02020603050405020304" pitchFamily="18" charset="0"/>
+              </a:defRPr>
+            </a:lvl4pPr>
+            <a:lvl5pPr marL="2095500" indent="-231775">
+              <a:spcBef>
+                <a:spcPct val="30000"/>
+              </a:spcBef>
+              <a:defRPr sz="1200">
+                <a:solidFill>
+                  <a:schemeClr val="tx1"/>
+                </a:solidFill>
+                <a:latin typeface="Times New Roman" panose="02020603050405020304" pitchFamily="18" charset="0"/>
+              </a:defRPr>
+            </a:lvl5pPr>
+            <a:lvl6pPr marL="2552700" indent="-231775" eaLnBrk="0" fontAlgn="base" hangingPunct="0">
+              <a:spcBef>
+                <a:spcPct val="30000"/>
+              </a:spcBef>
+              <a:spcAft>
+                <a:spcPct val="0"/>
+              </a:spcAft>
+              <a:defRPr sz="1200">
+                <a:solidFill>
+                  <a:schemeClr val="tx1"/>
+                </a:solidFill>
+                <a:latin typeface="Times New Roman" panose="02020603050405020304" pitchFamily="18" charset="0"/>
+              </a:defRPr>
+            </a:lvl6pPr>
+            <a:lvl7pPr marL="3009900" indent="-231775" eaLnBrk="0" fontAlgn="base" hangingPunct="0">
+              <a:spcBef>
+                <a:spcPct val="30000"/>
+              </a:spcBef>
+              <a:spcAft>
+                <a:spcPct val="0"/>
+              </a:spcAft>
+              <a:defRPr sz="1200">
+                <a:solidFill>
+                  <a:schemeClr val="tx1"/>
+                </a:solidFill>
+                <a:latin typeface="Times New Roman" panose="02020603050405020304" pitchFamily="18" charset="0"/>
+              </a:defRPr>
+            </a:lvl7pPr>
+            <a:lvl8pPr marL="3467100" indent="-231775" eaLnBrk="0" fontAlgn="base" hangingPunct="0">
+              <a:spcBef>
+                <a:spcPct val="30000"/>
+              </a:spcBef>
+              <a:spcAft>
+                <a:spcPct val="0"/>
+              </a:spcAft>
+              <a:defRPr sz="1200">
+                <a:solidFill>
+                  <a:schemeClr val="tx1"/>
+                </a:solidFill>
+                <a:latin typeface="Times New Roman" panose="02020603050405020304" pitchFamily="18" charset="0"/>
+              </a:defRPr>
+            </a:lvl8pPr>
+            <a:lvl9pPr marL="3924300" indent="-231775" eaLnBrk="0" fontAlgn="base" hangingPunct="0">
+              <a:spcBef>
+                <a:spcPct val="30000"/>
+              </a:spcBef>
+              <a:spcAft>
+                <a:spcPct val="0"/>
+              </a:spcAft>
+              <a:defRPr sz="1200">
+                <a:solidFill>
+                  <a:schemeClr val="tx1"/>
+                </a:solidFill>
+                <a:latin typeface="Times New Roman" panose="02020603050405020304" pitchFamily="18" charset="0"/>
+              </a:defRPr>
+            </a:lvl9pPr>
+          </a:lstStyle>
+          <a:p>
+            <a:pPr>
+              <a:spcBef>
+                <a:spcPct val="0"/>
+              </a:spcBef>
+            </a:pPr>
+            <a:fld id="{EB03923F-8830-40E5-9515-288C42BF860B}" type="slidenum">
+              <a:rPr lang="en-US" altLang="en-US" smtClean="0"/>
+              <a:pPr>
+                <a:spcBef>
+                  <a:spcPct val="0"/>
+                </a:spcBef>
+              </a:pPr>
+              <a:t>24</a:t>
+            </a:fld>
+            <a:endParaRPr lang="en-US" altLang="en-US"/>
+          </a:p>
+        </p:txBody>
+      </p:sp>
+      <p:sp>
+        <p:nvSpPr>
+          <p:cNvPr id="29699" name="Rectangle 2">
+            <a:extLst>
+              <a:ext uri="{FF2B5EF4-FFF2-40B4-BE49-F238E27FC236}">
+                <a16:creationId xmlns:a16="http://schemas.microsoft.com/office/drawing/2014/main" id="{D7E0BAA8-8C81-4387-8BAD-FC5D7FFE6BF3}"/>
+              </a:ext>
+            </a:extLst>
+          </p:cNvPr>
+          <p:cNvSpPr>
+            <a:spLocks noGrp="1" noRot="1" noChangeAspect="1" noChangeArrowheads="1" noTextEdit="1"/>
+          </p:cNvSpPr>
+          <p:nvPr>
+            <p:ph type="sldImg"/>
+          </p:nvPr>
+        </p:nvSpPr>
+        <p:spPr>
+          <a:ln/>
+        </p:spPr>
+      </p:sp>
+      <p:sp>
+        <p:nvSpPr>
+          <p:cNvPr id="29700" name="Rectangle 3">
+            <a:extLst>
+              <a:ext uri="{FF2B5EF4-FFF2-40B4-BE49-F238E27FC236}">
+                <a16:creationId xmlns:a16="http://schemas.microsoft.com/office/drawing/2014/main" id="{48A87836-FFA9-4670-9F79-C7E32C5FFC94}"/>
+              </a:ext>
+            </a:extLst>
+          </p:cNvPr>
+          <p:cNvSpPr>
+            <a:spLocks noGrp="1" noChangeArrowheads="1"/>
+          </p:cNvSpPr>
+          <p:nvPr>
+            <p:ph type="body" idx="1"/>
+          </p:nvPr>
+        </p:nvSpPr>
+        <p:spPr>
+          <a:noFill/>
+          <a:ln/>
+          <a:extLst>
+            <a:ext uri="{909E8E84-426E-40DD-AFC4-6F175D3DCCD1}">
+              <a14:hiddenFill xmlns:a14="http://schemas.microsoft.com/office/drawing/2010/main">
+                <a:solidFill>
+                  <a:srgbClr val="FFFFFF"/>
+                </a:solidFill>
+              </a14:hiddenFill>
+            </a:ext>
+            <a:ext uri="{91240B29-F687-4F45-9708-019B960494DF}">
+              <a14:hiddenLine xmlns:a14="http://schemas.microsoft.com/office/drawing/2010/main" w="9525">
+                <a:solidFill>
+                  <a:srgbClr val="000000"/>
+                </a:solidFill>
+                <a:miter lim="800000"/>
+                <a:headEnd/>
+                <a:tailEnd/>
+              </a14:hiddenLine>
+            </a:ext>
+          </a:extLst>
+        </p:spPr>
+        <p:txBody>
+          <a:bodyPr/>
+          <a:lstStyle/>
+          <a:p>
+            <a:r>
+              <a:rPr lang="en-US" altLang="en-US" dirty="0"/>
+              <a:t>It’s difficult to be sure you’ve found all walks of a length greater than one by hand, so we multiply matrices instead.</a:t>
+            </a:r>
+          </a:p>
+        </p:txBody>
+      </p:sp>
+    </p:spTree>
+    <p:extLst>
+      <p:ext uri="{BB962C8B-B14F-4D97-AF65-F5344CB8AC3E}">
+        <p14:creationId xmlns:p14="http://schemas.microsoft.com/office/powerpoint/2010/main" val="1254085785"/>
       </p:ext>
     </p:extLst>
   </p:cSld>
@@ -7337,7 +7885,7 @@
                 <a:latin typeface="Arial" panose="020B0604020202020204" pitchFamily="34" charset="0"/>
                 <a:ea typeface="Times New Roman" panose="02020603050405020304" pitchFamily="18" charset="0"/>
               </a:rPr>
-              <a:t>cycle graph / circular graph </a:t>
+              <a:t>circular graph </a:t>
             </a:r>
             <a:r>
               <a:rPr lang="en-US" sz="3200" u="sng" dirty="0">
@@ -10377,9 +10925,7 @@
           <a:prstGeom prst="rect">
             <a:avLst/>
           </a:prstGeom>
-          <a:solidFill>
-            <a:schemeClr val="bg1"/>
-          </a:solidFill>
+          <a:noFill/>
           <a:ln>
             <a:noFill/>
           </a:ln>
@@ -11629,9 +12175,7 @@
           <a:prstGeom prst="rect">
             <a:avLst/>
           </a:prstGeom>
-          <a:solidFill>
-            <a:schemeClr val="bg1"/>
-          </a:solidFill>
+          <a:noFill/>
         </p:spPr>
         <p:txBody>
           <a:bodyPr wrap="none">
@@ -11648,15 +12192,12 @@
               <a:buFontTx/>
               <a:buNone/>
             </a:pPr>
-            <a:r>
-              <a:rPr kumimoji="0" lang="en-US" altLang="en-US" sz="2400" b="1" strike="sngStrike" dirty="0">
-                <a:solidFill>
-                  <a:srgbClr val="C00000"/>
-                </a:solidFill>
-                <a:latin typeface="Times New Roman" panose="02020603050405020304" pitchFamily="18" charset="0"/>
-              </a:rPr>
-              <a:t>AA</a:t>
-            </a:r>
+            <a:endParaRPr kumimoji="0" lang="en-US" altLang="en-US" sz="2400" b="1" strike="sngStrike" dirty="0">
+              <a:solidFill>
+                <a:srgbClr val="C00000"/>
+              </a:solidFill>
+              <a:latin typeface="Times New Roman" panose="02020603050405020304" pitchFamily="18" charset="0"/>
+            </a:endParaRPr>
           </a:p>
           <a:p>
             <a:pPr eaLnBrk="1" hangingPunct="1">
@@ -11668,14 +12209,6 @@
               <a:buFontTx/>
               <a:buNone/>
             </a:pPr>
-            <a:r>
-              <a:rPr lang="en-US" altLang="en-US" b="1" strike="sngStrike" dirty="0">
-                <a:solidFill>
-                  <a:srgbClr val="C00000"/>
-                </a:solidFill>
-              </a:rPr>
-              <a:t>FCF</a:t>
-            </a:r>
             <a:endParaRPr kumimoji="0" lang="en-US" altLang="en-US" sz="2400" strike="sngStrike" dirty="0">
               <a:solidFill>
                 <a:srgbClr val="C00000"/>
@@ -11692,15 +12225,12 @@
               <a:buFontTx/>
               <a:buNone/>
             </a:pPr>
-            <a:r>
-              <a:rPr kumimoji="0" lang="en-US" altLang="en-US" sz="2400" b="1" strike="sngStrike" dirty="0">
-                <a:solidFill>
-                  <a:srgbClr val="C00000"/>
-                </a:solidFill>
-                <a:latin typeface="Times New Roman" panose="02020603050405020304" pitchFamily="18" charset="0"/>
-              </a:rPr>
-              <a:t>ABEA</a:t>
-            </a:r>
+            <a:endParaRPr kumimoji="0" lang="en-US" altLang="en-US" sz="2400" b="1" strike="sngStrike" dirty="0">
+              <a:solidFill>
+                <a:srgbClr val="C00000"/>
+              </a:solidFill>
+              <a:latin typeface="Times New Roman" panose="02020603050405020304" pitchFamily="18" charset="0"/>
+            </a:endParaRPr>
           </a:p>
           <a:p>
             <a:pPr eaLnBrk="1" hangingPunct="1"/>
@@ -12787,17 +13317,17 @@
               <a:rPr kumimoji="0" lang="en-US" altLang="en-US" sz="2400" b="1" dirty="0">
                 <a:latin typeface="Times New Roman" panose="02020603050405020304" pitchFamily="18" charset="0"/>
               </a:rPr>
-              <a:t>Which walk is not a cycle?</a:t>
+              <a:t>Which path is not a cycle?</a:t>
             </a:r>
           </a:p>
         </p:txBody>
       </p:sp>
       <p:sp>
         <p:nvSpPr>
-          <p:cNvPr id="8" name="TextBox 7">
+          <p:cNvPr id="6" name="TextBox 5">
             <a:extLst>
               <a:ext uri="{FF2B5EF4-FFF2-40B4-BE49-F238E27FC236}">
-                <a16:creationId xmlns:a16="http://schemas.microsoft.com/office/drawing/2014/main" id="{BFBECA63-12F3-44E3-AF63-F7F0D9861C07}"/>
+                <a16:creationId xmlns:a16="http://schemas.microsoft.com/office/drawing/2014/main" id="{07CE80BA-2AEE-3F59-3817-2EA03589C633}"/>
               </a:ext>
             </a:extLst>
           </p:cNvPr>
@@ -12806,8 +13336,8 @@
         </p:nvSpPr>
         <p:spPr>
           <a:xfrm>
-            <a:off x="5916246" y="3043152"/>
-            <a:ext cx="1451038" cy="2677656"/>
+            <a:off x="5993479" y="3181836"/>
+            <a:ext cx="1451038" cy="1569660"/>
           </a:xfrm>
           <a:prstGeom prst="rect">
             <a:avLst/>
@@ -12847,11 +13377,10 @@
               <a:buNone/>
             </a:pPr>
             <a:r>
-              <a:rPr kumimoji="0" lang="en-US" altLang="en-US" sz="2400" b="1" dirty="0">
-                <a:latin typeface="Times New Roman" panose="02020603050405020304" pitchFamily="18" charset="0"/>
-              </a:rPr>
+              <a:rPr lang="en-US" altLang="en-US" b="1" dirty="0"/>
               <a:t>FCF</a:t>
             </a:r>
+            <a:endParaRPr kumimoji="0" lang="en-US" altLang="en-US" sz="2400" dirty="0"/>
           </a:p>
           <a:p>
             <a:pPr eaLnBrk="1" hangingPunct="1">
@@ -12864,15 +13393,10 @@
               <a:buNone/>
             </a:pPr>
             <a:r>
-              <a:rPr lang="en-US" altLang="en-US" b="1" dirty="0"/>
+              <a:rPr kumimoji="0" lang="en-US" altLang="en-US" sz="2400" b="1" dirty="0">
+                <a:latin typeface="Times New Roman" panose="02020603050405020304" pitchFamily="18" charset="0"/>
+              </a:rPr>
               <a:t>ABEA</a:t>
-            </a:r>
-          </a:p>
-          <a:p>
-            <a:pPr eaLnBrk="1" hangingPunct="1"/>
-            <a:r>
-              <a:rPr lang="en-US" altLang="en-US" strike="sngStrike" dirty="0"/>
-              <a:t>ABEAD</a:t>
             </a:r>
             <a:endParaRPr kumimoji="0" lang="en-US" altLang="en-US" sz="2400" strike="sngStrike" dirty="0">
               <a:latin typeface="Times New Roman" panose="02020603050405020304" pitchFamily="18" charset="0"/>
@@ -12889,44 +13413,10 @@
               <a:buNone/>
             </a:pPr>
             <a:r>
-              <a:rPr kumimoji="0" lang="en-US" altLang="en-US" sz="2400" strike="sngStrike" dirty="0">
-                <a:latin typeface="Times New Roman" panose="02020603050405020304" pitchFamily="18" charset="0"/>
-              </a:rPr>
-              <a:t>FBEABE</a:t>
-            </a:r>
-          </a:p>
-          <a:p>
-            <a:pPr eaLnBrk="1" hangingPunct="1">
-              <a:spcBef>
-                <a:spcPct val="0"/>
-              </a:spcBef>
-              <a:buClrTx/>
-              <a:buSzTx/>
-              <a:buFontTx/>
-              <a:buNone/>
-            </a:pPr>
-            <a:r>
               <a:rPr kumimoji="0" lang="en-US" altLang="en-US" sz="2400" b="1" dirty="0">
                 <a:latin typeface="Times New Roman" panose="02020603050405020304" pitchFamily="18" charset="0"/>
               </a:rPr>
               <a:t>FBEADC</a:t>
-            </a:r>
-          </a:p>
-          <a:p>
-            <a:pPr eaLnBrk="1" hangingPunct="1">
-              <a:spcBef>
-                <a:spcPct val="0"/>
-              </a:spcBef>
-              <a:buClrTx/>
-              <a:buSzTx/>
-              <a:buFontTx/>
-              <a:buNone/>
-            </a:pPr>
-            <a:r>
-              <a:rPr kumimoji="0" lang="en-US" altLang="en-US" sz="2400" strike="sngStrike" dirty="0">
-                <a:latin typeface="Times New Roman" panose="02020603050405020304" pitchFamily="18" charset="0"/>
-              </a:rPr>
-              <a:t>FCD</a:t>
             </a:r>
           </a:p>
         </p:txBody>
@@ -12945,15 +13435,13 @@
         </p:nvSpPr>
         <p:spPr>
           <a:xfrm>
-            <a:off x="5916246" y="3043152"/>
-            <a:ext cx="1451038" cy="2677656"/>
+            <a:off x="5993479" y="3181836"/>
+            <a:ext cx="1451038" cy="1569660"/>
           </a:xfrm>
           <a:prstGeom prst="rect">
             <a:avLst/>
           </a:prstGeom>
-          <a:solidFill>
-            <a:schemeClr val="bg1"/>
-          </a:solidFill>
+          <a:noFill/>
         </p:spPr>
         <p:txBody>
           <a:bodyPr wrap="none">
@@ -13009,22 +13497,6 @@
             </a:endParaRPr>
           </a:p>
           <a:p>
-            <a:pPr eaLnBrk="1" hangingPunct="1"/>
-            <a:r>
-              <a:rPr lang="en-US" altLang="en-US" strike="sngStrike" dirty="0">
-                <a:solidFill>
-                  <a:srgbClr val="C00000"/>
-                </a:solidFill>
-              </a:rPr>
-              <a:t>ABEAD</a:t>
-            </a:r>
-            <a:endParaRPr kumimoji="0" lang="en-US" altLang="en-US" sz="2400" strike="sngStrike" dirty="0">
-              <a:solidFill>
-                <a:srgbClr val="C00000"/>
-              </a:solidFill>
-            </a:endParaRPr>
-          </a:p>
-          <a:p>
             <a:pPr eaLnBrk="1" hangingPunct="1">
               <a:spcBef>
                 <a:spcPct val="0"/>
@@ -13035,26 +13507,6 @@
               <a:buNone/>
             </a:pPr>
             <a:r>
-              <a:rPr kumimoji="0" lang="en-US" altLang="en-US" sz="2400" strike="sngStrike" dirty="0">
-                <a:solidFill>
-                  <a:srgbClr val="C00000"/>
-                </a:solidFill>
-                <a:latin typeface="Times New Roman" panose="02020603050405020304" pitchFamily="18" charset="0"/>
-              </a:rPr>
-              <a:t>FBEABE</a:t>
-            </a:r>
-          </a:p>
-          <a:p>
-            <a:pPr eaLnBrk="1" hangingPunct="1">
-              <a:spcBef>
-                <a:spcPct val="0"/>
-              </a:spcBef>
-              <a:buClrTx/>
-              <a:buSzTx/>
-              <a:buFontTx/>
-              <a:buNone/>
-            </a:pPr>
-            <a:r>
               <a:rPr kumimoji="0" lang="en-US" altLang="en-US" sz="2400" b="1" strike="sngStrike" dirty="0">
                 <a:solidFill>
                   <a:srgbClr val="C00000"/>
@@ -13062,26 +13514,6 @@
                 <a:latin typeface="Times New Roman" panose="02020603050405020304" pitchFamily="18" charset="0"/>
               </a:rPr>
               <a:t>FBEADC</a:t>
-            </a:r>
-          </a:p>
-          <a:p>
-            <a:pPr eaLnBrk="1" hangingPunct="1">
-              <a:spcBef>
-                <a:spcPct val="0"/>
-              </a:spcBef>
-              <a:buClrTx/>
-              <a:buSzTx/>
-              <a:buFontTx/>
-              <a:buNone/>
-            </a:pPr>
-            <a:r>
-              <a:rPr kumimoji="0" lang="en-US" altLang="en-US" sz="2400" strike="sngStrike" dirty="0">
-                <a:solidFill>
-                  <a:srgbClr val="C00000"/>
-                </a:solidFill>
-                <a:latin typeface="Times New Roman" panose="02020603050405020304" pitchFamily="18" charset="0"/>
-              </a:rPr>
-              <a:t>FCD</a:t>
             </a:r>
           </a:p>
         </p:txBody>
@@ -13138,21 +13570,39 @@
                                   </p:childTnLst>
                                 </p:cTn>
                               </p:par>
+                            </p:childTnLst>
+                          </p:cTn>
+                        </p:par>
+                      </p:childTnLst>
+                    </p:cTn>
+                  </p:par>
+                  <p:par>
+                    <p:cTn id="7" fill="hold">
+                      <p:stCondLst>
+                        <p:cond delay="indefinite"/>
+                      </p:stCondLst>
+                      <p:childTnLst>
+                        <p:par>
+                          <p:cTn id="8" fill="hold">
+                            <p:stCondLst>
+                              <p:cond delay="0"/>
+                            </p:stCondLst>
+                            <p:childTnLst>
                               <p:par>
-                                <p:cTn id="7" presetID="1" presetClass="entr" presetSubtype="0" fill="hold" grpId="0" nodeType="withEffect">
+                                <p:cTn id="9" presetID="1" presetClass="entr" presetSubtype="0" fill="hold" grpId="0" nodeType="clickEffect">
                                   <p:stCondLst>
                                     <p:cond delay="0"/>
                                   </p:stCondLst>
                                   <p:childTnLst>
                                     <p:set>
                                       <p:cBhvr>
-                                        <p:cTn id="8" dur="1" fill="hold">
+                                        <p:cTn id="10" dur="1" fill="hold">
                                           <p:stCondLst>
                                             <p:cond delay="0"/>
                                           </p:stCondLst>
                                         </p:cTn>
                                         <p:tgtEl>
-                                          <p:spTgt spid="8"/>
+                                          <p:spTgt spid="3"/>
                                         </p:tgtEl>
                                         <p:attrNameLst>
                                           <p:attrName>style.visibility</p:attrName>
@@ -13165,26 +13615,8 @@
                                   </p:childTnLst>
                                 </p:cTn>
                               </p:par>
-                            </p:childTnLst>
-                          </p:cTn>
-                        </p:par>
-                      </p:childTnLst>
-                    </p:cTn>
-                  </p:par>
-                  <p:par>
-                    <p:cTn id="9" fill="hold">
-                      <p:stCondLst>
-                        <p:cond delay="indefinite"/>
-                      </p:stCondLst>
-                      <p:childTnLst>
-                        <p:par>
-                          <p:cTn id="10" fill="hold">
-                            <p:stCondLst>
-                              <p:cond delay="0"/>
-                            </p:stCondLst>
-                            <p:childTnLst>
                               <p:par>
-                                <p:cTn id="11" presetID="1" presetClass="entr" presetSubtype="0" fill="hold" grpId="0" nodeType="clickEffect">
+                                <p:cTn id="11" presetID="1" presetClass="entr" presetSubtype="0" fill="hold" grpId="0" nodeType="withEffect">
                                   <p:stCondLst>
                                     <p:cond delay="0"/>
                                   </p:stCondLst>
@@ -13197,7 +13629,7 @@
                                           </p:stCondLst>
                                         </p:cTn>
                                         <p:tgtEl>
-                                          <p:spTgt spid="3"/>
+                                          <p:spTgt spid="6"/>
                                         </p:tgtEl>
                                         <p:attrNameLst>
                                           <p:attrName>style.visibility</p:attrName>
@@ -13239,7 +13671,7 @@
     </p:tnLst>
     <p:bldLst>
       <p:bldP spid="2" grpId="0"/>
-      <p:bldP spid="8" grpId="0"/>
+      <p:bldP spid="6" grpId="0"/>
       <p:bldP spid="3" grpId="0" animBg="1"/>
     </p:bldLst>
   </p:timing>
@@ -14511,7 +14943,7 @@
         <p:spPr bwMode="auto">
           <a:xfrm>
             <a:off x="1066800" y="1533525"/>
-            <a:ext cx="7391400" cy="1077218"/>
+            <a:ext cx="7391400" cy="1200329"/>
           </a:xfrm>
           <a:prstGeom prst="rect">
             <a:avLst/>
@@ -14682,10 +15114,27 @@
               <a:buNone/>
             </a:pPr>
             <a:r>
-              <a:rPr kumimoji="0" lang="en-US" altLang="en-US" dirty="0">
+              <a:rPr kumimoji="0" lang="en-US" altLang="en-US" sz="3600" dirty="0">
                 <a:latin typeface="Times New Roman" panose="02020603050405020304" pitchFamily="18" charset="0"/>
               </a:rPr>
-              <a:t>How many walks of length 2 exists in this Adjacency matrix? </a:t>
+              <a:t>How many walks of length 1 </a:t>
+            </a:r>
+          </a:p>
+          <a:p>
+            <a:pPr eaLnBrk="1" hangingPunct="1">
+              <a:spcBef>
+                <a:spcPct val="0"/>
+              </a:spcBef>
+              <a:buClrTx/>
+              <a:buSzTx/>
+              <a:buFontTx/>
+              <a:buNone/>
+            </a:pPr>
+            <a:r>
+              <a:rPr kumimoji="0" lang="en-US" altLang="en-US" sz="3600" dirty="0">
+                <a:latin typeface="Times New Roman" panose="02020603050405020304" pitchFamily="18" charset="0"/>
+              </a:rPr>
+              <a:t>exist in this Adjacency matrix? </a:t>
             </a:r>
           </a:p>
         </p:txBody>
@@ -14705,13 +15154,2095 @@
           <p:nvPr>
             <p:extLst>
               <p:ext uri="{D42A27DB-BD31-4B8C-83A1-F6EECF244321}">
-                <p14:modId xmlns:p14="http://schemas.microsoft.com/office/powerpoint/2010/main" val="3784145149"/>
+                <p14:modId xmlns:p14="http://schemas.microsoft.com/office/powerpoint/2010/main" val="240263519"/>
               </p:ext>
             </p:extLst>
           </p:nvPr>
         </p:nvGraphicFramePr>
         <p:xfrm>
-          <a:off x="2857500" y="3125688"/>
+          <a:off x="4151041" y="3140186"/>
+          <a:ext cx="3429000" cy="2243140"/>
+        </p:xfrm>
+        <a:graphic>
+          <a:graphicData uri="http://schemas.openxmlformats.org/drawingml/2006/table">
+            <a:tbl>
+              <a:tblPr firstRow="1"/>
+              <a:tblGrid>
+                <a:gridCol w="857250">
+                  <a:extLst>
+                    <a:ext uri="{9D8B030D-6E8A-4147-A177-3AD203B41FA5}">
+                      <a16:colId xmlns:a16="http://schemas.microsoft.com/office/drawing/2014/main" val="20000"/>
+                    </a:ext>
+                  </a:extLst>
+                </a:gridCol>
+                <a:gridCol w="857250">
+                  <a:extLst>
+                    <a:ext uri="{9D8B030D-6E8A-4147-A177-3AD203B41FA5}">
+                      <a16:colId xmlns:a16="http://schemas.microsoft.com/office/drawing/2014/main" val="20001"/>
+                    </a:ext>
+                  </a:extLst>
+                </a:gridCol>
+                <a:gridCol w="857250">
+                  <a:extLst>
+                    <a:ext uri="{9D8B030D-6E8A-4147-A177-3AD203B41FA5}">
+                      <a16:colId xmlns:a16="http://schemas.microsoft.com/office/drawing/2014/main" val="20002"/>
+                    </a:ext>
+                  </a:extLst>
+                </a:gridCol>
+                <a:gridCol w="857250">
+                  <a:extLst>
+                    <a:ext uri="{9D8B030D-6E8A-4147-A177-3AD203B41FA5}">
+                      <a16:colId xmlns:a16="http://schemas.microsoft.com/office/drawing/2014/main" val="20003"/>
+                    </a:ext>
+                  </a:extLst>
+                </a:gridCol>
+              </a:tblGrid>
+              <a:tr h="560785">
+                <a:tc>
+                  <a:txBody>
+                    <a:bodyPr/>
+                    <a:lstStyle/>
+                    <a:p>
+                      <a:pPr marL="0" marR="0" algn="ctr">
+                        <a:lnSpc>
+                          <a:spcPct val="115000"/>
+                        </a:lnSpc>
+                        <a:spcBef>
+                          <a:spcPts val="0"/>
+                        </a:spcBef>
+                        <a:spcAft>
+                          <a:spcPts val="0"/>
+                        </a:spcAft>
+                      </a:pPr>
+                      <a:endParaRPr lang="en-US" sz="3200" dirty="0">
+                        <a:latin typeface="Calibri"/>
+                        <a:ea typeface="Calibri"/>
+                        <a:cs typeface="Times New Roman"/>
+                      </a:endParaRPr>
+                    </a:p>
+                  </a:txBody>
+                  <a:tcPr marL="68580" marR="68580" marT="0" marB="0">
+                    <a:lnL w="12700" cap="flat" cmpd="sng" algn="ctr">
+                      <a:solidFill>
+                        <a:srgbClr val="000000"/>
+                      </a:solidFill>
+                      <a:prstDash val="solid"/>
+                      <a:round/>
+                      <a:headEnd type="none" w="med" len="med"/>
+                      <a:tailEnd type="none" w="med" len="med"/>
+                    </a:lnL>
+                    <a:lnR w="12700" cap="flat" cmpd="sng" algn="ctr">
+                      <a:solidFill>
+                        <a:srgbClr val="000000"/>
+                      </a:solidFill>
+                      <a:prstDash val="solid"/>
+                      <a:round/>
+                      <a:headEnd type="none" w="med" len="med"/>
+                      <a:tailEnd type="none" w="med" len="med"/>
+                    </a:lnR>
+                    <a:lnT w="12700" cap="flat" cmpd="sng" algn="ctr">
+                      <a:solidFill>
+                        <a:srgbClr val="000000"/>
+                      </a:solidFill>
+                      <a:prstDash val="solid"/>
+                      <a:round/>
+                      <a:headEnd type="none" w="med" len="med"/>
+                      <a:tailEnd type="none" w="med" len="med"/>
+                    </a:lnT>
+                    <a:lnB w="12700" cap="flat" cmpd="sng" algn="ctr">
+                      <a:solidFill>
+                        <a:srgbClr val="000000"/>
+                      </a:solidFill>
+                      <a:prstDash val="solid"/>
+                      <a:round/>
+                      <a:headEnd type="none" w="med" len="med"/>
+                      <a:tailEnd type="none" w="med" len="med"/>
+                    </a:lnB>
+                    <a:solidFill>
+                      <a:srgbClr val="DBE5F1"/>
+                    </a:solidFill>
+                  </a:tcPr>
+                </a:tc>
+                <a:tc>
+                  <a:txBody>
+                    <a:bodyPr/>
+                    <a:lstStyle/>
+                    <a:p>
+                      <a:pPr marL="0" marR="0" algn="ctr">
+                        <a:lnSpc>
+                          <a:spcPct val="115000"/>
+                        </a:lnSpc>
+                        <a:spcBef>
+                          <a:spcPts val="0"/>
+                        </a:spcBef>
+                        <a:spcAft>
+                          <a:spcPts val="0"/>
+                        </a:spcAft>
+                      </a:pPr>
+                      <a:r>
+                        <a:rPr lang="en-US" sz="3200" b="1" dirty="0">
+                          <a:latin typeface="Calibri"/>
+                          <a:ea typeface="Calibri"/>
+                          <a:cs typeface="Times New Roman"/>
+                        </a:rPr>
+                        <a:t>A</a:t>
+                      </a:r>
+                      <a:endParaRPr lang="en-US" sz="3200" dirty="0">
+                        <a:latin typeface="Calibri"/>
+                        <a:ea typeface="Calibri"/>
+                        <a:cs typeface="Times New Roman"/>
+                      </a:endParaRPr>
+                    </a:p>
+                  </a:txBody>
+                  <a:tcPr marL="68580" marR="68580" marT="0" marB="0">
+                    <a:lnL w="12700" cap="flat" cmpd="sng" algn="ctr">
+                      <a:solidFill>
+                        <a:srgbClr val="000000"/>
+                      </a:solidFill>
+                      <a:prstDash val="solid"/>
+                      <a:round/>
+                      <a:headEnd type="none" w="med" len="med"/>
+                      <a:tailEnd type="none" w="med" len="med"/>
+                    </a:lnL>
+                    <a:lnR w="12700" cap="flat" cmpd="sng" algn="ctr">
+                      <a:solidFill>
+                        <a:srgbClr val="000000"/>
+                      </a:solidFill>
+                      <a:prstDash val="solid"/>
+                      <a:round/>
+                      <a:headEnd type="none" w="med" len="med"/>
+                      <a:tailEnd type="none" w="med" len="med"/>
+                    </a:lnR>
+                    <a:lnT w="12700" cap="flat" cmpd="sng" algn="ctr">
+                      <a:solidFill>
+                        <a:srgbClr val="000000"/>
+                      </a:solidFill>
+                      <a:prstDash val="solid"/>
+                      <a:round/>
+                      <a:headEnd type="none" w="med" len="med"/>
+                      <a:tailEnd type="none" w="med" len="med"/>
+                    </a:lnT>
+                    <a:lnB w="12700" cap="flat" cmpd="sng" algn="ctr">
+                      <a:solidFill>
+                        <a:srgbClr val="000000"/>
+                      </a:solidFill>
+                      <a:prstDash val="solid"/>
+                      <a:round/>
+                      <a:headEnd type="none" w="med" len="med"/>
+                      <a:tailEnd type="none" w="med" len="med"/>
+                    </a:lnB>
+                    <a:solidFill>
+                      <a:srgbClr val="DBE5F1"/>
+                    </a:solidFill>
+                  </a:tcPr>
+                </a:tc>
+                <a:tc>
+                  <a:txBody>
+                    <a:bodyPr/>
+                    <a:lstStyle/>
+                    <a:p>
+                      <a:pPr marL="0" marR="0" algn="ctr">
+                        <a:lnSpc>
+                          <a:spcPct val="115000"/>
+                        </a:lnSpc>
+                        <a:spcBef>
+                          <a:spcPts val="0"/>
+                        </a:spcBef>
+                        <a:spcAft>
+                          <a:spcPts val="0"/>
+                        </a:spcAft>
+                      </a:pPr>
+                      <a:r>
+                        <a:rPr lang="en-US" sz="3200" b="1">
+                          <a:latin typeface="Calibri"/>
+                          <a:ea typeface="Calibri"/>
+                          <a:cs typeface="Times New Roman"/>
+                        </a:rPr>
+                        <a:t>B</a:t>
+                      </a:r>
+                      <a:endParaRPr lang="en-US" sz="3200">
+                        <a:latin typeface="Calibri"/>
+                        <a:ea typeface="Calibri"/>
+                        <a:cs typeface="Times New Roman"/>
+                      </a:endParaRPr>
+                    </a:p>
+                  </a:txBody>
+                  <a:tcPr marL="68580" marR="68580" marT="0" marB="0">
+                    <a:lnL w="12700" cap="flat" cmpd="sng" algn="ctr">
+                      <a:solidFill>
+                        <a:srgbClr val="000000"/>
+                      </a:solidFill>
+                      <a:prstDash val="solid"/>
+                      <a:round/>
+                      <a:headEnd type="none" w="med" len="med"/>
+                      <a:tailEnd type="none" w="med" len="med"/>
+                    </a:lnL>
+                    <a:lnR w="12700" cap="flat" cmpd="sng" algn="ctr">
+                      <a:solidFill>
+                        <a:srgbClr val="000000"/>
+                      </a:solidFill>
+                      <a:prstDash val="solid"/>
+                      <a:round/>
+                      <a:headEnd type="none" w="med" len="med"/>
+                      <a:tailEnd type="none" w="med" len="med"/>
+                    </a:lnR>
+                    <a:lnT w="12700" cap="flat" cmpd="sng" algn="ctr">
+                      <a:solidFill>
+                        <a:srgbClr val="000000"/>
+                      </a:solidFill>
+                      <a:prstDash val="solid"/>
+                      <a:round/>
+                      <a:headEnd type="none" w="med" len="med"/>
+                      <a:tailEnd type="none" w="med" len="med"/>
+                    </a:lnT>
+                    <a:lnB w="12700" cap="flat" cmpd="sng" algn="ctr">
+                      <a:solidFill>
+                        <a:srgbClr val="000000"/>
+                      </a:solidFill>
+                      <a:prstDash val="solid"/>
+                      <a:round/>
+                      <a:headEnd type="none" w="med" len="med"/>
+                      <a:tailEnd type="none" w="med" len="med"/>
+                    </a:lnB>
+                    <a:solidFill>
+                      <a:srgbClr val="DBE5F1"/>
+                    </a:solidFill>
+                  </a:tcPr>
+                </a:tc>
+                <a:tc>
+                  <a:txBody>
+                    <a:bodyPr/>
+                    <a:lstStyle/>
+                    <a:p>
+                      <a:pPr marL="0" marR="0" algn="ctr">
+                        <a:lnSpc>
+                          <a:spcPct val="115000"/>
+                        </a:lnSpc>
+                        <a:spcBef>
+                          <a:spcPts val="0"/>
+                        </a:spcBef>
+                        <a:spcAft>
+                          <a:spcPts val="0"/>
+                        </a:spcAft>
+                      </a:pPr>
+                      <a:r>
+                        <a:rPr lang="en-US" sz="3200" b="1">
+                          <a:latin typeface="Calibri"/>
+                          <a:ea typeface="Calibri"/>
+                          <a:cs typeface="Times New Roman"/>
+                        </a:rPr>
+                        <a:t>C</a:t>
+                      </a:r>
+                      <a:endParaRPr lang="en-US" sz="3200">
+                        <a:latin typeface="Calibri"/>
+                        <a:ea typeface="Calibri"/>
+                        <a:cs typeface="Times New Roman"/>
+                      </a:endParaRPr>
+                    </a:p>
+                  </a:txBody>
+                  <a:tcPr marL="68580" marR="68580" marT="0" marB="0">
+                    <a:lnL w="12700" cap="flat" cmpd="sng" algn="ctr">
+                      <a:solidFill>
+                        <a:srgbClr val="000000"/>
+                      </a:solidFill>
+                      <a:prstDash val="solid"/>
+                      <a:round/>
+                      <a:headEnd type="none" w="med" len="med"/>
+                      <a:tailEnd type="none" w="med" len="med"/>
+                    </a:lnL>
+                    <a:lnR w="12700" cap="flat" cmpd="sng" algn="ctr">
+                      <a:solidFill>
+                        <a:srgbClr val="000000"/>
+                      </a:solidFill>
+                      <a:prstDash val="solid"/>
+                      <a:round/>
+                      <a:headEnd type="none" w="med" len="med"/>
+                      <a:tailEnd type="none" w="med" len="med"/>
+                    </a:lnR>
+                    <a:lnT w="12700" cap="flat" cmpd="sng" algn="ctr">
+                      <a:solidFill>
+                        <a:srgbClr val="000000"/>
+                      </a:solidFill>
+                      <a:prstDash val="solid"/>
+                      <a:round/>
+                      <a:headEnd type="none" w="med" len="med"/>
+                      <a:tailEnd type="none" w="med" len="med"/>
+                    </a:lnT>
+                    <a:lnB w="12700" cap="flat" cmpd="sng" algn="ctr">
+                      <a:solidFill>
+                        <a:srgbClr val="000000"/>
+                      </a:solidFill>
+                      <a:prstDash val="solid"/>
+                      <a:round/>
+                      <a:headEnd type="none" w="med" len="med"/>
+                      <a:tailEnd type="none" w="med" len="med"/>
+                    </a:lnB>
+                    <a:solidFill>
+                      <a:srgbClr val="DBE5F1"/>
+                    </a:solidFill>
+                  </a:tcPr>
+                </a:tc>
+                <a:extLst>
+                  <a:ext uri="{0D108BD9-81ED-4DB2-BD59-A6C34878D82A}">
+                    <a16:rowId xmlns:a16="http://schemas.microsoft.com/office/drawing/2014/main" val="10000"/>
+                  </a:ext>
+                </a:extLst>
+              </a:tr>
+              <a:tr h="560785">
+                <a:tc>
+                  <a:txBody>
+                    <a:bodyPr/>
+                    <a:lstStyle/>
+                    <a:p>
+                      <a:pPr marL="0" marR="0" algn="ctr">
+                        <a:lnSpc>
+                          <a:spcPct val="115000"/>
+                        </a:lnSpc>
+                        <a:spcBef>
+                          <a:spcPts val="0"/>
+                        </a:spcBef>
+                        <a:spcAft>
+                          <a:spcPts val="0"/>
+                        </a:spcAft>
+                      </a:pPr>
+                      <a:r>
+                        <a:rPr lang="en-US" sz="3200" b="1" dirty="0">
+                          <a:latin typeface="Calibri"/>
+                          <a:ea typeface="Calibri"/>
+                          <a:cs typeface="Times New Roman"/>
+                        </a:rPr>
+                        <a:t>A</a:t>
+                      </a:r>
+                    </a:p>
+                  </a:txBody>
+                  <a:tcPr marL="68580" marR="68580" marT="0" marB="0">
+                    <a:lnL w="12700" cap="flat" cmpd="sng" algn="ctr">
+                      <a:solidFill>
+                        <a:srgbClr val="000000"/>
+                      </a:solidFill>
+                      <a:prstDash val="solid"/>
+                      <a:round/>
+                      <a:headEnd type="none" w="med" len="med"/>
+                      <a:tailEnd type="none" w="med" len="med"/>
+                    </a:lnL>
+                    <a:lnR w="12700" cap="flat" cmpd="sng" algn="ctr">
+                      <a:solidFill>
+                        <a:srgbClr val="000000"/>
+                      </a:solidFill>
+                      <a:prstDash val="solid"/>
+                      <a:round/>
+                      <a:headEnd type="none" w="med" len="med"/>
+                      <a:tailEnd type="none" w="med" len="med"/>
+                    </a:lnR>
+                    <a:lnT w="12700" cap="flat" cmpd="sng" algn="ctr">
+                      <a:solidFill>
+                        <a:srgbClr val="000000"/>
+                      </a:solidFill>
+                      <a:prstDash val="solid"/>
+                      <a:round/>
+                      <a:headEnd type="none" w="med" len="med"/>
+                      <a:tailEnd type="none" w="med" len="med"/>
+                    </a:lnT>
+                    <a:lnB w="12700" cap="flat" cmpd="sng" algn="ctr">
+                      <a:solidFill>
+                        <a:srgbClr val="000000"/>
+                      </a:solidFill>
+                      <a:prstDash val="solid"/>
+                      <a:round/>
+                      <a:headEnd type="none" w="med" len="med"/>
+                      <a:tailEnd type="none" w="med" len="med"/>
+                    </a:lnB>
+                    <a:solidFill>
+                      <a:srgbClr val="DBE5F1"/>
+                    </a:solidFill>
+                  </a:tcPr>
+                </a:tc>
+                <a:tc>
+                  <a:txBody>
+                    <a:bodyPr/>
+                    <a:lstStyle/>
+                    <a:p>
+                      <a:pPr marL="0" marR="0" algn="ctr">
+                        <a:lnSpc>
+                          <a:spcPct val="115000"/>
+                        </a:lnSpc>
+                        <a:spcBef>
+                          <a:spcPts val="0"/>
+                        </a:spcBef>
+                        <a:spcAft>
+                          <a:spcPts val="0"/>
+                        </a:spcAft>
+                      </a:pPr>
+                      <a:r>
+                        <a:rPr lang="en-US" sz="3200" dirty="0">
+                          <a:latin typeface="Calibri"/>
+                          <a:ea typeface="Calibri"/>
+                          <a:cs typeface="Times New Roman"/>
+                        </a:rPr>
+                        <a:t>0</a:t>
+                      </a:r>
+                    </a:p>
+                  </a:txBody>
+                  <a:tcPr marL="68580" marR="68580" marT="0" marB="0">
+                    <a:lnL w="12700" cap="flat" cmpd="sng" algn="ctr">
+                      <a:solidFill>
+                        <a:srgbClr val="000000"/>
+                      </a:solidFill>
+                      <a:prstDash val="solid"/>
+                      <a:round/>
+                      <a:headEnd type="none" w="med" len="med"/>
+                      <a:tailEnd type="none" w="med" len="med"/>
+                    </a:lnL>
+                    <a:lnR w="12700" cap="flat" cmpd="sng" algn="ctr">
+                      <a:solidFill>
+                        <a:srgbClr val="000000"/>
+                      </a:solidFill>
+                      <a:prstDash val="solid"/>
+                      <a:round/>
+                      <a:headEnd type="none" w="med" len="med"/>
+                      <a:tailEnd type="none" w="med" len="med"/>
+                    </a:lnR>
+                    <a:lnT w="12700" cap="flat" cmpd="sng" algn="ctr">
+                      <a:solidFill>
+                        <a:srgbClr val="000000"/>
+                      </a:solidFill>
+                      <a:prstDash val="solid"/>
+                      <a:round/>
+                      <a:headEnd type="none" w="med" len="med"/>
+                      <a:tailEnd type="none" w="med" len="med"/>
+                    </a:lnT>
+                    <a:lnB w="12700" cap="flat" cmpd="sng" algn="ctr">
+                      <a:solidFill>
+                        <a:srgbClr val="000000"/>
+                      </a:solidFill>
+                      <a:prstDash val="solid"/>
+                      <a:round/>
+                      <a:headEnd type="none" w="med" len="med"/>
+                      <a:tailEnd type="none" w="med" len="med"/>
+                    </a:lnB>
+                  </a:tcPr>
+                </a:tc>
+                <a:tc>
+                  <a:txBody>
+                    <a:bodyPr/>
+                    <a:lstStyle/>
+                    <a:p>
+                      <a:pPr marL="0" marR="0" algn="ctr">
+                        <a:lnSpc>
+                          <a:spcPct val="115000"/>
+                        </a:lnSpc>
+                        <a:spcBef>
+                          <a:spcPts val="0"/>
+                        </a:spcBef>
+                        <a:spcAft>
+                          <a:spcPts val="0"/>
+                        </a:spcAft>
+                      </a:pPr>
+                      <a:r>
+                        <a:rPr lang="en-US" sz="3200">
+                          <a:latin typeface="Calibri"/>
+                          <a:ea typeface="Calibri"/>
+                          <a:cs typeface="Times New Roman"/>
+                        </a:rPr>
+                        <a:t>1</a:t>
+                      </a:r>
+                    </a:p>
+                  </a:txBody>
+                  <a:tcPr marL="68580" marR="68580" marT="0" marB="0">
+                    <a:lnL w="12700" cap="flat" cmpd="sng" algn="ctr">
+                      <a:solidFill>
+                        <a:srgbClr val="000000"/>
+                      </a:solidFill>
+                      <a:prstDash val="solid"/>
+                      <a:round/>
+                      <a:headEnd type="none" w="med" len="med"/>
+                      <a:tailEnd type="none" w="med" len="med"/>
+                    </a:lnL>
+                    <a:lnR w="12700" cap="flat" cmpd="sng" algn="ctr">
+                      <a:solidFill>
+                        <a:srgbClr val="000000"/>
+                      </a:solidFill>
+                      <a:prstDash val="solid"/>
+                      <a:round/>
+                      <a:headEnd type="none" w="med" len="med"/>
+                      <a:tailEnd type="none" w="med" len="med"/>
+                    </a:lnR>
+                    <a:lnT w="12700" cap="flat" cmpd="sng" algn="ctr">
+                      <a:solidFill>
+                        <a:srgbClr val="000000"/>
+                      </a:solidFill>
+                      <a:prstDash val="solid"/>
+                      <a:round/>
+                      <a:headEnd type="none" w="med" len="med"/>
+                      <a:tailEnd type="none" w="med" len="med"/>
+                    </a:lnT>
+                    <a:lnB w="12700" cap="flat" cmpd="sng" algn="ctr">
+                      <a:solidFill>
+                        <a:srgbClr val="000000"/>
+                      </a:solidFill>
+                      <a:prstDash val="solid"/>
+                      <a:round/>
+                      <a:headEnd type="none" w="med" len="med"/>
+                      <a:tailEnd type="none" w="med" len="med"/>
+                    </a:lnB>
+                  </a:tcPr>
+                </a:tc>
+                <a:tc>
+                  <a:txBody>
+                    <a:bodyPr/>
+                    <a:lstStyle/>
+                    <a:p>
+                      <a:pPr marL="0" marR="0" algn="ctr">
+                        <a:lnSpc>
+                          <a:spcPct val="115000"/>
+                        </a:lnSpc>
+                        <a:spcBef>
+                          <a:spcPts val="0"/>
+                        </a:spcBef>
+                        <a:spcAft>
+                          <a:spcPts val="0"/>
+                        </a:spcAft>
+                      </a:pPr>
+                      <a:r>
+                        <a:rPr lang="en-US" sz="3200">
+                          <a:latin typeface="Calibri"/>
+                          <a:ea typeface="Calibri"/>
+                          <a:cs typeface="Times New Roman"/>
+                        </a:rPr>
+                        <a:t>1</a:t>
+                      </a:r>
+                    </a:p>
+                  </a:txBody>
+                  <a:tcPr marL="68580" marR="68580" marT="0" marB="0">
+                    <a:lnL w="12700" cap="flat" cmpd="sng" algn="ctr">
+                      <a:solidFill>
+                        <a:srgbClr val="000000"/>
+                      </a:solidFill>
+                      <a:prstDash val="solid"/>
+                      <a:round/>
+                      <a:headEnd type="none" w="med" len="med"/>
+                      <a:tailEnd type="none" w="med" len="med"/>
+                    </a:lnL>
+                    <a:lnR w="12700" cap="flat" cmpd="sng" algn="ctr">
+                      <a:solidFill>
+                        <a:srgbClr val="000000"/>
+                      </a:solidFill>
+                      <a:prstDash val="solid"/>
+                      <a:round/>
+                      <a:headEnd type="none" w="med" len="med"/>
+                      <a:tailEnd type="none" w="med" len="med"/>
+                    </a:lnR>
+                    <a:lnT w="12700" cap="flat" cmpd="sng" algn="ctr">
+                      <a:solidFill>
+                        <a:srgbClr val="000000"/>
+                      </a:solidFill>
+                      <a:prstDash val="solid"/>
+                      <a:round/>
+                      <a:headEnd type="none" w="med" len="med"/>
+                      <a:tailEnd type="none" w="med" len="med"/>
+                    </a:lnT>
+                    <a:lnB w="12700" cap="flat" cmpd="sng" algn="ctr">
+                      <a:solidFill>
+                        <a:srgbClr val="000000"/>
+                      </a:solidFill>
+                      <a:prstDash val="solid"/>
+                      <a:round/>
+                      <a:headEnd type="none" w="med" len="med"/>
+                      <a:tailEnd type="none" w="med" len="med"/>
+                    </a:lnB>
+                  </a:tcPr>
+                </a:tc>
+                <a:extLst>
+                  <a:ext uri="{0D108BD9-81ED-4DB2-BD59-A6C34878D82A}">
+                    <a16:rowId xmlns:a16="http://schemas.microsoft.com/office/drawing/2014/main" val="10001"/>
+                  </a:ext>
+                </a:extLst>
+              </a:tr>
+              <a:tr h="560785">
+                <a:tc>
+                  <a:txBody>
+                    <a:bodyPr/>
+                    <a:lstStyle/>
+                    <a:p>
+                      <a:pPr marL="0" marR="0" algn="ctr">
+                        <a:lnSpc>
+                          <a:spcPct val="115000"/>
+                        </a:lnSpc>
+                        <a:spcBef>
+                          <a:spcPts val="0"/>
+                        </a:spcBef>
+                        <a:spcAft>
+                          <a:spcPts val="0"/>
+                        </a:spcAft>
+                      </a:pPr>
+                      <a:r>
+                        <a:rPr lang="en-US" sz="3200" b="1" dirty="0">
+                          <a:latin typeface="Calibri"/>
+                          <a:ea typeface="Calibri"/>
+                          <a:cs typeface="Times New Roman"/>
+                        </a:rPr>
+                        <a:t>B</a:t>
+                      </a:r>
+                    </a:p>
+                  </a:txBody>
+                  <a:tcPr marL="68580" marR="68580" marT="0" marB="0">
+                    <a:lnL w="12700" cap="flat" cmpd="sng" algn="ctr">
+                      <a:solidFill>
+                        <a:srgbClr val="000000"/>
+                      </a:solidFill>
+                      <a:prstDash val="solid"/>
+                      <a:round/>
+                      <a:headEnd type="none" w="med" len="med"/>
+                      <a:tailEnd type="none" w="med" len="med"/>
+                    </a:lnL>
+                    <a:lnR w="12700" cap="flat" cmpd="sng" algn="ctr">
+                      <a:solidFill>
+                        <a:srgbClr val="000000"/>
+                      </a:solidFill>
+                      <a:prstDash val="solid"/>
+                      <a:round/>
+                      <a:headEnd type="none" w="med" len="med"/>
+                      <a:tailEnd type="none" w="med" len="med"/>
+                    </a:lnR>
+                    <a:lnT w="12700" cap="flat" cmpd="sng" algn="ctr">
+                      <a:solidFill>
+                        <a:srgbClr val="000000"/>
+                      </a:solidFill>
+                      <a:prstDash val="solid"/>
+                      <a:round/>
+                      <a:headEnd type="none" w="med" len="med"/>
+                      <a:tailEnd type="none" w="med" len="med"/>
+                    </a:lnT>
+                    <a:lnB w="12700" cap="flat" cmpd="sng" algn="ctr">
+                      <a:solidFill>
+                        <a:srgbClr val="000000"/>
+                      </a:solidFill>
+                      <a:prstDash val="solid"/>
+                      <a:round/>
+                      <a:headEnd type="none" w="med" len="med"/>
+                      <a:tailEnd type="none" w="med" len="med"/>
+                    </a:lnB>
+                    <a:solidFill>
+                      <a:srgbClr val="DBE5F1"/>
+                    </a:solidFill>
+                  </a:tcPr>
+                </a:tc>
+                <a:tc>
+                  <a:txBody>
+                    <a:bodyPr/>
+                    <a:lstStyle/>
+                    <a:p>
+                      <a:pPr marL="0" marR="0" algn="ctr">
+                        <a:lnSpc>
+                          <a:spcPct val="115000"/>
+                        </a:lnSpc>
+                        <a:spcBef>
+                          <a:spcPts val="0"/>
+                        </a:spcBef>
+                        <a:spcAft>
+                          <a:spcPts val="0"/>
+                        </a:spcAft>
+                      </a:pPr>
+                      <a:r>
+                        <a:rPr lang="en-US" sz="3200" dirty="0">
+                          <a:latin typeface="Calibri"/>
+                          <a:ea typeface="Calibri"/>
+                          <a:cs typeface="Times New Roman"/>
+                        </a:rPr>
+                        <a:t>1</a:t>
+                      </a:r>
+                    </a:p>
+                  </a:txBody>
+                  <a:tcPr marL="68580" marR="68580" marT="0" marB="0">
+                    <a:lnL w="12700" cap="flat" cmpd="sng" algn="ctr">
+                      <a:solidFill>
+                        <a:srgbClr val="000000"/>
+                      </a:solidFill>
+                      <a:prstDash val="solid"/>
+                      <a:round/>
+                      <a:headEnd type="none" w="med" len="med"/>
+                      <a:tailEnd type="none" w="med" len="med"/>
+                    </a:lnL>
+                    <a:lnR w="12700" cap="flat" cmpd="sng" algn="ctr">
+                      <a:solidFill>
+                        <a:srgbClr val="000000"/>
+                      </a:solidFill>
+                      <a:prstDash val="solid"/>
+                      <a:round/>
+                      <a:headEnd type="none" w="med" len="med"/>
+                      <a:tailEnd type="none" w="med" len="med"/>
+                    </a:lnR>
+                    <a:lnT w="12700" cap="flat" cmpd="sng" algn="ctr">
+                      <a:solidFill>
+                        <a:srgbClr val="000000"/>
+                      </a:solidFill>
+                      <a:prstDash val="solid"/>
+                      <a:round/>
+                      <a:headEnd type="none" w="med" len="med"/>
+                      <a:tailEnd type="none" w="med" len="med"/>
+                    </a:lnT>
+                    <a:lnB w="12700" cap="flat" cmpd="sng" algn="ctr">
+                      <a:solidFill>
+                        <a:srgbClr val="000000"/>
+                      </a:solidFill>
+                      <a:prstDash val="solid"/>
+                      <a:round/>
+                      <a:headEnd type="none" w="med" len="med"/>
+                      <a:tailEnd type="none" w="med" len="med"/>
+                    </a:lnB>
+                  </a:tcPr>
+                </a:tc>
+                <a:tc>
+                  <a:txBody>
+                    <a:bodyPr/>
+                    <a:lstStyle/>
+                    <a:p>
+                      <a:pPr marL="0" marR="0" algn="ctr">
+                        <a:lnSpc>
+                          <a:spcPct val="115000"/>
+                        </a:lnSpc>
+                        <a:spcBef>
+                          <a:spcPts val="0"/>
+                        </a:spcBef>
+                        <a:spcAft>
+                          <a:spcPts val="0"/>
+                        </a:spcAft>
+                      </a:pPr>
+                      <a:r>
+                        <a:rPr lang="en-US" sz="3200">
+                          <a:latin typeface="Calibri"/>
+                          <a:ea typeface="Calibri"/>
+                          <a:cs typeface="Times New Roman"/>
+                        </a:rPr>
+                        <a:t>0</a:t>
+                      </a:r>
+                    </a:p>
+                  </a:txBody>
+                  <a:tcPr marL="68580" marR="68580" marT="0" marB="0">
+                    <a:lnL w="12700" cap="flat" cmpd="sng" algn="ctr">
+                      <a:solidFill>
+                        <a:srgbClr val="000000"/>
+                      </a:solidFill>
+                      <a:prstDash val="solid"/>
+                      <a:round/>
+                      <a:headEnd type="none" w="med" len="med"/>
+                      <a:tailEnd type="none" w="med" len="med"/>
+                    </a:lnL>
+                    <a:lnR w="12700" cap="flat" cmpd="sng" algn="ctr">
+                      <a:solidFill>
+                        <a:srgbClr val="000000"/>
+                      </a:solidFill>
+                      <a:prstDash val="solid"/>
+                      <a:round/>
+                      <a:headEnd type="none" w="med" len="med"/>
+                      <a:tailEnd type="none" w="med" len="med"/>
+                    </a:lnR>
+                    <a:lnT w="12700" cap="flat" cmpd="sng" algn="ctr">
+                      <a:solidFill>
+                        <a:srgbClr val="000000"/>
+                      </a:solidFill>
+                      <a:prstDash val="solid"/>
+                      <a:round/>
+                      <a:headEnd type="none" w="med" len="med"/>
+                      <a:tailEnd type="none" w="med" len="med"/>
+                    </a:lnT>
+                    <a:lnB w="12700" cap="flat" cmpd="sng" algn="ctr">
+                      <a:solidFill>
+                        <a:srgbClr val="000000"/>
+                      </a:solidFill>
+                      <a:prstDash val="solid"/>
+                      <a:round/>
+                      <a:headEnd type="none" w="med" len="med"/>
+                      <a:tailEnd type="none" w="med" len="med"/>
+                    </a:lnB>
+                  </a:tcPr>
+                </a:tc>
+                <a:tc>
+                  <a:txBody>
+                    <a:bodyPr/>
+                    <a:lstStyle/>
+                    <a:p>
+                      <a:pPr marL="0" marR="0" algn="ctr">
+                        <a:lnSpc>
+                          <a:spcPct val="115000"/>
+                        </a:lnSpc>
+                        <a:spcBef>
+                          <a:spcPts val="0"/>
+                        </a:spcBef>
+                        <a:spcAft>
+                          <a:spcPts val="0"/>
+                        </a:spcAft>
+                      </a:pPr>
+                      <a:r>
+                        <a:rPr lang="en-US" sz="3200">
+                          <a:latin typeface="Calibri"/>
+                          <a:ea typeface="Calibri"/>
+                          <a:cs typeface="Times New Roman"/>
+                        </a:rPr>
+                        <a:t>0</a:t>
+                      </a:r>
+                    </a:p>
+                  </a:txBody>
+                  <a:tcPr marL="68580" marR="68580" marT="0" marB="0">
+                    <a:lnL w="12700" cap="flat" cmpd="sng" algn="ctr">
+                      <a:solidFill>
+                        <a:srgbClr val="000000"/>
+                      </a:solidFill>
+                      <a:prstDash val="solid"/>
+                      <a:round/>
+                      <a:headEnd type="none" w="med" len="med"/>
+                      <a:tailEnd type="none" w="med" len="med"/>
+                    </a:lnL>
+                    <a:lnR w="12700" cap="flat" cmpd="sng" algn="ctr">
+                      <a:solidFill>
+                        <a:srgbClr val="000000"/>
+                      </a:solidFill>
+                      <a:prstDash val="solid"/>
+                      <a:round/>
+                      <a:headEnd type="none" w="med" len="med"/>
+                      <a:tailEnd type="none" w="med" len="med"/>
+                    </a:lnR>
+                    <a:lnT w="12700" cap="flat" cmpd="sng" algn="ctr">
+                      <a:solidFill>
+                        <a:srgbClr val="000000"/>
+                      </a:solidFill>
+                      <a:prstDash val="solid"/>
+                      <a:round/>
+                      <a:headEnd type="none" w="med" len="med"/>
+                      <a:tailEnd type="none" w="med" len="med"/>
+                    </a:lnT>
+                    <a:lnB w="12700" cap="flat" cmpd="sng" algn="ctr">
+                      <a:solidFill>
+                        <a:srgbClr val="000000"/>
+                      </a:solidFill>
+                      <a:prstDash val="solid"/>
+                      <a:round/>
+                      <a:headEnd type="none" w="med" len="med"/>
+                      <a:tailEnd type="none" w="med" len="med"/>
+                    </a:lnB>
+                  </a:tcPr>
+                </a:tc>
+                <a:extLst>
+                  <a:ext uri="{0D108BD9-81ED-4DB2-BD59-A6C34878D82A}">
+                    <a16:rowId xmlns:a16="http://schemas.microsoft.com/office/drawing/2014/main" val="10002"/>
+                  </a:ext>
+                </a:extLst>
+              </a:tr>
+              <a:tr h="560785">
+                <a:tc>
+                  <a:txBody>
+                    <a:bodyPr/>
+                    <a:lstStyle/>
+                    <a:p>
+                      <a:pPr marL="0" marR="0" algn="ctr">
+                        <a:lnSpc>
+                          <a:spcPct val="115000"/>
+                        </a:lnSpc>
+                        <a:spcBef>
+                          <a:spcPts val="0"/>
+                        </a:spcBef>
+                        <a:spcAft>
+                          <a:spcPts val="0"/>
+                        </a:spcAft>
+                      </a:pPr>
+                      <a:r>
+                        <a:rPr lang="en-US" sz="3200" b="1" dirty="0">
+                          <a:latin typeface="Calibri"/>
+                          <a:ea typeface="Calibri"/>
+                          <a:cs typeface="Times New Roman"/>
+                        </a:rPr>
+                        <a:t>C</a:t>
+                      </a:r>
+                    </a:p>
+                  </a:txBody>
+                  <a:tcPr marL="68580" marR="68580" marT="0" marB="0">
+                    <a:lnL w="12700" cap="flat" cmpd="sng" algn="ctr">
+                      <a:solidFill>
+                        <a:srgbClr val="000000"/>
+                      </a:solidFill>
+                      <a:prstDash val="solid"/>
+                      <a:round/>
+                      <a:headEnd type="none" w="med" len="med"/>
+                      <a:tailEnd type="none" w="med" len="med"/>
+                    </a:lnL>
+                    <a:lnR w="12700" cap="flat" cmpd="sng" algn="ctr">
+                      <a:solidFill>
+                        <a:srgbClr val="000000"/>
+                      </a:solidFill>
+                      <a:prstDash val="solid"/>
+                      <a:round/>
+                      <a:headEnd type="none" w="med" len="med"/>
+                      <a:tailEnd type="none" w="med" len="med"/>
+                    </a:lnR>
+                    <a:lnT w="12700" cap="flat" cmpd="sng" algn="ctr">
+                      <a:solidFill>
+                        <a:srgbClr val="000000"/>
+                      </a:solidFill>
+                      <a:prstDash val="solid"/>
+                      <a:round/>
+                      <a:headEnd type="none" w="med" len="med"/>
+                      <a:tailEnd type="none" w="med" len="med"/>
+                    </a:lnT>
+                    <a:lnB w="12700" cap="flat" cmpd="sng" algn="ctr">
+                      <a:solidFill>
+                        <a:srgbClr val="000000"/>
+                      </a:solidFill>
+                      <a:prstDash val="solid"/>
+                      <a:round/>
+                      <a:headEnd type="none" w="med" len="med"/>
+                      <a:tailEnd type="none" w="med" len="med"/>
+                    </a:lnB>
+                    <a:solidFill>
+                      <a:srgbClr val="DBE5F1"/>
+                    </a:solidFill>
+                  </a:tcPr>
+                </a:tc>
+                <a:tc>
+                  <a:txBody>
+                    <a:bodyPr/>
+                    <a:lstStyle/>
+                    <a:p>
+                      <a:pPr marL="0" marR="0" algn="ctr">
+                        <a:lnSpc>
+                          <a:spcPct val="115000"/>
+                        </a:lnSpc>
+                        <a:spcBef>
+                          <a:spcPts val="0"/>
+                        </a:spcBef>
+                        <a:spcAft>
+                          <a:spcPts val="0"/>
+                        </a:spcAft>
+                      </a:pPr>
+                      <a:r>
+                        <a:rPr lang="en-US" sz="3200">
+                          <a:latin typeface="Calibri"/>
+                          <a:ea typeface="Calibri"/>
+                          <a:cs typeface="Times New Roman"/>
+                        </a:rPr>
+                        <a:t>1</a:t>
+                      </a:r>
+                    </a:p>
+                  </a:txBody>
+                  <a:tcPr marL="68580" marR="68580" marT="0" marB="0">
+                    <a:lnL w="12700" cap="flat" cmpd="sng" algn="ctr">
+                      <a:solidFill>
+                        <a:srgbClr val="000000"/>
+                      </a:solidFill>
+                      <a:prstDash val="solid"/>
+                      <a:round/>
+                      <a:headEnd type="none" w="med" len="med"/>
+                      <a:tailEnd type="none" w="med" len="med"/>
+                    </a:lnL>
+                    <a:lnR w="12700" cap="flat" cmpd="sng" algn="ctr">
+                      <a:solidFill>
+                        <a:srgbClr val="000000"/>
+                      </a:solidFill>
+                      <a:prstDash val="solid"/>
+                      <a:round/>
+                      <a:headEnd type="none" w="med" len="med"/>
+                      <a:tailEnd type="none" w="med" len="med"/>
+                    </a:lnR>
+                    <a:lnT w="12700" cap="flat" cmpd="sng" algn="ctr">
+                      <a:solidFill>
+                        <a:srgbClr val="000000"/>
+                      </a:solidFill>
+                      <a:prstDash val="solid"/>
+                      <a:round/>
+                      <a:headEnd type="none" w="med" len="med"/>
+                      <a:tailEnd type="none" w="med" len="med"/>
+                    </a:lnT>
+                    <a:lnB w="12700" cap="flat" cmpd="sng" algn="ctr">
+                      <a:solidFill>
+                        <a:srgbClr val="000000"/>
+                      </a:solidFill>
+                      <a:prstDash val="solid"/>
+                      <a:round/>
+                      <a:headEnd type="none" w="med" len="med"/>
+                      <a:tailEnd type="none" w="med" len="med"/>
+                    </a:lnB>
+                  </a:tcPr>
+                </a:tc>
+                <a:tc>
+                  <a:txBody>
+                    <a:bodyPr/>
+                    <a:lstStyle/>
+                    <a:p>
+                      <a:pPr marL="0" marR="0" algn="ctr">
+                        <a:lnSpc>
+                          <a:spcPct val="115000"/>
+                        </a:lnSpc>
+                        <a:spcBef>
+                          <a:spcPts val="0"/>
+                        </a:spcBef>
+                        <a:spcAft>
+                          <a:spcPts val="0"/>
+                        </a:spcAft>
+                      </a:pPr>
+                      <a:r>
+                        <a:rPr lang="en-US" sz="3200">
+                          <a:latin typeface="Calibri"/>
+                          <a:ea typeface="Calibri"/>
+                          <a:cs typeface="Times New Roman"/>
+                        </a:rPr>
+                        <a:t>0</a:t>
+                      </a:r>
+                    </a:p>
+                  </a:txBody>
+                  <a:tcPr marL="68580" marR="68580" marT="0" marB="0">
+                    <a:lnL w="12700" cap="flat" cmpd="sng" algn="ctr">
+                      <a:solidFill>
+                        <a:srgbClr val="000000"/>
+                      </a:solidFill>
+                      <a:prstDash val="solid"/>
+                      <a:round/>
+                      <a:headEnd type="none" w="med" len="med"/>
+                      <a:tailEnd type="none" w="med" len="med"/>
+                    </a:lnL>
+                    <a:lnR w="12700" cap="flat" cmpd="sng" algn="ctr">
+                      <a:solidFill>
+                        <a:srgbClr val="000000"/>
+                      </a:solidFill>
+                      <a:prstDash val="solid"/>
+                      <a:round/>
+                      <a:headEnd type="none" w="med" len="med"/>
+                      <a:tailEnd type="none" w="med" len="med"/>
+                    </a:lnR>
+                    <a:lnT w="12700" cap="flat" cmpd="sng" algn="ctr">
+                      <a:solidFill>
+                        <a:srgbClr val="000000"/>
+                      </a:solidFill>
+                      <a:prstDash val="solid"/>
+                      <a:round/>
+                      <a:headEnd type="none" w="med" len="med"/>
+                      <a:tailEnd type="none" w="med" len="med"/>
+                    </a:lnT>
+                    <a:lnB w="12700" cap="flat" cmpd="sng" algn="ctr">
+                      <a:solidFill>
+                        <a:srgbClr val="000000"/>
+                      </a:solidFill>
+                      <a:prstDash val="solid"/>
+                      <a:round/>
+                      <a:headEnd type="none" w="med" len="med"/>
+                      <a:tailEnd type="none" w="med" len="med"/>
+                    </a:lnB>
+                  </a:tcPr>
+                </a:tc>
+                <a:tc>
+                  <a:txBody>
+                    <a:bodyPr/>
+                    <a:lstStyle/>
+                    <a:p>
+                      <a:pPr marL="0" marR="0" algn="ctr">
+                        <a:lnSpc>
+                          <a:spcPct val="115000"/>
+                        </a:lnSpc>
+                        <a:spcBef>
+                          <a:spcPts val="0"/>
+                        </a:spcBef>
+                        <a:spcAft>
+                          <a:spcPts val="0"/>
+                        </a:spcAft>
+                      </a:pPr>
+                      <a:r>
+                        <a:rPr lang="en-US" sz="3200" dirty="0">
+                          <a:latin typeface="Calibri"/>
+                          <a:ea typeface="Calibri"/>
+                          <a:cs typeface="Times New Roman"/>
+                        </a:rPr>
+                        <a:t>0</a:t>
+                      </a:r>
+                    </a:p>
+                  </a:txBody>
+                  <a:tcPr marL="68580" marR="68580" marT="0" marB="0">
+                    <a:lnL w="12700" cap="flat" cmpd="sng" algn="ctr">
+                      <a:solidFill>
+                        <a:srgbClr val="000000"/>
+                      </a:solidFill>
+                      <a:prstDash val="solid"/>
+                      <a:round/>
+                      <a:headEnd type="none" w="med" len="med"/>
+                      <a:tailEnd type="none" w="med" len="med"/>
+                    </a:lnL>
+                    <a:lnR w="12700" cap="flat" cmpd="sng" algn="ctr">
+                      <a:solidFill>
+                        <a:srgbClr val="000000"/>
+                      </a:solidFill>
+                      <a:prstDash val="solid"/>
+                      <a:round/>
+                      <a:headEnd type="none" w="med" len="med"/>
+                      <a:tailEnd type="none" w="med" len="med"/>
+                    </a:lnR>
+                    <a:lnT w="12700" cap="flat" cmpd="sng" algn="ctr">
+                      <a:solidFill>
+                        <a:srgbClr val="000000"/>
+                      </a:solidFill>
+                      <a:prstDash val="solid"/>
+                      <a:round/>
+                      <a:headEnd type="none" w="med" len="med"/>
+                      <a:tailEnd type="none" w="med" len="med"/>
+                    </a:lnT>
+                    <a:lnB w="12700" cap="flat" cmpd="sng" algn="ctr">
+                      <a:solidFill>
+                        <a:srgbClr val="000000"/>
+                      </a:solidFill>
+                      <a:prstDash val="solid"/>
+                      <a:round/>
+                      <a:headEnd type="none" w="med" len="med"/>
+                      <a:tailEnd type="none" w="med" len="med"/>
+                    </a:lnB>
+                  </a:tcPr>
+                </a:tc>
+                <a:extLst>
+                  <a:ext uri="{0D108BD9-81ED-4DB2-BD59-A6C34878D82A}">
+                    <a16:rowId xmlns:a16="http://schemas.microsoft.com/office/drawing/2014/main" val="10003"/>
+                  </a:ext>
+                </a:extLst>
+              </a:tr>
+            </a:tbl>
+          </a:graphicData>
+        </a:graphic>
+      </p:graphicFrame>
+      <p:grpSp>
+        <p:nvGrpSpPr>
+          <p:cNvPr id="12" name="Group 11" descr="An undirected graph with edges {(A,B), (A,C)}&#10;Adjacency list:&#10;A B, C&#10;B A&#10;C A">
+            <a:extLst>
+              <a:ext uri="{FF2B5EF4-FFF2-40B4-BE49-F238E27FC236}">
+                <a16:creationId xmlns:a16="http://schemas.microsoft.com/office/drawing/2014/main" id="{E219C6CA-2C31-0568-6931-9C4EC6E2656A}"/>
+              </a:ext>
+            </a:extLst>
+          </p:cNvPr>
+          <p:cNvGrpSpPr/>
+          <p:nvPr/>
+        </p:nvGrpSpPr>
+        <p:grpSpPr>
+          <a:xfrm>
+            <a:off x="1066800" y="3191573"/>
+            <a:ext cx="1996533" cy="2383108"/>
+            <a:chOff x="1066800" y="3191573"/>
+            <a:chExt cx="1996533" cy="2383108"/>
+          </a:xfrm>
+        </p:grpSpPr>
+        <p:sp>
+          <p:nvSpPr>
+            <p:cNvPr id="2" name="Oval 1">
+              <a:extLst>
+                <a:ext uri="{FF2B5EF4-FFF2-40B4-BE49-F238E27FC236}">
+                  <a16:creationId xmlns:a16="http://schemas.microsoft.com/office/drawing/2014/main" id="{C85E9774-08D9-ED9C-BEE1-B4F57C61493B}"/>
+                </a:ext>
+              </a:extLst>
+            </p:cNvPr>
+            <p:cNvSpPr/>
+            <p:nvPr/>
+          </p:nvSpPr>
+          <p:spPr bwMode="auto">
+            <a:xfrm>
+              <a:off x="1066800" y="3917416"/>
+              <a:ext cx="716466" cy="716466"/>
+            </a:xfrm>
+            <a:prstGeom prst="ellipse">
+              <a:avLst/>
+            </a:prstGeom>
+            <a:solidFill>
+              <a:schemeClr val="accent1"/>
+            </a:solidFill>
+            <a:ln w="9525" cap="flat" cmpd="sng" algn="ctr">
+              <a:solidFill>
+                <a:schemeClr val="tx1"/>
+              </a:solidFill>
+              <a:prstDash val="solid"/>
+              <a:round/>
+              <a:headEnd type="none" w="med" len="med"/>
+              <a:tailEnd type="none" w="med" len="med"/>
+            </a:ln>
+            <a:effectLst/>
+          </p:spPr>
+          <p:txBody>
+            <a:bodyPr vert="horz" wrap="square" lIns="91440" tIns="45720" rIns="91440" bIns="45720" numCol="1" rtlCol="0" anchor="t" anchorCtr="0" compatLnSpc="1">
+              <a:prstTxWarp prst="textNoShape">
+                <a:avLst/>
+              </a:prstTxWarp>
+            </a:bodyPr>
+            <a:lstStyle/>
+            <a:p>
+              <a:pPr marL="0" marR="0" indent="0" algn="ctr" defTabSz="914400" rtl="0" eaLnBrk="0" fontAlgn="base" latinLnBrk="0" hangingPunct="0">
+                <a:lnSpc>
+                  <a:spcPct val="100000"/>
+                </a:lnSpc>
+                <a:spcBef>
+                  <a:spcPct val="0"/>
+                </a:spcBef>
+                <a:spcAft>
+                  <a:spcPts val="1800"/>
+                </a:spcAft>
+                <a:buClrTx/>
+                <a:buSzTx/>
+                <a:buFontTx/>
+                <a:buNone/>
+                <a:tabLst/>
+              </a:pPr>
+              <a:r>
+                <a:rPr kumimoji="0" lang="en-US" sz="3200" b="1" i="0" u="none" strike="noStrike" cap="none" normalizeH="0" baseline="0" dirty="0">
+                  <a:ln>
+                    <a:noFill/>
+                  </a:ln>
+                  <a:solidFill>
+                    <a:schemeClr val="tx1"/>
+                  </a:solidFill>
+                  <a:effectLst/>
+                  <a:latin typeface="Tahoma" panose="020B0604030504040204" pitchFamily="34" charset="0"/>
+                  <a:ea typeface="Tahoma" panose="020B0604030504040204" pitchFamily="34" charset="0"/>
+                  <a:cs typeface="Tahoma" panose="020B0604030504040204" pitchFamily="34" charset="0"/>
+                </a:rPr>
+                <a:t>A</a:t>
+              </a:r>
+            </a:p>
+          </p:txBody>
+        </p:sp>
+        <p:sp>
+          <p:nvSpPr>
+            <p:cNvPr id="3" name="Oval 2">
+              <a:extLst>
+                <a:ext uri="{FF2B5EF4-FFF2-40B4-BE49-F238E27FC236}">
+                  <a16:creationId xmlns:a16="http://schemas.microsoft.com/office/drawing/2014/main" id="{D7FEB91B-AE61-ED2F-28D1-6985B816DD9B}"/>
+                </a:ext>
+              </a:extLst>
+            </p:cNvPr>
+            <p:cNvSpPr/>
+            <p:nvPr/>
+          </p:nvSpPr>
+          <p:spPr bwMode="auto">
+            <a:xfrm>
+              <a:off x="2141034" y="4858215"/>
+              <a:ext cx="716466" cy="716466"/>
+            </a:xfrm>
+            <a:prstGeom prst="ellipse">
+              <a:avLst/>
+            </a:prstGeom>
+            <a:solidFill>
+              <a:schemeClr val="accent1"/>
+            </a:solidFill>
+            <a:ln w="9525" cap="flat" cmpd="sng" algn="ctr">
+              <a:solidFill>
+                <a:schemeClr val="tx1"/>
+              </a:solidFill>
+              <a:prstDash val="solid"/>
+              <a:round/>
+              <a:headEnd type="none" w="med" len="med"/>
+              <a:tailEnd type="none" w="med" len="med"/>
+            </a:ln>
+            <a:effectLst/>
+          </p:spPr>
+          <p:txBody>
+            <a:bodyPr vert="horz" wrap="square" lIns="91440" tIns="45720" rIns="91440" bIns="45720" numCol="1" rtlCol="0" anchor="t" anchorCtr="0" compatLnSpc="1">
+              <a:prstTxWarp prst="textNoShape">
+                <a:avLst/>
+              </a:prstTxWarp>
+            </a:bodyPr>
+            <a:lstStyle/>
+            <a:p>
+              <a:pPr marL="0" marR="0" indent="0" algn="ctr" defTabSz="914400" rtl="0" eaLnBrk="0" fontAlgn="base" latinLnBrk="0" hangingPunct="0">
+                <a:lnSpc>
+                  <a:spcPct val="100000"/>
+                </a:lnSpc>
+                <a:spcBef>
+                  <a:spcPct val="0"/>
+                </a:spcBef>
+                <a:spcAft>
+                  <a:spcPts val="1800"/>
+                </a:spcAft>
+                <a:buClrTx/>
+                <a:buSzTx/>
+                <a:buFontTx/>
+                <a:buNone/>
+                <a:tabLst/>
+              </a:pPr>
+              <a:r>
+                <a:rPr kumimoji="0" lang="en-US" sz="3200" b="1" i="0" u="none" strike="noStrike" cap="none" normalizeH="0" baseline="0" dirty="0">
+                  <a:ln>
+                    <a:noFill/>
+                  </a:ln>
+                  <a:solidFill>
+                    <a:schemeClr val="tx1"/>
+                  </a:solidFill>
+                  <a:effectLst/>
+                  <a:latin typeface="Tahoma" panose="020B0604030504040204" pitchFamily="34" charset="0"/>
+                  <a:ea typeface="Tahoma" panose="020B0604030504040204" pitchFamily="34" charset="0"/>
+                  <a:cs typeface="Tahoma" panose="020B0604030504040204" pitchFamily="34" charset="0"/>
+                </a:rPr>
+                <a:t>C</a:t>
+              </a:r>
+            </a:p>
+          </p:txBody>
+        </p:sp>
+        <p:sp>
+          <p:nvSpPr>
+            <p:cNvPr id="4" name="Oval 3">
+              <a:extLst>
+                <a:ext uri="{FF2B5EF4-FFF2-40B4-BE49-F238E27FC236}">
+                  <a16:creationId xmlns:a16="http://schemas.microsoft.com/office/drawing/2014/main" id="{3F19D3C6-635E-EC81-9A02-7F05D8A8507D}"/>
+                </a:ext>
+              </a:extLst>
+            </p:cNvPr>
+            <p:cNvSpPr/>
+            <p:nvPr/>
+          </p:nvSpPr>
+          <p:spPr bwMode="auto">
+            <a:xfrm>
+              <a:off x="2346867" y="3191573"/>
+              <a:ext cx="716466" cy="716466"/>
+            </a:xfrm>
+            <a:prstGeom prst="ellipse">
+              <a:avLst/>
+            </a:prstGeom>
+            <a:solidFill>
+              <a:schemeClr val="accent1"/>
+            </a:solidFill>
+            <a:ln w="9525" cap="flat" cmpd="sng" algn="ctr">
+              <a:solidFill>
+                <a:schemeClr val="tx1"/>
+              </a:solidFill>
+              <a:prstDash val="solid"/>
+              <a:round/>
+              <a:headEnd type="none" w="med" len="med"/>
+              <a:tailEnd type="none" w="med" len="med"/>
+            </a:ln>
+            <a:effectLst/>
+          </p:spPr>
+          <p:txBody>
+            <a:bodyPr vert="horz" wrap="square" lIns="91440" tIns="45720" rIns="91440" bIns="45720" numCol="1" rtlCol="0" anchor="t" anchorCtr="0" compatLnSpc="1">
+              <a:prstTxWarp prst="textNoShape">
+                <a:avLst/>
+              </a:prstTxWarp>
+            </a:bodyPr>
+            <a:lstStyle/>
+            <a:p>
+              <a:pPr marL="0" marR="0" indent="0" algn="ctr" defTabSz="914400" rtl="0" eaLnBrk="0" fontAlgn="base" latinLnBrk="0" hangingPunct="0">
+                <a:lnSpc>
+                  <a:spcPct val="100000"/>
+                </a:lnSpc>
+                <a:spcBef>
+                  <a:spcPct val="0"/>
+                </a:spcBef>
+                <a:spcAft>
+                  <a:spcPts val="1800"/>
+                </a:spcAft>
+                <a:buClrTx/>
+                <a:buSzTx/>
+                <a:buFontTx/>
+                <a:buNone/>
+                <a:tabLst/>
+              </a:pPr>
+              <a:r>
+                <a:rPr kumimoji="0" lang="en-US" sz="3200" b="1" i="0" u="none" strike="noStrike" cap="none" normalizeH="0" baseline="0" dirty="0">
+                  <a:ln>
+                    <a:noFill/>
+                  </a:ln>
+                  <a:solidFill>
+                    <a:schemeClr val="tx1"/>
+                  </a:solidFill>
+                  <a:effectLst/>
+                  <a:latin typeface="Tahoma" panose="020B0604030504040204" pitchFamily="34" charset="0"/>
+                  <a:ea typeface="Tahoma" panose="020B0604030504040204" pitchFamily="34" charset="0"/>
+                  <a:cs typeface="Tahoma" panose="020B0604030504040204" pitchFamily="34" charset="0"/>
+                </a:rPr>
+                <a:t>B</a:t>
+              </a:r>
+            </a:p>
+          </p:txBody>
+        </p:sp>
+        <p:cxnSp>
+          <p:nvCxnSpPr>
+            <p:cNvPr id="6" name="Straight Connector 5">
+              <a:extLst>
+                <a:ext uri="{FF2B5EF4-FFF2-40B4-BE49-F238E27FC236}">
+                  <a16:creationId xmlns:a16="http://schemas.microsoft.com/office/drawing/2014/main" id="{5B5D722A-8B6A-88F8-8FAA-D83AB1703276}"/>
+                </a:ext>
+              </a:extLst>
+            </p:cNvPr>
+            <p:cNvCxnSpPr>
+              <a:stCxn id="2" idx="7"/>
+              <a:endCxn id="4" idx="3"/>
+            </p:cNvCxnSpPr>
+            <p:nvPr/>
+          </p:nvCxnSpPr>
+          <p:spPr bwMode="auto">
+            <a:xfrm flipV="1">
+              <a:off x="1678342" y="3803115"/>
+              <a:ext cx="773449" cy="219225"/>
+            </a:xfrm>
+            <a:prstGeom prst="line">
+              <a:avLst/>
+            </a:prstGeom>
+            <a:solidFill>
+              <a:schemeClr val="accent1"/>
+            </a:solidFill>
+            <a:ln w="19050" cap="flat" cmpd="sng" algn="ctr">
+              <a:solidFill>
+                <a:schemeClr val="tx1"/>
+              </a:solidFill>
+              <a:prstDash val="solid"/>
+              <a:round/>
+              <a:headEnd type="none" w="med" len="med"/>
+              <a:tailEnd type="none" w="med" len="med"/>
+            </a:ln>
+            <a:effectLst/>
+          </p:spPr>
+        </p:cxnSp>
+        <p:cxnSp>
+          <p:nvCxnSpPr>
+            <p:cNvPr id="9" name="Straight Connector 8">
+              <a:extLst>
+                <a:ext uri="{FF2B5EF4-FFF2-40B4-BE49-F238E27FC236}">
+                  <a16:creationId xmlns:a16="http://schemas.microsoft.com/office/drawing/2014/main" id="{0FFB90CF-6B3C-6E04-D809-BD7235379C24}"/>
+                </a:ext>
+              </a:extLst>
+            </p:cNvPr>
+            <p:cNvCxnSpPr>
+              <a:stCxn id="3" idx="1"/>
+              <a:endCxn id="2" idx="5"/>
+            </p:cNvCxnSpPr>
+            <p:nvPr/>
+          </p:nvCxnSpPr>
+          <p:spPr bwMode="auto">
+            <a:xfrm flipH="1" flipV="1">
+              <a:off x="1678342" y="4528958"/>
+              <a:ext cx="567616" cy="434181"/>
+            </a:xfrm>
+            <a:prstGeom prst="line">
+              <a:avLst/>
+            </a:prstGeom>
+            <a:solidFill>
+              <a:schemeClr val="accent1"/>
+            </a:solidFill>
+            <a:ln w="19050" cap="flat" cmpd="sng" algn="ctr">
+              <a:solidFill>
+                <a:schemeClr val="tx1"/>
+              </a:solidFill>
+              <a:prstDash val="solid"/>
+              <a:round/>
+              <a:headEnd type="none" w="med" len="med"/>
+              <a:tailEnd type="none" w="med" len="med"/>
+            </a:ln>
+            <a:effectLst/>
+          </p:spPr>
+        </p:cxnSp>
+      </p:grpSp>
+      <p:sp>
+        <p:nvSpPr>
+          <p:cNvPr id="13" name="Rectangle 7">
+            <a:extLst>
+              <a:ext uri="{FF2B5EF4-FFF2-40B4-BE49-F238E27FC236}">
+                <a16:creationId xmlns:a16="http://schemas.microsoft.com/office/drawing/2014/main" id="{0C5C35CA-E6F1-D7DA-6381-FBAE60E10FAE}"/>
+              </a:ext>
+            </a:extLst>
+          </p:cNvPr>
+          <p:cNvSpPr>
+            <a:spLocks noChangeArrowheads="1"/>
+          </p:cNvSpPr>
+          <p:nvPr/>
+        </p:nvSpPr>
+        <p:spPr bwMode="auto">
+          <a:xfrm>
+            <a:off x="7092723" y="2087523"/>
+            <a:ext cx="487318" cy="646331"/>
+          </a:xfrm>
+          <a:prstGeom prst="rect">
+            <a:avLst/>
+          </a:prstGeom>
+          <a:noFill/>
+          <a:ln>
+            <a:noFill/>
+          </a:ln>
+          <a:extLst>
+            <a:ext uri="{909E8E84-426E-40DD-AFC4-6F175D3DCCD1}">
+              <a14:hiddenFill xmlns:a14="http://schemas.microsoft.com/office/drawing/2010/main">
+                <a:solidFill>
+                  <a:srgbClr val="FFFFFF"/>
+                </a:solidFill>
+              </a14:hiddenFill>
+            </a:ext>
+            <a:ext uri="{91240B29-F687-4F45-9708-019B960494DF}">
+              <a14:hiddenLine xmlns:a14="http://schemas.microsoft.com/office/drawing/2010/main" w="9525">
+                <a:solidFill>
+                  <a:srgbClr val="000000"/>
+                </a:solidFill>
+                <a:miter lim="800000"/>
+                <a:headEnd/>
+                <a:tailEnd/>
+              </a14:hiddenLine>
+            </a:ext>
+          </a:extLst>
+        </p:spPr>
+        <p:txBody>
+          <a:bodyPr wrap="square">
+            <a:spAutoFit/>
+          </a:bodyPr>
+          <a:lstStyle>
+            <a:lvl1pPr>
+              <a:spcBef>
+                <a:spcPct val="20000"/>
+              </a:spcBef>
+              <a:buClr>
+                <a:schemeClr val="hlink"/>
+              </a:buClr>
+              <a:buSzPct val="60000"/>
+              <a:buFont typeface="Monotype Sorts"/>
+              <a:buChar char="l"/>
+              <a:defRPr kumimoji="1" sz="3200">
+                <a:solidFill>
+                  <a:schemeClr val="tx1"/>
+                </a:solidFill>
+                <a:latin typeface="Arial" panose="020B0604020202020204" pitchFamily="34" charset="0"/>
+              </a:defRPr>
+            </a:lvl1pPr>
+            <a:lvl2pPr marL="742950" indent="-285750">
+              <a:spcBef>
+                <a:spcPct val="20000"/>
+              </a:spcBef>
+              <a:buChar char="–"/>
+              <a:defRPr kumimoji="1" sz="2800">
+                <a:solidFill>
+                  <a:schemeClr val="tx1"/>
+                </a:solidFill>
+                <a:latin typeface="Arial" panose="020B0604020202020204" pitchFamily="34" charset="0"/>
+              </a:defRPr>
+            </a:lvl2pPr>
+            <a:lvl3pPr marL="1143000" indent="-228600">
+              <a:spcBef>
+                <a:spcPct val="20000"/>
+              </a:spcBef>
+              <a:buChar char="•"/>
+              <a:defRPr kumimoji="1" sz="2400">
+                <a:solidFill>
+                  <a:schemeClr val="tx1"/>
+                </a:solidFill>
+                <a:latin typeface="Arial" panose="020B0604020202020204" pitchFamily="34" charset="0"/>
+              </a:defRPr>
+            </a:lvl3pPr>
+            <a:lvl4pPr marL="1600200" indent="-228600">
+              <a:spcBef>
+                <a:spcPct val="20000"/>
+              </a:spcBef>
+              <a:buChar char="–"/>
+              <a:defRPr kumimoji="1" sz="2000">
+                <a:solidFill>
+                  <a:schemeClr val="tx1"/>
+                </a:solidFill>
+                <a:latin typeface="Arial" panose="020B0604020202020204" pitchFamily="34" charset="0"/>
+              </a:defRPr>
+            </a:lvl4pPr>
+            <a:lvl5pPr marL="2057400" indent="-228600">
+              <a:spcBef>
+                <a:spcPct val="20000"/>
+              </a:spcBef>
+              <a:buChar char="»"/>
+              <a:defRPr kumimoji="1" sz="2000">
+                <a:solidFill>
+                  <a:schemeClr val="tx1"/>
+                </a:solidFill>
+                <a:latin typeface="Arial" panose="020B0604020202020204" pitchFamily="34" charset="0"/>
+              </a:defRPr>
+            </a:lvl5pPr>
+            <a:lvl6pPr marL="2514600" indent="-228600" eaLnBrk="0" fontAlgn="base" hangingPunct="0">
+              <a:spcBef>
+                <a:spcPct val="20000"/>
+              </a:spcBef>
+              <a:spcAft>
+                <a:spcPct val="0"/>
+              </a:spcAft>
+              <a:buChar char="»"/>
+              <a:defRPr kumimoji="1" sz="2000">
+                <a:solidFill>
+                  <a:schemeClr val="tx1"/>
+                </a:solidFill>
+                <a:latin typeface="Arial" panose="020B0604020202020204" pitchFamily="34" charset="0"/>
+              </a:defRPr>
+            </a:lvl6pPr>
+            <a:lvl7pPr marL="2971800" indent="-228600" eaLnBrk="0" fontAlgn="base" hangingPunct="0">
+              <a:spcBef>
+                <a:spcPct val="20000"/>
+              </a:spcBef>
+              <a:spcAft>
+                <a:spcPct val="0"/>
+              </a:spcAft>
+              <a:buChar char="»"/>
+              <a:defRPr kumimoji="1" sz="2000">
+                <a:solidFill>
+                  <a:schemeClr val="tx1"/>
+                </a:solidFill>
+                <a:latin typeface="Arial" panose="020B0604020202020204" pitchFamily="34" charset="0"/>
+              </a:defRPr>
+            </a:lvl7pPr>
+            <a:lvl8pPr marL="3429000" indent="-228600" eaLnBrk="0" fontAlgn="base" hangingPunct="0">
+              <a:spcBef>
+                <a:spcPct val="20000"/>
+              </a:spcBef>
+              <a:spcAft>
+                <a:spcPct val="0"/>
+              </a:spcAft>
+              <a:buChar char="»"/>
+              <a:defRPr kumimoji="1" sz="2000">
+                <a:solidFill>
+                  <a:schemeClr val="tx1"/>
+                </a:solidFill>
+                <a:latin typeface="Arial" panose="020B0604020202020204" pitchFamily="34" charset="0"/>
+              </a:defRPr>
+            </a:lvl8pPr>
+            <a:lvl9pPr marL="3886200" indent="-228600" eaLnBrk="0" fontAlgn="base" hangingPunct="0">
+              <a:spcBef>
+                <a:spcPct val="20000"/>
+              </a:spcBef>
+              <a:spcAft>
+                <a:spcPct val="0"/>
+              </a:spcAft>
+              <a:buChar char="»"/>
+              <a:defRPr kumimoji="1" sz="2000">
+                <a:solidFill>
+                  <a:schemeClr val="tx1"/>
+                </a:solidFill>
+                <a:latin typeface="Arial" panose="020B0604020202020204" pitchFamily="34" charset="0"/>
+              </a:defRPr>
+            </a:lvl9pPr>
+          </a:lstStyle>
+          <a:p>
+            <a:pPr eaLnBrk="1" hangingPunct="1">
+              <a:spcBef>
+                <a:spcPct val="0"/>
+              </a:spcBef>
+              <a:buClrTx/>
+              <a:buSzTx/>
+              <a:buFontTx/>
+              <a:buNone/>
+            </a:pPr>
+            <a:r>
+              <a:rPr kumimoji="0" lang="en-US" altLang="en-US" sz="3600" b="1" dirty="0">
+                <a:solidFill>
+                  <a:srgbClr val="2D5CB9"/>
+                </a:solidFill>
+                <a:latin typeface="Times New Roman" panose="02020603050405020304" pitchFamily="18" charset="0"/>
+              </a:rPr>
+              <a:t>4</a:t>
+            </a:r>
+          </a:p>
+        </p:txBody>
+      </p:sp>
+    </p:spTree>
+  </p:cSld>
+  <p:clrMapOvr>
+    <a:masterClrMapping/>
+  </p:clrMapOvr>
+  <p:timing>
+    <p:tnLst>
+      <p:par>
+        <p:cTn id="1" dur="indefinite" restart="never" nodeType="tmRoot">
+          <p:childTnLst>
+            <p:seq concurrent="1" nextAc="seek">
+              <p:cTn id="2" dur="indefinite" nodeType="mainSeq">
+                <p:childTnLst>
+                  <p:par>
+                    <p:cTn id="3" fill="hold">
+                      <p:stCondLst>
+                        <p:cond delay="indefinite"/>
+                      </p:stCondLst>
+                      <p:childTnLst>
+                        <p:par>
+                          <p:cTn id="4" fill="hold">
+                            <p:stCondLst>
+                              <p:cond delay="0"/>
+                            </p:stCondLst>
+                            <p:childTnLst>
+                              <p:par>
+                                <p:cTn id="5" presetID="2" presetClass="entr" presetSubtype="4" fill="hold" grpId="0" nodeType="clickEffect">
+                                  <p:stCondLst>
+                                    <p:cond delay="0"/>
+                                  </p:stCondLst>
+                                  <p:childTnLst>
+                                    <p:set>
+                                      <p:cBhvr>
+                                        <p:cTn id="6" dur="1" fill="hold">
+                                          <p:stCondLst>
+                                            <p:cond delay="0"/>
+                                          </p:stCondLst>
+                                        </p:cTn>
+                                        <p:tgtEl>
+                                          <p:spTgt spid="13"/>
+                                        </p:tgtEl>
+                                        <p:attrNameLst>
+                                          <p:attrName>style.visibility</p:attrName>
+                                        </p:attrNameLst>
+                                      </p:cBhvr>
+                                      <p:to>
+                                        <p:strVal val="visible"/>
+                                      </p:to>
+                                    </p:set>
+                                    <p:anim calcmode="lin" valueType="num">
+                                      <p:cBhvr additive="base">
+                                        <p:cTn id="7" dur="500" fill="hold"/>
+                                        <p:tgtEl>
+                                          <p:spTgt spid="13"/>
+                                        </p:tgtEl>
+                                        <p:attrNameLst>
+                                          <p:attrName>ppt_x</p:attrName>
+                                        </p:attrNameLst>
+                                      </p:cBhvr>
+                                      <p:tavLst>
+                                        <p:tav tm="0">
+                                          <p:val>
+                                            <p:strVal val="#ppt_x"/>
+                                          </p:val>
+                                        </p:tav>
+                                        <p:tav tm="100000">
+                                          <p:val>
+                                            <p:strVal val="#ppt_x"/>
+                                          </p:val>
+                                        </p:tav>
+                                      </p:tavLst>
+                                    </p:anim>
+                                    <p:anim calcmode="lin" valueType="num">
+                                      <p:cBhvr additive="base">
+                                        <p:cTn id="8" dur="500" fill="hold"/>
+                                        <p:tgtEl>
+                                          <p:spTgt spid="13"/>
+                                        </p:tgtEl>
+                                        <p:attrNameLst>
+                                          <p:attrName>ppt_y</p:attrName>
+                                        </p:attrNameLst>
+                                      </p:cBhvr>
+                                      <p:tavLst>
+                                        <p:tav tm="0">
+                                          <p:val>
+                                            <p:strVal val="1+#ppt_h/2"/>
+                                          </p:val>
+                                        </p:tav>
+                                        <p:tav tm="100000">
+                                          <p:val>
+                                            <p:strVal val="#ppt_y"/>
+                                          </p:val>
+                                        </p:tav>
+                                      </p:tavLst>
+                                    </p:anim>
+                                  </p:childTnLst>
+                                </p:cTn>
+                              </p:par>
+                            </p:childTnLst>
+                          </p:cTn>
+                        </p:par>
+                      </p:childTnLst>
+                    </p:cTn>
+                  </p:par>
+                </p:childTnLst>
+              </p:cTn>
+              <p:prevCondLst>
+                <p:cond evt="onPrev" delay="0">
+                  <p:tgtEl>
+                    <p:sldTgt/>
+                  </p:tgtEl>
+                </p:cond>
+              </p:prevCondLst>
+              <p:nextCondLst>
+                <p:cond evt="onNext" delay="0">
+                  <p:tgtEl>
+                    <p:sldTgt/>
+                  </p:tgtEl>
+                </p:cond>
+              </p:nextCondLst>
+            </p:seq>
+          </p:childTnLst>
+        </p:cTn>
+      </p:par>
+    </p:tnLst>
+    <p:bldLst>
+      <p:bldP spid="13" grpId="0"/>
+    </p:bldLst>
+  </p:timing>
+</p:sld>
+</file>
+
+<file path=ppt/slides/slide21.xml><?xml version="1.0" encoding="utf-8"?>
+<p:sld xmlns:a="http://schemas.openxmlformats.org/drawingml/2006/main" xmlns:r="http://schemas.openxmlformats.org/officeDocument/2006/relationships" xmlns:p="http://schemas.openxmlformats.org/presentationml/2006/main">
+  <p:cSld>
+    <p:spTree>
+      <p:nvGrpSpPr>
+        <p:cNvPr id="1" name=""/>
+        <p:cNvGrpSpPr/>
+        <p:nvPr/>
+      </p:nvGrpSpPr>
+      <p:grpSpPr>
+        <a:xfrm>
+          <a:off x="0" y="0"/>
+          <a:ext cx="0" cy="0"/>
+          <a:chOff x="0" y="0"/>
+          <a:chExt cx="0" cy="0"/>
+        </a:xfrm>
+      </p:grpSpPr>
+      <p:sp>
+        <p:nvSpPr>
+          <p:cNvPr id="28675" name="Rectangle 2">
+            <a:extLst>
+              <a:ext uri="{FF2B5EF4-FFF2-40B4-BE49-F238E27FC236}">
+                <a16:creationId xmlns:a16="http://schemas.microsoft.com/office/drawing/2014/main" id="{309F6BEF-77E2-4D32-B878-D4120D86645F}"/>
+              </a:ext>
+            </a:extLst>
+          </p:cNvPr>
+          <p:cNvSpPr>
+            <a:spLocks noGrp="1" noChangeArrowheads="1"/>
+          </p:cNvSpPr>
+          <p:nvPr>
+            <p:ph type="title"/>
+          </p:nvPr>
+        </p:nvSpPr>
+        <p:spPr>
+          <a:xfrm>
+            <a:off x="457200" y="6350"/>
+            <a:ext cx="8488363" cy="1143000"/>
+          </a:xfrm>
+        </p:spPr>
+        <p:txBody>
+          <a:bodyPr/>
+          <a:lstStyle/>
+          <a:p>
+            <a:pPr algn="ctr"/>
+            <a:r>
+              <a:rPr lang="en-US" altLang="en-US" sz="3600" b="1" dirty="0">
+                <a:latin typeface="Times New Roman" panose="02020603050405020304" pitchFamily="18" charset="0"/>
+                <a:cs typeface="Times New Roman" panose="02020603050405020304" pitchFamily="18" charset="0"/>
+              </a:rPr>
+              <a:t>Counting Walks in Adjacency Matrices</a:t>
+            </a:r>
+            <a:endParaRPr lang="en-US" altLang="en-US" sz="3600" dirty="0">
+              <a:latin typeface="Times New Roman" panose="02020603050405020304" pitchFamily="18" charset="0"/>
+              <a:cs typeface="Times New Roman" panose="02020603050405020304" pitchFamily="18" charset="0"/>
+            </a:endParaRPr>
+          </a:p>
+        </p:txBody>
+      </p:sp>
+      <p:sp>
+        <p:nvSpPr>
+          <p:cNvPr id="28676" name="Rectangle 7">
+            <a:extLst>
+              <a:ext uri="{FF2B5EF4-FFF2-40B4-BE49-F238E27FC236}">
+                <a16:creationId xmlns:a16="http://schemas.microsoft.com/office/drawing/2014/main" id="{5673CD53-C556-42EB-A397-08EBD93B9CB8}"/>
+              </a:ext>
+            </a:extLst>
+          </p:cNvPr>
+          <p:cNvSpPr>
+            <a:spLocks noChangeArrowheads="1"/>
+          </p:cNvSpPr>
+          <p:nvPr/>
+        </p:nvSpPr>
+        <p:spPr bwMode="auto">
+          <a:xfrm>
+            <a:off x="1066800" y="1533525"/>
+            <a:ext cx="7391400" cy="1077218"/>
+          </a:xfrm>
+          <a:prstGeom prst="rect">
+            <a:avLst/>
+          </a:prstGeom>
+          <a:noFill/>
+          <a:ln>
+            <a:noFill/>
+          </a:ln>
+          <a:extLst>
+            <a:ext uri="{909E8E84-426E-40DD-AFC4-6F175D3DCCD1}">
+              <a14:hiddenFill xmlns:a14="http://schemas.microsoft.com/office/drawing/2010/main">
+                <a:solidFill>
+                  <a:srgbClr val="FFFFFF"/>
+                </a:solidFill>
+              </a14:hiddenFill>
+            </a:ext>
+            <a:ext uri="{91240B29-F687-4F45-9708-019B960494DF}">
+              <a14:hiddenLine xmlns:a14="http://schemas.microsoft.com/office/drawing/2010/main" w="9525">
+                <a:solidFill>
+                  <a:srgbClr val="000000"/>
+                </a:solidFill>
+                <a:miter lim="800000"/>
+                <a:headEnd/>
+                <a:tailEnd/>
+              </a14:hiddenLine>
+            </a:ext>
+          </a:extLst>
+        </p:spPr>
+        <p:txBody>
+          <a:bodyPr>
+            <a:spAutoFit/>
+          </a:bodyPr>
+          <a:lstStyle>
+            <a:lvl1pPr>
+              <a:spcBef>
+                <a:spcPct val="20000"/>
+              </a:spcBef>
+              <a:buClr>
+                <a:schemeClr val="hlink"/>
+              </a:buClr>
+              <a:buSzPct val="60000"/>
+              <a:buFont typeface="Monotype Sorts"/>
+              <a:buChar char="l"/>
+              <a:defRPr kumimoji="1" sz="3200">
+                <a:solidFill>
+                  <a:schemeClr val="tx1"/>
+                </a:solidFill>
+                <a:latin typeface="Arial" panose="020B0604020202020204" pitchFamily="34" charset="0"/>
+              </a:defRPr>
+            </a:lvl1pPr>
+            <a:lvl2pPr marL="742950" indent="-285750">
+              <a:spcBef>
+                <a:spcPct val="20000"/>
+              </a:spcBef>
+              <a:buChar char="–"/>
+              <a:defRPr kumimoji="1" sz="2800">
+                <a:solidFill>
+                  <a:schemeClr val="tx1"/>
+                </a:solidFill>
+                <a:latin typeface="Arial" panose="020B0604020202020204" pitchFamily="34" charset="0"/>
+              </a:defRPr>
+            </a:lvl2pPr>
+            <a:lvl3pPr marL="1143000" indent="-228600">
+              <a:spcBef>
+                <a:spcPct val="20000"/>
+              </a:spcBef>
+              <a:buChar char="•"/>
+              <a:defRPr kumimoji="1" sz="2400">
+                <a:solidFill>
+                  <a:schemeClr val="tx1"/>
+                </a:solidFill>
+                <a:latin typeface="Arial" panose="020B0604020202020204" pitchFamily="34" charset="0"/>
+              </a:defRPr>
+            </a:lvl3pPr>
+            <a:lvl4pPr marL="1600200" indent="-228600">
+              <a:spcBef>
+                <a:spcPct val="20000"/>
+              </a:spcBef>
+              <a:buChar char="–"/>
+              <a:defRPr kumimoji="1" sz="2000">
+                <a:solidFill>
+                  <a:schemeClr val="tx1"/>
+                </a:solidFill>
+                <a:latin typeface="Arial" panose="020B0604020202020204" pitchFamily="34" charset="0"/>
+              </a:defRPr>
+            </a:lvl4pPr>
+            <a:lvl5pPr marL="2057400" indent="-228600">
+              <a:spcBef>
+                <a:spcPct val="20000"/>
+              </a:spcBef>
+              <a:buChar char="»"/>
+              <a:defRPr kumimoji="1" sz="2000">
+                <a:solidFill>
+                  <a:schemeClr val="tx1"/>
+                </a:solidFill>
+                <a:latin typeface="Arial" panose="020B0604020202020204" pitchFamily="34" charset="0"/>
+              </a:defRPr>
+            </a:lvl5pPr>
+            <a:lvl6pPr marL="2514600" indent="-228600" eaLnBrk="0" fontAlgn="base" hangingPunct="0">
+              <a:spcBef>
+                <a:spcPct val="20000"/>
+              </a:spcBef>
+              <a:spcAft>
+                <a:spcPct val="0"/>
+              </a:spcAft>
+              <a:buChar char="»"/>
+              <a:defRPr kumimoji="1" sz="2000">
+                <a:solidFill>
+                  <a:schemeClr val="tx1"/>
+                </a:solidFill>
+                <a:latin typeface="Arial" panose="020B0604020202020204" pitchFamily="34" charset="0"/>
+              </a:defRPr>
+            </a:lvl6pPr>
+            <a:lvl7pPr marL="2971800" indent="-228600" eaLnBrk="0" fontAlgn="base" hangingPunct="0">
+              <a:spcBef>
+                <a:spcPct val="20000"/>
+              </a:spcBef>
+              <a:spcAft>
+                <a:spcPct val="0"/>
+              </a:spcAft>
+              <a:buChar char="»"/>
+              <a:defRPr kumimoji="1" sz="2000">
+                <a:solidFill>
+                  <a:schemeClr val="tx1"/>
+                </a:solidFill>
+                <a:latin typeface="Arial" panose="020B0604020202020204" pitchFamily="34" charset="0"/>
+              </a:defRPr>
+            </a:lvl7pPr>
+            <a:lvl8pPr marL="3429000" indent="-228600" eaLnBrk="0" fontAlgn="base" hangingPunct="0">
+              <a:spcBef>
+                <a:spcPct val="20000"/>
+              </a:spcBef>
+              <a:spcAft>
+                <a:spcPct val="0"/>
+              </a:spcAft>
+              <a:buChar char="»"/>
+              <a:defRPr kumimoji="1" sz="2000">
+                <a:solidFill>
+                  <a:schemeClr val="tx1"/>
+                </a:solidFill>
+                <a:latin typeface="Arial" panose="020B0604020202020204" pitchFamily="34" charset="0"/>
+              </a:defRPr>
+            </a:lvl8pPr>
+            <a:lvl9pPr marL="3886200" indent="-228600" eaLnBrk="0" fontAlgn="base" hangingPunct="0">
+              <a:spcBef>
+                <a:spcPct val="20000"/>
+              </a:spcBef>
+              <a:spcAft>
+                <a:spcPct val="0"/>
+              </a:spcAft>
+              <a:buChar char="»"/>
+              <a:defRPr kumimoji="1" sz="2000">
+                <a:solidFill>
+                  <a:schemeClr val="tx1"/>
+                </a:solidFill>
+                <a:latin typeface="Arial" panose="020B0604020202020204" pitchFamily="34" charset="0"/>
+              </a:defRPr>
+            </a:lvl9pPr>
+          </a:lstStyle>
+          <a:p>
+            <a:pPr eaLnBrk="1" hangingPunct="1">
+              <a:spcBef>
+                <a:spcPct val="0"/>
+              </a:spcBef>
+              <a:buClrTx/>
+              <a:buSzTx/>
+              <a:buFontTx/>
+              <a:buNone/>
+            </a:pPr>
+            <a:r>
+              <a:rPr kumimoji="0" lang="en-US" altLang="en-US" dirty="0">
+                <a:latin typeface="Times New Roman" panose="02020603050405020304" pitchFamily="18" charset="0"/>
+              </a:rPr>
+              <a:t>How many walks of length </a:t>
+            </a:r>
+            <a:r>
+              <a:rPr kumimoji="0" lang="en-US" altLang="en-US" b="1" dirty="0">
+                <a:highlight>
+                  <a:srgbClr val="FFFF00"/>
+                </a:highlight>
+                <a:latin typeface="Times New Roman" panose="02020603050405020304" pitchFamily="18" charset="0"/>
+              </a:rPr>
+              <a:t>2</a:t>
+            </a:r>
+            <a:r>
+              <a:rPr kumimoji="0" lang="en-US" altLang="en-US" dirty="0">
+                <a:latin typeface="Times New Roman" panose="02020603050405020304" pitchFamily="18" charset="0"/>
+              </a:rPr>
+              <a:t> exists in this Adjacency matrix? </a:t>
+            </a:r>
+          </a:p>
+        </p:txBody>
+      </p:sp>
+      <p:graphicFrame>
+        <p:nvGraphicFramePr>
+          <p:cNvPr id="8" name="Table 7" descr="The adjacency matrix">
+            <a:extLst>
+              <a:ext uri="{FF2B5EF4-FFF2-40B4-BE49-F238E27FC236}">
+                <a16:creationId xmlns:a16="http://schemas.microsoft.com/office/drawing/2014/main" id="{619D650B-D2F5-4A3F-95CD-9F310E58FF6F}"/>
+              </a:ext>
+            </a:extLst>
+          </p:cNvPr>
+          <p:cNvGraphicFramePr>
+            <a:graphicFrameLocks noGrp="1"/>
+          </p:cNvGraphicFramePr>
+          <p:nvPr/>
+        </p:nvGraphicFramePr>
+        <p:xfrm>
+          <a:off x="4151041" y="3140186"/>
           <a:ext cx="3429000" cy="2243140"/>
         </p:xfrm>
         <a:graphic>
@@ -15854,132 +18385,11 @@
         </a:graphic>
       </p:graphicFrame>
     </p:spTree>
-  </p:cSld>
-  <p:clrMapOvr>
-    <a:masterClrMapping/>
-  </p:clrMapOvr>
-</p:sld>
-</file>
-
-<file path=ppt/slides/slide21.xml><?xml version="1.0" encoding="utf-8"?>
-<p:sld xmlns:a="http://schemas.openxmlformats.org/drawingml/2006/main" xmlns:r="http://schemas.openxmlformats.org/officeDocument/2006/relationships" xmlns:p="http://schemas.openxmlformats.org/presentationml/2006/main">
-  <p:cSld>
-    <p:spTree>
-      <p:nvGrpSpPr>
-        <p:cNvPr id="1" name=""/>
-        <p:cNvGrpSpPr/>
-        <p:nvPr/>
-      </p:nvGrpSpPr>
-      <p:grpSpPr>
-        <a:xfrm>
-          <a:off x="0" y="0"/>
-          <a:ext cx="0" cy="0"/>
-          <a:chOff x="0" y="0"/>
-          <a:chExt cx="0" cy="0"/>
-        </a:xfrm>
-      </p:grpSpPr>
-      <p:sp>
-        <p:nvSpPr>
-          <p:cNvPr id="30723" name="Rectangle 2">
-            <a:extLst>
-              <a:ext uri="{FF2B5EF4-FFF2-40B4-BE49-F238E27FC236}">
-                <a16:creationId xmlns:a16="http://schemas.microsoft.com/office/drawing/2014/main" id="{790BB70D-BC8C-42FD-B9E8-BCDEEAA74EB4}"/>
-              </a:ext>
-            </a:extLst>
-          </p:cNvPr>
-          <p:cNvSpPr>
-            <a:spLocks noGrp="1" noChangeArrowheads="1"/>
-          </p:cNvSpPr>
-          <p:nvPr>
-            <p:ph type="title"/>
-          </p:nvPr>
-        </p:nvSpPr>
-        <p:spPr>
-          <a:xfrm>
-            <a:off x="457200" y="6350"/>
-            <a:ext cx="8488363" cy="1143000"/>
-          </a:xfrm>
-        </p:spPr>
-        <p:txBody>
-          <a:bodyPr/>
-          <a:lstStyle/>
-          <a:p>
-            <a:pPr algn="ctr"/>
-            <a:r>
-              <a:rPr lang="en-US" altLang="en-US" b="1" dirty="0">
-                <a:latin typeface="Times New Roman" panose="02020603050405020304" pitchFamily="18" charset="0"/>
-                <a:cs typeface="Times New Roman" panose="02020603050405020304" pitchFamily="18" charset="0"/>
-              </a:rPr>
-              <a:t>Matrix Multiplication</a:t>
-            </a:r>
-            <a:endParaRPr lang="en-US" altLang="en-US" dirty="0">
-              <a:latin typeface="Times New Roman" panose="02020603050405020304" pitchFamily="18" charset="0"/>
-              <a:cs typeface="Times New Roman" panose="02020603050405020304" pitchFamily="18" charset="0"/>
-            </a:endParaRPr>
-          </a:p>
-        </p:txBody>
-      </p:sp>
-      <p:pic>
-        <p:nvPicPr>
-          <p:cNvPr id="30724" name="Picture 2" descr="The first row of one matrix is multiplied by the first column of an identical matrix to get the top left entry in the resultant matrix. &#10;The matrix is a 3 by 3 matrix:&#10;0 1 1&#10;1 0 0&#10;1 0 0&#10;To multiple the first row, 0 1 1, by the first column, 0 1 1, you multiply the first times first, then second times second, then third times third, and then sum the results, like so:&#10;0*0 + 1*1 + 1*1 = 2">
-            <a:extLst>
-              <a:ext uri="{FF2B5EF4-FFF2-40B4-BE49-F238E27FC236}">
-                <a16:creationId xmlns:a16="http://schemas.microsoft.com/office/drawing/2014/main" id="{FF3F6163-B9FB-4419-B236-33CA5ECA5B82}"/>
-              </a:ext>
-            </a:extLst>
-          </p:cNvPr>
-          <p:cNvPicPr>
-            <a:picLocks noChangeAspect="1" noChangeArrowheads="1"/>
-          </p:cNvPicPr>
-          <p:nvPr/>
-        </p:nvPicPr>
-        <p:blipFill>
-          <a:blip r:embed="rId3">
-            <a:extLst>
-              <a:ext uri="{28A0092B-C50C-407E-A947-70E740481C1C}">
-                <a14:useLocalDpi xmlns:a14="http://schemas.microsoft.com/office/drawing/2010/main" val="0"/>
-              </a:ext>
-            </a:extLst>
-          </a:blip>
-          <a:srcRect/>
-          <a:stretch>
-            <a:fillRect/>
-          </a:stretch>
-        </p:blipFill>
-        <p:spPr bwMode="auto">
-          <a:xfrm>
-            <a:off x="1524000" y="1600200"/>
-            <a:ext cx="6515100" cy="3733800"/>
-          </a:xfrm>
-          <a:prstGeom prst="rect">
-            <a:avLst/>
-          </a:prstGeom>
-          <a:noFill/>
-          <a:ln>
-            <a:noFill/>
-          </a:ln>
-          <a:extLst>
-            <a:ext uri="{909E8E84-426E-40DD-AFC4-6F175D3DCCD1}">
-              <a14:hiddenFill xmlns:a14="http://schemas.microsoft.com/office/drawing/2010/main">
-                <a:solidFill>
-                  <a:srgbClr val="FFFFFF"/>
-                </a:solidFill>
-              </a14:hiddenFill>
-            </a:ext>
-            <a:ext uri="{91240B29-F687-4F45-9708-019B960494DF}">
-              <a14:hiddenLine xmlns:a14="http://schemas.microsoft.com/office/drawing/2010/main" w="9525">
-                <a:solidFill>
-                  <a:srgbClr val="000000"/>
-                </a:solidFill>
-                <a:miter lim="800000"/>
-                <a:headEnd/>
-                <a:tailEnd/>
-              </a14:hiddenLine>
-            </a:ext>
-          </a:extLst>
-        </p:spPr>
-      </p:pic>
-    </p:spTree>
+    <p:extLst>
+      <p:ext uri="{BB962C8B-B14F-4D97-AF65-F5344CB8AC3E}">
+        <p14:creationId xmlns:p14="http://schemas.microsoft.com/office/powerpoint/2010/main" val="3296743869"/>
+      </p:ext>
+    </p:extLst>
   </p:cSld>
   <p:clrMapOvr>
     <a:masterClrMapping/>
@@ -16106,6 +18516,2189 @@
 </file>
 
 <file path=ppt/slides/slide23.xml><?xml version="1.0" encoding="utf-8"?>
+<p:sld xmlns:a="http://schemas.openxmlformats.org/drawingml/2006/main" xmlns:r="http://schemas.openxmlformats.org/officeDocument/2006/relationships" xmlns:p="http://schemas.openxmlformats.org/presentationml/2006/main">
+  <p:cSld>
+    <p:spTree>
+      <p:nvGrpSpPr>
+        <p:cNvPr id="1" name=""/>
+        <p:cNvGrpSpPr/>
+        <p:nvPr/>
+      </p:nvGrpSpPr>
+      <p:grpSpPr>
+        <a:xfrm>
+          <a:off x="0" y="0"/>
+          <a:ext cx="0" cy="0"/>
+          <a:chOff x="0" y="0"/>
+          <a:chExt cx="0" cy="0"/>
+        </a:xfrm>
+      </p:grpSpPr>
+      <p:sp>
+        <p:nvSpPr>
+          <p:cNvPr id="30723" name="Rectangle 2">
+            <a:extLst>
+              <a:ext uri="{FF2B5EF4-FFF2-40B4-BE49-F238E27FC236}">
+                <a16:creationId xmlns:a16="http://schemas.microsoft.com/office/drawing/2014/main" id="{790BB70D-BC8C-42FD-B9E8-BCDEEAA74EB4}"/>
+              </a:ext>
+            </a:extLst>
+          </p:cNvPr>
+          <p:cNvSpPr>
+            <a:spLocks noGrp="1" noChangeArrowheads="1"/>
+          </p:cNvSpPr>
+          <p:nvPr>
+            <p:ph type="title"/>
+          </p:nvPr>
+        </p:nvSpPr>
+        <p:spPr>
+          <a:xfrm>
+            <a:off x="457200" y="6350"/>
+            <a:ext cx="8488363" cy="1143000"/>
+          </a:xfrm>
+        </p:spPr>
+        <p:txBody>
+          <a:bodyPr/>
+          <a:lstStyle/>
+          <a:p>
+            <a:pPr algn="ctr"/>
+            <a:r>
+              <a:rPr lang="en-US" altLang="en-US" b="1" dirty="0">
+                <a:latin typeface="Times New Roman" panose="02020603050405020304" pitchFamily="18" charset="0"/>
+                <a:cs typeface="Times New Roman" panose="02020603050405020304" pitchFamily="18" charset="0"/>
+              </a:rPr>
+              <a:t>Matrix Multiplication</a:t>
+            </a:r>
+            <a:endParaRPr lang="en-US" altLang="en-US" dirty="0">
+              <a:latin typeface="Times New Roman" panose="02020603050405020304" pitchFamily="18" charset="0"/>
+              <a:cs typeface="Times New Roman" panose="02020603050405020304" pitchFamily="18" charset="0"/>
+            </a:endParaRPr>
+          </a:p>
+        </p:txBody>
+      </p:sp>
+      <p:pic>
+        <p:nvPicPr>
+          <p:cNvPr id="30724" name="Picture 2" descr="The first row of one matrix is multiplied by the first column of an identical matrix to get the top left entry in the resultant matrix. &#10;The matrix is a 3 by 3 matrix:&#10;0 1 1&#10;1 0 0&#10;1 0 0&#10;To multiple the first row, 0 1 1, by the first column, 0 1 1, you multiply the first times first, then second times second, then third times third, and then sum the results, like so:&#10;0*0 + 1*1 + 1*1 = 2">
+            <a:extLst>
+              <a:ext uri="{FF2B5EF4-FFF2-40B4-BE49-F238E27FC236}">
+                <a16:creationId xmlns:a16="http://schemas.microsoft.com/office/drawing/2014/main" id="{FF3F6163-B9FB-4419-B236-33CA5ECA5B82}"/>
+              </a:ext>
+            </a:extLst>
+          </p:cNvPr>
+          <p:cNvPicPr>
+            <a:picLocks noChangeAspect="1" noChangeArrowheads="1"/>
+          </p:cNvPicPr>
+          <p:nvPr/>
+        </p:nvPicPr>
+        <p:blipFill>
+          <a:blip r:embed="rId3">
+            <a:extLst>
+              <a:ext uri="{28A0092B-C50C-407E-A947-70E740481C1C}">
+                <a14:useLocalDpi xmlns:a14="http://schemas.microsoft.com/office/drawing/2010/main" val="0"/>
+              </a:ext>
+            </a:extLst>
+          </a:blip>
+          <a:srcRect/>
+          <a:stretch>
+            <a:fillRect/>
+          </a:stretch>
+        </p:blipFill>
+        <p:spPr bwMode="auto">
+          <a:xfrm>
+            <a:off x="1524000" y="1600200"/>
+            <a:ext cx="6515100" cy="3733800"/>
+          </a:xfrm>
+          <a:prstGeom prst="rect">
+            <a:avLst/>
+          </a:prstGeom>
+          <a:noFill/>
+          <a:ln>
+            <a:noFill/>
+          </a:ln>
+          <a:extLst>
+            <a:ext uri="{909E8E84-426E-40DD-AFC4-6F175D3DCCD1}">
+              <a14:hiddenFill xmlns:a14="http://schemas.microsoft.com/office/drawing/2010/main">
+                <a:solidFill>
+                  <a:srgbClr val="FFFFFF"/>
+                </a:solidFill>
+              </a14:hiddenFill>
+            </a:ext>
+            <a:ext uri="{91240B29-F687-4F45-9708-019B960494DF}">
+              <a14:hiddenLine xmlns:a14="http://schemas.microsoft.com/office/drawing/2010/main" w="9525">
+                <a:solidFill>
+                  <a:srgbClr val="000000"/>
+                </a:solidFill>
+                <a:miter lim="800000"/>
+                <a:headEnd/>
+                <a:tailEnd/>
+              </a14:hiddenLine>
+            </a:ext>
+          </a:extLst>
+        </p:spPr>
+      </p:pic>
+    </p:spTree>
+  </p:cSld>
+  <p:clrMapOvr>
+    <a:masterClrMapping/>
+  </p:clrMapOvr>
+</p:sld>
+</file>
+
+<file path=ppt/slides/slide24.xml><?xml version="1.0" encoding="utf-8"?>
+<p:sld xmlns:a="http://schemas.openxmlformats.org/drawingml/2006/main" xmlns:r="http://schemas.openxmlformats.org/officeDocument/2006/relationships" xmlns:p="http://schemas.openxmlformats.org/presentationml/2006/main">
+  <p:cSld>
+    <p:spTree>
+      <p:nvGrpSpPr>
+        <p:cNvPr id="1" name=""/>
+        <p:cNvGrpSpPr/>
+        <p:nvPr/>
+      </p:nvGrpSpPr>
+      <p:grpSpPr>
+        <a:xfrm>
+          <a:off x="0" y="0"/>
+          <a:ext cx="0" cy="0"/>
+          <a:chOff x="0" y="0"/>
+          <a:chExt cx="0" cy="0"/>
+        </a:xfrm>
+      </p:grpSpPr>
+      <p:sp>
+        <p:nvSpPr>
+          <p:cNvPr id="28675" name="Rectangle 2">
+            <a:extLst>
+              <a:ext uri="{FF2B5EF4-FFF2-40B4-BE49-F238E27FC236}">
+                <a16:creationId xmlns:a16="http://schemas.microsoft.com/office/drawing/2014/main" id="{309F6BEF-77E2-4D32-B878-D4120D86645F}"/>
+              </a:ext>
+            </a:extLst>
+          </p:cNvPr>
+          <p:cNvSpPr>
+            <a:spLocks noGrp="1" noChangeArrowheads="1"/>
+          </p:cNvSpPr>
+          <p:nvPr>
+            <p:ph type="title"/>
+          </p:nvPr>
+        </p:nvSpPr>
+        <p:spPr>
+          <a:xfrm>
+            <a:off x="457200" y="6350"/>
+            <a:ext cx="8488363" cy="1143000"/>
+          </a:xfrm>
+        </p:spPr>
+        <p:txBody>
+          <a:bodyPr/>
+          <a:lstStyle/>
+          <a:p>
+            <a:pPr algn="ctr"/>
+            <a:r>
+              <a:rPr lang="en-US" altLang="en-US" sz="3600" b="1" dirty="0">
+                <a:latin typeface="Times New Roman" panose="02020603050405020304" pitchFamily="18" charset="0"/>
+                <a:cs typeface="Times New Roman" panose="02020603050405020304" pitchFamily="18" charset="0"/>
+              </a:rPr>
+              <a:t>Counting Walks in Adjacency Matrices</a:t>
+            </a:r>
+            <a:endParaRPr lang="en-US" altLang="en-US" sz="3600" dirty="0">
+              <a:latin typeface="Times New Roman" panose="02020603050405020304" pitchFamily="18" charset="0"/>
+              <a:cs typeface="Times New Roman" panose="02020603050405020304" pitchFamily="18" charset="0"/>
+            </a:endParaRPr>
+          </a:p>
+        </p:txBody>
+      </p:sp>
+      <p:sp>
+        <p:nvSpPr>
+          <p:cNvPr id="28676" name="Rectangle 7">
+            <a:extLst>
+              <a:ext uri="{FF2B5EF4-FFF2-40B4-BE49-F238E27FC236}">
+                <a16:creationId xmlns:a16="http://schemas.microsoft.com/office/drawing/2014/main" id="{5673CD53-C556-42EB-A397-08EBD93B9CB8}"/>
+              </a:ext>
+            </a:extLst>
+          </p:cNvPr>
+          <p:cNvSpPr>
+            <a:spLocks noChangeArrowheads="1"/>
+          </p:cNvSpPr>
+          <p:nvPr/>
+        </p:nvSpPr>
+        <p:spPr bwMode="auto">
+          <a:xfrm>
+            <a:off x="1005681" y="1218753"/>
+            <a:ext cx="7391400" cy="1200329"/>
+          </a:xfrm>
+          <a:prstGeom prst="rect">
+            <a:avLst/>
+          </a:prstGeom>
+          <a:noFill/>
+          <a:ln>
+            <a:noFill/>
+          </a:ln>
+          <a:extLst>
+            <a:ext uri="{909E8E84-426E-40DD-AFC4-6F175D3DCCD1}">
+              <a14:hiddenFill xmlns:a14="http://schemas.microsoft.com/office/drawing/2010/main">
+                <a:solidFill>
+                  <a:srgbClr val="FFFFFF"/>
+                </a:solidFill>
+              </a14:hiddenFill>
+            </a:ext>
+            <a:ext uri="{91240B29-F687-4F45-9708-019B960494DF}">
+              <a14:hiddenLine xmlns:a14="http://schemas.microsoft.com/office/drawing/2010/main" w="9525">
+                <a:solidFill>
+                  <a:srgbClr val="000000"/>
+                </a:solidFill>
+                <a:miter lim="800000"/>
+                <a:headEnd/>
+                <a:tailEnd/>
+              </a14:hiddenLine>
+            </a:ext>
+          </a:extLst>
+        </p:spPr>
+        <p:txBody>
+          <a:bodyPr>
+            <a:spAutoFit/>
+          </a:bodyPr>
+          <a:lstStyle>
+            <a:lvl1pPr>
+              <a:spcBef>
+                <a:spcPct val="20000"/>
+              </a:spcBef>
+              <a:buClr>
+                <a:schemeClr val="hlink"/>
+              </a:buClr>
+              <a:buSzPct val="60000"/>
+              <a:buFont typeface="Monotype Sorts"/>
+              <a:buChar char="l"/>
+              <a:defRPr kumimoji="1" sz="3200">
+                <a:solidFill>
+                  <a:schemeClr val="tx1"/>
+                </a:solidFill>
+                <a:latin typeface="Arial" panose="020B0604020202020204" pitchFamily="34" charset="0"/>
+              </a:defRPr>
+            </a:lvl1pPr>
+            <a:lvl2pPr marL="742950" indent="-285750">
+              <a:spcBef>
+                <a:spcPct val="20000"/>
+              </a:spcBef>
+              <a:buChar char="–"/>
+              <a:defRPr kumimoji="1" sz="2800">
+                <a:solidFill>
+                  <a:schemeClr val="tx1"/>
+                </a:solidFill>
+                <a:latin typeface="Arial" panose="020B0604020202020204" pitchFamily="34" charset="0"/>
+              </a:defRPr>
+            </a:lvl2pPr>
+            <a:lvl3pPr marL="1143000" indent="-228600">
+              <a:spcBef>
+                <a:spcPct val="20000"/>
+              </a:spcBef>
+              <a:buChar char="•"/>
+              <a:defRPr kumimoji="1" sz="2400">
+                <a:solidFill>
+                  <a:schemeClr val="tx1"/>
+                </a:solidFill>
+                <a:latin typeface="Arial" panose="020B0604020202020204" pitchFamily="34" charset="0"/>
+              </a:defRPr>
+            </a:lvl3pPr>
+            <a:lvl4pPr marL="1600200" indent="-228600">
+              <a:spcBef>
+                <a:spcPct val="20000"/>
+              </a:spcBef>
+              <a:buChar char="–"/>
+              <a:defRPr kumimoji="1" sz="2000">
+                <a:solidFill>
+                  <a:schemeClr val="tx1"/>
+                </a:solidFill>
+                <a:latin typeface="Arial" panose="020B0604020202020204" pitchFamily="34" charset="0"/>
+              </a:defRPr>
+            </a:lvl4pPr>
+            <a:lvl5pPr marL="2057400" indent="-228600">
+              <a:spcBef>
+                <a:spcPct val="20000"/>
+              </a:spcBef>
+              <a:buChar char="»"/>
+              <a:defRPr kumimoji="1" sz="2000">
+                <a:solidFill>
+                  <a:schemeClr val="tx1"/>
+                </a:solidFill>
+                <a:latin typeface="Arial" panose="020B0604020202020204" pitchFamily="34" charset="0"/>
+              </a:defRPr>
+            </a:lvl5pPr>
+            <a:lvl6pPr marL="2514600" indent="-228600" eaLnBrk="0" fontAlgn="base" hangingPunct="0">
+              <a:spcBef>
+                <a:spcPct val="20000"/>
+              </a:spcBef>
+              <a:spcAft>
+                <a:spcPct val="0"/>
+              </a:spcAft>
+              <a:buChar char="»"/>
+              <a:defRPr kumimoji="1" sz="2000">
+                <a:solidFill>
+                  <a:schemeClr val="tx1"/>
+                </a:solidFill>
+                <a:latin typeface="Arial" panose="020B0604020202020204" pitchFamily="34" charset="0"/>
+              </a:defRPr>
+            </a:lvl6pPr>
+            <a:lvl7pPr marL="2971800" indent="-228600" eaLnBrk="0" fontAlgn="base" hangingPunct="0">
+              <a:spcBef>
+                <a:spcPct val="20000"/>
+              </a:spcBef>
+              <a:spcAft>
+                <a:spcPct val="0"/>
+              </a:spcAft>
+              <a:buChar char="»"/>
+              <a:defRPr kumimoji="1" sz="2000">
+                <a:solidFill>
+                  <a:schemeClr val="tx1"/>
+                </a:solidFill>
+                <a:latin typeface="Arial" panose="020B0604020202020204" pitchFamily="34" charset="0"/>
+              </a:defRPr>
+            </a:lvl7pPr>
+            <a:lvl8pPr marL="3429000" indent="-228600" eaLnBrk="0" fontAlgn="base" hangingPunct="0">
+              <a:spcBef>
+                <a:spcPct val="20000"/>
+              </a:spcBef>
+              <a:spcAft>
+                <a:spcPct val="0"/>
+              </a:spcAft>
+              <a:buChar char="»"/>
+              <a:defRPr kumimoji="1" sz="2000">
+                <a:solidFill>
+                  <a:schemeClr val="tx1"/>
+                </a:solidFill>
+                <a:latin typeface="Arial" panose="020B0604020202020204" pitchFamily="34" charset="0"/>
+              </a:defRPr>
+            </a:lvl8pPr>
+            <a:lvl9pPr marL="3886200" indent="-228600" eaLnBrk="0" fontAlgn="base" hangingPunct="0">
+              <a:spcBef>
+                <a:spcPct val="20000"/>
+              </a:spcBef>
+              <a:spcAft>
+                <a:spcPct val="0"/>
+              </a:spcAft>
+              <a:buChar char="»"/>
+              <a:defRPr kumimoji="1" sz="2000">
+                <a:solidFill>
+                  <a:schemeClr val="tx1"/>
+                </a:solidFill>
+                <a:latin typeface="Arial" panose="020B0604020202020204" pitchFamily="34" charset="0"/>
+              </a:defRPr>
+            </a:lvl9pPr>
+          </a:lstStyle>
+          <a:p>
+            <a:pPr eaLnBrk="1" hangingPunct="1">
+              <a:spcBef>
+                <a:spcPct val="0"/>
+              </a:spcBef>
+              <a:buClrTx/>
+              <a:buSzTx/>
+              <a:buFontTx/>
+              <a:buNone/>
+            </a:pPr>
+            <a:r>
+              <a:rPr kumimoji="0" lang="en-US" altLang="en-US" sz="3600" dirty="0">
+                <a:latin typeface="Times New Roman" panose="02020603050405020304" pitchFamily="18" charset="0"/>
+              </a:rPr>
+              <a:t>How many walks of length </a:t>
+            </a:r>
+            <a:r>
+              <a:rPr kumimoji="0" lang="en-US" altLang="en-US" sz="3600" b="1" dirty="0">
+                <a:latin typeface="Times New Roman" panose="02020603050405020304" pitchFamily="18" charset="0"/>
+              </a:rPr>
+              <a:t>2</a:t>
+            </a:r>
+            <a:br>
+              <a:rPr kumimoji="0" lang="en-US" altLang="en-US" sz="3600" dirty="0">
+                <a:latin typeface="Times New Roman" panose="02020603050405020304" pitchFamily="18" charset="0"/>
+              </a:rPr>
+            </a:br>
+            <a:r>
+              <a:rPr kumimoji="0" lang="en-US" altLang="en-US" sz="3600" dirty="0">
+                <a:latin typeface="Times New Roman" panose="02020603050405020304" pitchFamily="18" charset="0"/>
+              </a:rPr>
+              <a:t>exist in this Adjacency matrix? </a:t>
+            </a:r>
+          </a:p>
+        </p:txBody>
+      </p:sp>
+      <p:graphicFrame>
+        <p:nvGraphicFramePr>
+          <p:cNvPr id="8" name="Table 7" descr="The adjacency matrix">
+            <a:extLst>
+              <a:ext uri="{FF2B5EF4-FFF2-40B4-BE49-F238E27FC236}">
+                <a16:creationId xmlns:a16="http://schemas.microsoft.com/office/drawing/2014/main" id="{619D650B-D2F5-4A3F-95CD-9F310E58FF6F}"/>
+              </a:ext>
+            </a:extLst>
+          </p:cNvPr>
+          <p:cNvGraphicFramePr>
+            <a:graphicFrameLocks noGrp="1"/>
+          </p:cNvGraphicFramePr>
+          <p:nvPr>
+            <p:extLst>
+              <p:ext uri="{D42A27DB-BD31-4B8C-83A1-F6EECF244321}">
+                <p14:modId xmlns:p14="http://schemas.microsoft.com/office/powerpoint/2010/main" val="890110346"/>
+              </p:ext>
+            </p:extLst>
+          </p:nvPr>
+        </p:nvGraphicFramePr>
+        <p:xfrm>
+          <a:off x="4151041" y="3140186"/>
+          <a:ext cx="3429000" cy="2243140"/>
+        </p:xfrm>
+        <a:graphic>
+          <a:graphicData uri="http://schemas.openxmlformats.org/drawingml/2006/table">
+            <a:tbl>
+              <a:tblPr firstRow="1"/>
+              <a:tblGrid>
+                <a:gridCol w="857250">
+                  <a:extLst>
+                    <a:ext uri="{9D8B030D-6E8A-4147-A177-3AD203B41FA5}">
+                      <a16:colId xmlns:a16="http://schemas.microsoft.com/office/drawing/2014/main" val="20000"/>
+                    </a:ext>
+                  </a:extLst>
+                </a:gridCol>
+                <a:gridCol w="857250">
+                  <a:extLst>
+                    <a:ext uri="{9D8B030D-6E8A-4147-A177-3AD203B41FA5}">
+                      <a16:colId xmlns:a16="http://schemas.microsoft.com/office/drawing/2014/main" val="20001"/>
+                    </a:ext>
+                  </a:extLst>
+                </a:gridCol>
+                <a:gridCol w="857250">
+                  <a:extLst>
+                    <a:ext uri="{9D8B030D-6E8A-4147-A177-3AD203B41FA5}">
+                      <a16:colId xmlns:a16="http://schemas.microsoft.com/office/drawing/2014/main" val="20002"/>
+                    </a:ext>
+                  </a:extLst>
+                </a:gridCol>
+                <a:gridCol w="857250">
+                  <a:extLst>
+                    <a:ext uri="{9D8B030D-6E8A-4147-A177-3AD203B41FA5}">
+                      <a16:colId xmlns:a16="http://schemas.microsoft.com/office/drawing/2014/main" val="20003"/>
+                    </a:ext>
+                  </a:extLst>
+                </a:gridCol>
+              </a:tblGrid>
+              <a:tr h="560785">
+                <a:tc>
+                  <a:txBody>
+                    <a:bodyPr/>
+                    <a:lstStyle/>
+                    <a:p>
+                      <a:pPr marL="0" marR="0" algn="ctr">
+                        <a:lnSpc>
+                          <a:spcPct val="115000"/>
+                        </a:lnSpc>
+                        <a:spcBef>
+                          <a:spcPts val="0"/>
+                        </a:spcBef>
+                        <a:spcAft>
+                          <a:spcPts val="0"/>
+                        </a:spcAft>
+                      </a:pPr>
+                      <a:endParaRPr lang="en-US" sz="3200" dirty="0">
+                        <a:latin typeface="Calibri"/>
+                        <a:ea typeface="Calibri"/>
+                        <a:cs typeface="Times New Roman"/>
+                      </a:endParaRPr>
+                    </a:p>
+                  </a:txBody>
+                  <a:tcPr marL="68580" marR="68580" marT="0" marB="0">
+                    <a:lnL w="12700" cap="flat" cmpd="sng" algn="ctr">
+                      <a:solidFill>
+                        <a:srgbClr val="000000"/>
+                      </a:solidFill>
+                      <a:prstDash val="solid"/>
+                      <a:round/>
+                      <a:headEnd type="none" w="med" len="med"/>
+                      <a:tailEnd type="none" w="med" len="med"/>
+                    </a:lnL>
+                    <a:lnR w="12700" cap="flat" cmpd="sng" algn="ctr">
+                      <a:solidFill>
+                        <a:srgbClr val="000000"/>
+                      </a:solidFill>
+                      <a:prstDash val="solid"/>
+                      <a:round/>
+                      <a:headEnd type="none" w="med" len="med"/>
+                      <a:tailEnd type="none" w="med" len="med"/>
+                    </a:lnR>
+                    <a:lnT w="12700" cap="flat" cmpd="sng" algn="ctr">
+                      <a:solidFill>
+                        <a:srgbClr val="000000"/>
+                      </a:solidFill>
+                      <a:prstDash val="solid"/>
+                      <a:round/>
+                      <a:headEnd type="none" w="med" len="med"/>
+                      <a:tailEnd type="none" w="med" len="med"/>
+                    </a:lnT>
+                    <a:lnB w="12700" cap="flat" cmpd="sng" algn="ctr">
+                      <a:solidFill>
+                        <a:srgbClr val="000000"/>
+                      </a:solidFill>
+                      <a:prstDash val="solid"/>
+                      <a:round/>
+                      <a:headEnd type="none" w="med" len="med"/>
+                      <a:tailEnd type="none" w="med" len="med"/>
+                    </a:lnB>
+                    <a:solidFill>
+                      <a:srgbClr val="DBE5F1"/>
+                    </a:solidFill>
+                  </a:tcPr>
+                </a:tc>
+                <a:tc>
+                  <a:txBody>
+                    <a:bodyPr/>
+                    <a:lstStyle/>
+                    <a:p>
+                      <a:pPr marL="0" marR="0" algn="ctr">
+                        <a:lnSpc>
+                          <a:spcPct val="115000"/>
+                        </a:lnSpc>
+                        <a:spcBef>
+                          <a:spcPts val="0"/>
+                        </a:spcBef>
+                        <a:spcAft>
+                          <a:spcPts val="0"/>
+                        </a:spcAft>
+                      </a:pPr>
+                      <a:r>
+                        <a:rPr lang="en-US" sz="3200" b="1" dirty="0">
+                          <a:latin typeface="Calibri"/>
+                          <a:ea typeface="Calibri"/>
+                          <a:cs typeface="Times New Roman"/>
+                        </a:rPr>
+                        <a:t>A</a:t>
+                      </a:r>
+                      <a:endParaRPr lang="en-US" sz="3200" dirty="0">
+                        <a:latin typeface="Calibri"/>
+                        <a:ea typeface="Calibri"/>
+                        <a:cs typeface="Times New Roman"/>
+                      </a:endParaRPr>
+                    </a:p>
+                  </a:txBody>
+                  <a:tcPr marL="68580" marR="68580" marT="0" marB="0">
+                    <a:lnL w="12700" cap="flat" cmpd="sng" algn="ctr">
+                      <a:solidFill>
+                        <a:srgbClr val="000000"/>
+                      </a:solidFill>
+                      <a:prstDash val="solid"/>
+                      <a:round/>
+                      <a:headEnd type="none" w="med" len="med"/>
+                      <a:tailEnd type="none" w="med" len="med"/>
+                    </a:lnL>
+                    <a:lnR w="12700" cap="flat" cmpd="sng" algn="ctr">
+                      <a:solidFill>
+                        <a:srgbClr val="000000"/>
+                      </a:solidFill>
+                      <a:prstDash val="solid"/>
+                      <a:round/>
+                      <a:headEnd type="none" w="med" len="med"/>
+                      <a:tailEnd type="none" w="med" len="med"/>
+                    </a:lnR>
+                    <a:lnT w="12700" cap="flat" cmpd="sng" algn="ctr">
+                      <a:solidFill>
+                        <a:srgbClr val="000000"/>
+                      </a:solidFill>
+                      <a:prstDash val="solid"/>
+                      <a:round/>
+                      <a:headEnd type="none" w="med" len="med"/>
+                      <a:tailEnd type="none" w="med" len="med"/>
+                    </a:lnT>
+                    <a:lnB w="12700" cap="flat" cmpd="sng" algn="ctr">
+                      <a:solidFill>
+                        <a:srgbClr val="000000"/>
+                      </a:solidFill>
+                      <a:prstDash val="solid"/>
+                      <a:round/>
+                      <a:headEnd type="none" w="med" len="med"/>
+                      <a:tailEnd type="none" w="med" len="med"/>
+                    </a:lnB>
+                    <a:solidFill>
+                      <a:srgbClr val="DBE5F1"/>
+                    </a:solidFill>
+                  </a:tcPr>
+                </a:tc>
+                <a:tc>
+                  <a:txBody>
+                    <a:bodyPr/>
+                    <a:lstStyle/>
+                    <a:p>
+                      <a:pPr marL="0" marR="0" algn="ctr">
+                        <a:lnSpc>
+                          <a:spcPct val="115000"/>
+                        </a:lnSpc>
+                        <a:spcBef>
+                          <a:spcPts val="0"/>
+                        </a:spcBef>
+                        <a:spcAft>
+                          <a:spcPts val="0"/>
+                        </a:spcAft>
+                      </a:pPr>
+                      <a:r>
+                        <a:rPr lang="en-US" sz="3200" b="1">
+                          <a:latin typeface="Calibri"/>
+                          <a:ea typeface="Calibri"/>
+                          <a:cs typeface="Times New Roman"/>
+                        </a:rPr>
+                        <a:t>B</a:t>
+                      </a:r>
+                      <a:endParaRPr lang="en-US" sz="3200">
+                        <a:latin typeface="Calibri"/>
+                        <a:ea typeface="Calibri"/>
+                        <a:cs typeface="Times New Roman"/>
+                      </a:endParaRPr>
+                    </a:p>
+                  </a:txBody>
+                  <a:tcPr marL="68580" marR="68580" marT="0" marB="0">
+                    <a:lnL w="12700" cap="flat" cmpd="sng" algn="ctr">
+                      <a:solidFill>
+                        <a:srgbClr val="000000"/>
+                      </a:solidFill>
+                      <a:prstDash val="solid"/>
+                      <a:round/>
+                      <a:headEnd type="none" w="med" len="med"/>
+                      <a:tailEnd type="none" w="med" len="med"/>
+                    </a:lnL>
+                    <a:lnR w="12700" cap="flat" cmpd="sng" algn="ctr">
+                      <a:solidFill>
+                        <a:srgbClr val="000000"/>
+                      </a:solidFill>
+                      <a:prstDash val="solid"/>
+                      <a:round/>
+                      <a:headEnd type="none" w="med" len="med"/>
+                      <a:tailEnd type="none" w="med" len="med"/>
+                    </a:lnR>
+                    <a:lnT w="12700" cap="flat" cmpd="sng" algn="ctr">
+                      <a:solidFill>
+                        <a:srgbClr val="000000"/>
+                      </a:solidFill>
+                      <a:prstDash val="solid"/>
+                      <a:round/>
+                      <a:headEnd type="none" w="med" len="med"/>
+                      <a:tailEnd type="none" w="med" len="med"/>
+                    </a:lnT>
+                    <a:lnB w="12700" cap="flat" cmpd="sng" algn="ctr">
+                      <a:solidFill>
+                        <a:srgbClr val="000000"/>
+                      </a:solidFill>
+                      <a:prstDash val="solid"/>
+                      <a:round/>
+                      <a:headEnd type="none" w="med" len="med"/>
+                      <a:tailEnd type="none" w="med" len="med"/>
+                    </a:lnB>
+                    <a:solidFill>
+                      <a:srgbClr val="DBE5F1"/>
+                    </a:solidFill>
+                  </a:tcPr>
+                </a:tc>
+                <a:tc>
+                  <a:txBody>
+                    <a:bodyPr/>
+                    <a:lstStyle/>
+                    <a:p>
+                      <a:pPr marL="0" marR="0" algn="ctr">
+                        <a:lnSpc>
+                          <a:spcPct val="115000"/>
+                        </a:lnSpc>
+                        <a:spcBef>
+                          <a:spcPts val="0"/>
+                        </a:spcBef>
+                        <a:spcAft>
+                          <a:spcPts val="0"/>
+                        </a:spcAft>
+                      </a:pPr>
+                      <a:r>
+                        <a:rPr lang="en-US" sz="3200" b="1">
+                          <a:latin typeface="Calibri"/>
+                          <a:ea typeface="Calibri"/>
+                          <a:cs typeface="Times New Roman"/>
+                        </a:rPr>
+                        <a:t>C</a:t>
+                      </a:r>
+                      <a:endParaRPr lang="en-US" sz="3200">
+                        <a:latin typeface="Calibri"/>
+                        <a:ea typeface="Calibri"/>
+                        <a:cs typeface="Times New Roman"/>
+                      </a:endParaRPr>
+                    </a:p>
+                  </a:txBody>
+                  <a:tcPr marL="68580" marR="68580" marT="0" marB="0">
+                    <a:lnL w="12700" cap="flat" cmpd="sng" algn="ctr">
+                      <a:solidFill>
+                        <a:srgbClr val="000000"/>
+                      </a:solidFill>
+                      <a:prstDash val="solid"/>
+                      <a:round/>
+                      <a:headEnd type="none" w="med" len="med"/>
+                      <a:tailEnd type="none" w="med" len="med"/>
+                    </a:lnL>
+                    <a:lnR w="12700" cap="flat" cmpd="sng" algn="ctr">
+                      <a:solidFill>
+                        <a:srgbClr val="000000"/>
+                      </a:solidFill>
+                      <a:prstDash val="solid"/>
+                      <a:round/>
+                      <a:headEnd type="none" w="med" len="med"/>
+                      <a:tailEnd type="none" w="med" len="med"/>
+                    </a:lnR>
+                    <a:lnT w="12700" cap="flat" cmpd="sng" algn="ctr">
+                      <a:solidFill>
+                        <a:srgbClr val="000000"/>
+                      </a:solidFill>
+                      <a:prstDash val="solid"/>
+                      <a:round/>
+                      <a:headEnd type="none" w="med" len="med"/>
+                      <a:tailEnd type="none" w="med" len="med"/>
+                    </a:lnT>
+                    <a:lnB w="12700" cap="flat" cmpd="sng" algn="ctr">
+                      <a:solidFill>
+                        <a:srgbClr val="000000"/>
+                      </a:solidFill>
+                      <a:prstDash val="solid"/>
+                      <a:round/>
+                      <a:headEnd type="none" w="med" len="med"/>
+                      <a:tailEnd type="none" w="med" len="med"/>
+                    </a:lnB>
+                    <a:solidFill>
+                      <a:srgbClr val="DBE5F1"/>
+                    </a:solidFill>
+                  </a:tcPr>
+                </a:tc>
+                <a:extLst>
+                  <a:ext uri="{0D108BD9-81ED-4DB2-BD59-A6C34878D82A}">
+                    <a16:rowId xmlns:a16="http://schemas.microsoft.com/office/drawing/2014/main" val="10000"/>
+                  </a:ext>
+                </a:extLst>
+              </a:tr>
+              <a:tr h="560785">
+                <a:tc>
+                  <a:txBody>
+                    <a:bodyPr/>
+                    <a:lstStyle/>
+                    <a:p>
+                      <a:pPr marL="0" marR="0" algn="ctr">
+                        <a:lnSpc>
+                          <a:spcPct val="115000"/>
+                        </a:lnSpc>
+                        <a:spcBef>
+                          <a:spcPts val="0"/>
+                        </a:spcBef>
+                        <a:spcAft>
+                          <a:spcPts val="0"/>
+                        </a:spcAft>
+                      </a:pPr>
+                      <a:r>
+                        <a:rPr lang="en-US" sz="3200" b="1" dirty="0">
+                          <a:latin typeface="Calibri"/>
+                          <a:ea typeface="Calibri"/>
+                          <a:cs typeface="Times New Roman"/>
+                        </a:rPr>
+                        <a:t>A</a:t>
+                      </a:r>
+                    </a:p>
+                  </a:txBody>
+                  <a:tcPr marL="68580" marR="68580" marT="0" marB="0">
+                    <a:lnL w="12700" cap="flat" cmpd="sng" algn="ctr">
+                      <a:solidFill>
+                        <a:srgbClr val="000000"/>
+                      </a:solidFill>
+                      <a:prstDash val="solid"/>
+                      <a:round/>
+                      <a:headEnd type="none" w="med" len="med"/>
+                      <a:tailEnd type="none" w="med" len="med"/>
+                    </a:lnL>
+                    <a:lnR w="12700" cap="flat" cmpd="sng" algn="ctr">
+                      <a:solidFill>
+                        <a:srgbClr val="000000"/>
+                      </a:solidFill>
+                      <a:prstDash val="solid"/>
+                      <a:round/>
+                      <a:headEnd type="none" w="med" len="med"/>
+                      <a:tailEnd type="none" w="med" len="med"/>
+                    </a:lnR>
+                    <a:lnT w="12700" cap="flat" cmpd="sng" algn="ctr">
+                      <a:solidFill>
+                        <a:srgbClr val="000000"/>
+                      </a:solidFill>
+                      <a:prstDash val="solid"/>
+                      <a:round/>
+                      <a:headEnd type="none" w="med" len="med"/>
+                      <a:tailEnd type="none" w="med" len="med"/>
+                    </a:lnT>
+                    <a:lnB w="12700" cap="flat" cmpd="sng" algn="ctr">
+                      <a:solidFill>
+                        <a:srgbClr val="000000"/>
+                      </a:solidFill>
+                      <a:prstDash val="solid"/>
+                      <a:round/>
+                      <a:headEnd type="none" w="med" len="med"/>
+                      <a:tailEnd type="none" w="med" len="med"/>
+                    </a:lnB>
+                    <a:solidFill>
+                      <a:srgbClr val="DBE5F1"/>
+                    </a:solidFill>
+                  </a:tcPr>
+                </a:tc>
+                <a:tc>
+                  <a:txBody>
+                    <a:bodyPr/>
+                    <a:lstStyle/>
+                    <a:p>
+                      <a:pPr marL="0" marR="0" algn="ctr">
+                        <a:lnSpc>
+                          <a:spcPct val="115000"/>
+                        </a:lnSpc>
+                        <a:spcBef>
+                          <a:spcPts val="0"/>
+                        </a:spcBef>
+                        <a:spcAft>
+                          <a:spcPts val="0"/>
+                        </a:spcAft>
+                      </a:pPr>
+                      <a:r>
+                        <a:rPr lang="en-US" sz="3200" dirty="0">
+                          <a:latin typeface="Calibri"/>
+                          <a:ea typeface="Calibri"/>
+                          <a:cs typeface="Times New Roman"/>
+                        </a:rPr>
+                        <a:t>2</a:t>
+                      </a:r>
+                    </a:p>
+                  </a:txBody>
+                  <a:tcPr marL="68580" marR="68580" marT="0" marB="0">
+                    <a:lnL w="12700" cap="flat" cmpd="sng" algn="ctr">
+                      <a:solidFill>
+                        <a:srgbClr val="000000"/>
+                      </a:solidFill>
+                      <a:prstDash val="solid"/>
+                      <a:round/>
+                      <a:headEnd type="none" w="med" len="med"/>
+                      <a:tailEnd type="none" w="med" len="med"/>
+                    </a:lnL>
+                    <a:lnR w="12700" cap="flat" cmpd="sng" algn="ctr">
+                      <a:solidFill>
+                        <a:srgbClr val="000000"/>
+                      </a:solidFill>
+                      <a:prstDash val="solid"/>
+                      <a:round/>
+                      <a:headEnd type="none" w="med" len="med"/>
+                      <a:tailEnd type="none" w="med" len="med"/>
+                    </a:lnR>
+                    <a:lnT w="12700" cap="flat" cmpd="sng" algn="ctr">
+                      <a:solidFill>
+                        <a:srgbClr val="000000"/>
+                      </a:solidFill>
+                      <a:prstDash val="solid"/>
+                      <a:round/>
+                      <a:headEnd type="none" w="med" len="med"/>
+                      <a:tailEnd type="none" w="med" len="med"/>
+                    </a:lnT>
+                    <a:lnB w="12700" cap="flat" cmpd="sng" algn="ctr">
+                      <a:solidFill>
+                        <a:srgbClr val="000000"/>
+                      </a:solidFill>
+                      <a:prstDash val="solid"/>
+                      <a:round/>
+                      <a:headEnd type="none" w="med" len="med"/>
+                      <a:tailEnd type="none" w="med" len="med"/>
+                    </a:lnB>
+                  </a:tcPr>
+                </a:tc>
+                <a:tc>
+                  <a:txBody>
+                    <a:bodyPr/>
+                    <a:lstStyle/>
+                    <a:p>
+                      <a:pPr marL="0" marR="0" algn="ctr">
+                        <a:lnSpc>
+                          <a:spcPct val="115000"/>
+                        </a:lnSpc>
+                        <a:spcBef>
+                          <a:spcPts val="0"/>
+                        </a:spcBef>
+                        <a:spcAft>
+                          <a:spcPts val="0"/>
+                        </a:spcAft>
+                      </a:pPr>
+                      <a:r>
+                        <a:rPr lang="en-US" sz="3200" dirty="0">
+                          <a:latin typeface="Calibri"/>
+                          <a:ea typeface="Calibri"/>
+                          <a:cs typeface="Times New Roman"/>
+                        </a:rPr>
+                        <a:t>0</a:t>
+                      </a:r>
+                    </a:p>
+                  </a:txBody>
+                  <a:tcPr marL="68580" marR="68580" marT="0" marB="0">
+                    <a:lnL w="12700" cap="flat" cmpd="sng" algn="ctr">
+                      <a:solidFill>
+                        <a:srgbClr val="000000"/>
+                      </a:solidFill>
+                      <a:prstDash val="solid"/>
+                      <a:round/>
+                      <a:headEnd type="none" w="med" len="med"/>
+                      <a:tailEnd type="none" w="med" len="med"/>
+                    </a:lnL>
+                    <a:lnR w="12700" cap="flat" cmpd="sng" algn="ctr">
+                      <a:solidFill>
+                        <a:srgbClr val="000000"/>
+                      </a:solidFill>
+                      <a:prstDash val="solid"/>
+                      <a:round/>
+                      <a:headEnd type="none" w="med" len="med"/>
+                      <a:tailEnd type="none" w="med" len="med"/>
+                    </a:lnR>
+                    <a:lnT w="12700" cap="flat" cmpd="sng" algn="ctr">
+                      <a:solidFill>
+                        <a:srgbClr val="000000"/>
+                      </a:solidFill>
+                      <a:prstDash val="solid"/>
+                      <a:round/>
+                      <a:headEnd type="none" w="med" len="med"/>
+                      <a:tailEnd type="none" w="med" len="med"/>
+                    </a:lnT>
+                    <a:lnB w="12700" cap="flat" cmpd="sng" algn="ctr">
+                      <a:solidFill>
+                        <a:srgbClr val="000000"/>
+                      </a:solidFill>
+                      <a:prstDash val="solid"/>
+                      <a:round/>
+                      <a:headEnd type="none" w="med" len="med"/>
+                      <a:tailEnd type="none" w="med" len="med"/>
+                    </a:lnB>
+                  </a:tcPr>
+                </a:tc>
+                <a:tc>
+                  <a:txBody>
+                    <a:bodyPr/>
+                    <a:lstStyle/>
+                    <a:p>
+                      <a:pPr marL="0" marR="0" algn="ctr">
+                        <a:lnSpc>
+                          <a:spcPct val="115000"/>
+                        </a:lnSpc>
+                        <a:spcBef>
+                          <a:spcPts val="0"/>
+                        </a:spcBef>
+                        <a:spcAft>
+                          <a:spcPts val="0"/>
+                        </a:spcAft>
+                      </a:pPr>
+                      <a:r>
+                        <a:rPr lang="en-US" sz="3200" dirty="0">
+                          <a:latin typeface="Calibri"/>
+                          <a:ea typeface="Calibri"/>
+                          <a:cs typeface="Times New Roman"/>
+                        </a:rPr>
+                        <a:t>0</a:t>
+                      </a:r>
+                    </a:p>
+                  </a:txBody>
+                  <a:tcPr marL="68580" marR="68580" marT="0" marB="0">
+                    <a:lnL w="12700" cap="flat" cmpd="sng" algn="ctr">
+                      <a:solidFill>
+                        <a:srgbClr val="000000"/>
+                      </a:solidFill>
+                      <a:prstDash val="solid"/>
+                      <a:round/>
+                      <a:headEnd type="none" w="med" len="med"/>
+                      <a:tailEnd type="none" w="med" len="med"/>
+                    </a:lnL>
+                    <a:lnR w="12700" cap="flat" cmpd="sng" algn="ctr">
+                      <a:solidFill>
+                        <a:srgbClr val="000000"/>
+                      </a:solidFill>
+                      <a:prstDash val="solid"/>
+                      <a:round/>
+                      <a:headEnd type="none" w="med" len="med"/>
+                      <a:tailEnd type="none" w="med" len="med"/>
+                    </a:lnR>
+                    <a:lnT w="12700" cap="flat" cmpd="sng" algn="ctr">
+                      <a:solidFill>
+                        <a:srgbClr val="000000"/>
+                      </a:solidFill>
+                      <a:prstDash val="solid"/>
+                      <a:round/>
+                      <a:headEnd type="none" w="med" len="med"/>
+                      <a:tailEnd type="none" w="med" len="med"/>
+                    </a:lnT>
+                    <a:lnB w="12700" cap="flat" cmpd="sng" algn="ctr">
+                      <a:solidFill>
+                        <a:srgbClr val="000000"/>
+                      </a:solidFill>
+                      <a:prstDash val="solid"/>
+                      <a:round/>
+                      <a:headEnd type="none" w="med" len="med"/>
+                      <a:tailEnd type="none" w="med" len="med"/>
+                    </a:lnB>
+                  </a:tcPr>
+                </a:tc>
+                <a:extLst>
+                  <a:ext uri="{0D108BD9-81ED-4DB2-BD59-A6C34878D82A}">
+                    <a16:rowId xmlns:a16="http://schemas.microsoft.com/office/drawing/2014/main" val="10001"/>
+                  </a:ext>
+                </a:extLst>
+              </a:tr>
+              <a:tr h="560785">
+                <a:tc>
+                  <a:txBody>
+                    <a:bodyPr/>
+                    <a:lstStyle/>
+                    <a:p>
+                      <a:pPr marL="0" marR="0" algn="ctr">
+                        <a:lnSpc>
+                          <a:spcPct val="115000"/>
+                        </a:lnSpc>
+                        <a:spcBef>
+                          <a:spcPts val="0"/>
+                        </a:spcBef>
+                        <a:spcAft>
+                          <a:spcPts val="0"/>
+                        </a:spcAft>
+                      </a:pPr>
+                      <a:r>
+                        <a:rPr lang="en-US" sz="3200" b="1" dirty="0">
+                          <a:latin typeface="Calibri"/>
+                          <a:ea typeface="Calibri"/>
+                          <a:cs typeface="Times New Roman"/>
+                        </a:rPr>
+                        <a:t>B</a:t>
+                      </a:r>
+                    </a:p>
+                  </a:txBody>
+                  <a:tcPr marL="68580" marR="68580" marT="0" marB="0">
+                    <a:lnL w="12700" cap="flat" cmpd="sng" algn="ctr">
+                      <a:solidFill>
+                        <a:srgbClr val="000000"/>
+                      </a:solidFill>
+                      <a:prstDash val="solid"/>
+                      <a:round/>
+                      <a:headEnd type="none" w="med" len="med"/>
+                      <a:tailEnd type="none" w="med" len="med"/>
+                    </a:lnL>
+                    <a:lnR w="12700" cap="flat" cmpd="sng" algn="ctr">
+                      <a:solidFill>
+                        <a:srgbClr val="000000"/>
+                      </a:solidFill>
+                      <a:prstDash val="solid"/>
+                      <a:round/>
+                      <a:headEnd type="none" w="med" len="med"/>
+                      <a:tailEnd type="none" w="med" len="med"/>
+                    </a:lnR>
+                    <a:lnT w="12700" cap="flat" cmpd="sng" algn="ctr">
+                      <a:solidFill>
+                        <a:srgbClr val="000000"/>
+                      </a:solidFill>
+                      <a:prstDash val="solid"/>
+                      <a:round/>
+                      <a:headEnd type="none" w="med" len="med"/>
+                      <a:tailEnd type="none" w="med" len="med"/>
+                    </a:lnT>
+                    <a:lnB w="12700" cap="flat" cmpd="sng" algn="ctr">
+                      <a:solidFill>
+                        <a:srgbClr val="000000"/>
+                      </a:solidFill>
+                      <a:prstDash val="solid"/>
+                      <a:round/>
+                      <a:headEnd type="none" w="med" len="med"/>
+                      <a:tailEnd type="none" w="med" len="med"/>
+                    </a:lnB>
+                    <a:solidFill>
+                      <a:srgbClr val="DBE5F1"/>
+                    </a:solidFill>
+                  </a:tcPr>
+                </a:tc>
+                <a:tc>
+                  <a:txBody>
+                    <a:bodyPr/>
+                    <a:lstStyle/>
+                    <a:p>
+                      <a:pPr marL="0" marR="0" algn="ctr">
+                        <a:lnSpc>
+                          <a:spcPct val="115000"/>
+                        </a:lnSpc>
+                        <a:spcBef>
+                          <a:spcPts val="0"/>
+                        </a:spcBef>
+                        <a:spcAft>
+                          <a:spcPts val="0"/>
+                        </a:spcAft>
+                      </a:pPr>
+                      <a:r>
+                        <a:rPr lang="en-US" sz="3200" dirty="0">
+                          <a:latin typeface="Calibri"/>
+                          <a:ea typeface="Calibri"/>
+                          <a:cs typeface="Times New Roman"/>
+                        </a:rPr>
+                        <a:t>0</a:t>
+                      </a:r>
+                    </a:p>
+                  </a:txBody>
+                  <a:tcPr marL="68580" marR="68580" marT="0" marB="0">
+                    <a:lnL w="12700" cap="flat" cmpd="sng" algn="ctr">
+                      <a:solidFill>
+                        <a:srgbClr val="000000"/>
+                      </a:solidFill>
+                      <a:prstDash val="solid"/>
+                      <a:round/>
+                      <a:headEnd type="none" w="med" len="med"/>
+                      <a:tailEnd type="none" w="med" len="med"/>
+                    </a:lnL>
+                    <a:lnR w="12700" cap="flat" cmpd="sng" algn="ctr">
+                      <a:solidFill>
+                        <a:srgbClr val="000000"/>
+                      </a:solidFill>
+                      <a:prstDash val="solid"/>
+                      <a:round/>
+                      <a:headEnd type="none" w="med" len="med"/>
+                      <a:tailEnd type="none" w="med" len="med"/>
+                    </a:lnR>
+                    <a:lnT w="12700" cap="flat" cmpd="sng" algn="ctr">
+                      <a:solidFill>
+                        <a:srgbClr val="000000"/>
+                      </a:solidFill>
+                      <a:prstDash val="solid"/>
+                      <a:round/>
+                      <a:headEnd type="none" w="med" len="med"/>
+                      <a:tailEnd type="none" w="med" len="med"/>
+                    </a:lnT>
+                    <a:lnB w="12700" cap="flat" cmpd="sng" algn="ctr">
+                      <a:solidFill>
+                        <a:srgbClr val="000000"/>
+                      </a:solidFill>
+                      <a:prstDash val="solid"/>
+                      <a:round/>
+                      <a:headEnd type="none" w="med" len="med"/>
+                      <a:tailEnd type="none" w="med" len="med"/>
+                    </a:lnB>
+                  </a:tcPr>
+                </a:tc>
+                <a:tc>
+                  <a:txBody>
+                    <a:bodyPr/>
+                    <a:lstStyle/>
+                    <a:p>
+                      <a:pPr marL="0" marR="0" algn="ctr">
+                        <a:lnSpc>
+                          <a:spcPct val="115000"/>
+                        </a:lnSpc>
+                        <a:spcBef>
+                          <a:spcPts val="0"/>
+                        </a:spcBef>
+                        <a:spcAft>
+                          <a:spcPts val="0"/>
+                        </a:spcAft>
+                      </a:pPr>
+                      <a:r>
+                        <a:rPr lang="en-US" sz="3200" dirty="0">
+                          <a:latin typeface="Calibri"/>
+                          <a:ea typeface="Calibri"/>
+                          <a:cs typeface="Times New Roman"/>
+                        </a:rPr>
+                        <a:t>1</a:t>
+                      </a:r>
+                    </a:p>
+                  </a:txBody>
+                  <a:tcPr marL="68580" marR="68580" marT="0" marB="0">
+                    <a:lnL w="12700" cap="flat" cmpd="sng" algn="ctr">
+                      <a:solidFill>
+                        <a:srgbClr val="000000"/>
+                      </a:solidFill>
+                      <a:prstDash val="solid"/>
+                      <a:round/>
+                      <a:headEnd type="none" w="med" len="med"/>
+                      <a:tailEnd type="none" w="med" len="med"/>
+                    </a:lnL>
+                    <a:lnR w="12700" cap="flat" cmpd="sng" algn="ctr">
+                      <a:solidFill>
+                        <a:srgbClr val="000000"/>
+                      </a:solidFill>
+                      <a:prstDash val="solid"/>
+                      <a:round/>
+                      <a:headEnd type="none" w="med" len="med"/>
+                      <a:tailEnd type="none" w="med" len="med"/>
+                    </a:lnR>
+                    <a:lnT w="12700" cap="flat" cmpd="sng" algn="ctr">
+                      <a:solidFill>
+                        <a:srgbClr val="000000"/>
+                      </a:solidFill>
+                      <a:prstDash val="solid"/>
+                      <a:round/>
+                      <a:headEnd type="none" w="med" len="med"/>
+                      <a:tailEnd type="none" w="med" len="med"/>
+                    </a:lnT>
+                    <a:lnB w="12700" cap="flat" cmpd="sng" algn="ctr">
+                      <a:solidFill>
+                        <a:srgbClr val="000000"/>
+                      </a:solidFill>
+                      <a:prstDash val="solid"/>
+                      <a:round/>
+                      <a:headEnd type="none" w="med" len="med"/>
+                      <a:tailEnd type="none" w="med" len="med"/>
+                    </a:lnB>
+                  </a:tcPr>
+                </a:tc>
+                <a:tc>
+                  <a:txBody>
+                    <a:bodyPr/>
+                    <a:lstStyle/>
+                    <a:p>
+                      <a:pPr marL="0" marR="0" algn="ctr">
+                        <a:lnSpc>
+                          <a:spcPct val="115000"/>
+                        </a:lnSpc>
+                        <a:spcBef>
+                          <a:spcPts val="0"/>
+                        </a:spcBef>
+                        <a:spcAft>
+                          <a:spcPts val="0"/>
+                        </a:spcAft>
+                      </a:pPr>
+                      <a:r>
+                        <a:rPr lang="en-US" sz="3200" dirty="0">
+                          <a:latin typeface="Calibri"/>
+                          <a:ea typeface="Calibri"/>
+                          <a:cs typeface="Times New Roman"/>
+                        </a:rPr>
+                        <a:t>1</a:t>
+                      </a:r>
+                    </a:p>
+                  </a:txBody>
+                  <a:tcPr marL="68580" marR="68580" marT="0" marB="0">
+                    <a:lnL w="12700" cap="flat" cmpd="sng" algn="ctr">
+                      <a:solidFill>
+                        <a:srgbClr val="000000"/>
+                      </a:solidFill>
+                      <a:prstDash val="solid"/>
+                      <a:round/>
+                      <a:headEnd type="none" w="med" len="med"/>
+                      <a:tailEnd type="none" w="med" len="med"/>
+                    </a:lnL>
+                    <a:lnR w="12700" cap="flat" cmpd="sng" algn="ctr">
+                      <a:solidFill>
+                        <a:srgbClr val="000000"/>
+                      </a:solidFill>
+                      <a:prstDash val="solid"/>
+                      <a:round/>
+                      <a:headEnd type="none" w="med" len="med"/>
+                      <a:tailEnd type="none" w="med" len="med"/>
+                    </a:lnR>
+                    <a:lnT w="12700" cap="flat" cmpd="sng" algn="ctr">
+                      <a:solidFill>
+                        <a:srgbClr val="000000"/>
+                      </a:solidFill>
+                      <a:prstDash val="solid"/>
+                      <a:round/>
+                      <a:headEnd type="none" w="med" len="med"/>
+                      <a:tailEnd type="none" w="med" len="med"/>
+                    </a:lnT>
+                    <a:lnB w="12700" cap="flat" cmpd="sng" algn="ctr">
+                      <a:solidFill>
+                        <a:srgbClr val="000000"/>
+                      </a:solidFill>
+                      <a:prstDash val="solid"/>
+                      <a:round/>
+                      <a:headEnd type="none" w="med" len="med"/>
+                      <a:tailEnd type="none" w="med" len="med"/>
+                    </a:lnB>
+                  </a:tcPr>
+                </a:tc>
+                <a:extLst>
+                  <a:ext uri="{0D108BD9-81ED-4DB2-BD59-A6C34878D82A}">
+                    <a16:rowId xmlns:a16="http://schemas.microsoft.com/office/drawing/2014/main" val="10002"/>
+                  </a:ext>
+                </a:extLst>
+              </a:tr>
+              <a:tr h="560785">
+                <a:tc>
+                  <a:txBody>
+                    <a:bodyPr/>
+                    <a:lstStyle/>
+                    <a:p>
+                      <a:pPr marL="0" marR="0" algn="ctr">
+                        <a:lnSpc>
+                          <a:spcPct val="115000"/>
+                        </a:lnSpc>
+                        <a:spcBef>
+                          <a:spcPts val="0"/>
+                        </a:spcBef>
+                        <a:spcAft>
+                          <a:spcPts val="0"/>
+                        </a:spcAft>
+                      </a:pPr>
+                      <a:r>
+                        <a:rPr lang="en-US" sz="3200" b="1" dirty="0">
+                          <a:latin typeface="Calibri"/>
+                          <a:ea typeface="Calibri"/>
+                          <a:cs typeface="Times New Roman"/>
+                        </a:rPr>
+                        <a:t>C</a:t>
+                      </a:r>
+                    </a:p>
+                  </a:txBody>
+                  <a:tcPr marL="68580" marR="68580" marT="0" marB="0">
+                    <a:lnL w="12700" cap="flat" cmpd="sng" algn="ctr">
+                      <a:solidFill>
+                        <a:srgbClr val="000000"/>
+                      </a:solidFill>
+                      <a:prstDash val="solid"/>
+                      <a:round/>
+                      <a:headEnd type="none" w="med" len="med"/>
+                      <a:tailEnd type="none" w="med" len="med"/>
+                    </a:lnL>
+                    <a:lnR w="12700" cap="flat" cmpd="sng" algn="ctr">
+                      <a:solidFill>
+                        <a:srgbClr val="000000"/>
+                      </a:solidFill>
+                      <a:prstDash val="solid"/>
+                      <a:round/>
+                      <a:headEnd type="none" w="med" len="med"/>
+                      <a:tailEnd type="none" w="med" len="med"/>
+                    </a:lnR>
+                    <a:lnT w="12700" cap="flat" cmpd="sng" algn="ctr">
+                      <a:solidFill>
+                        <a:srgbClr val="000000"/>
+                      </a:solidFill>
+                      <a:prstDash val="solid"/>
+                      <a:round/>
+                      <a:headEnd type="none" w="med" len="med"/>
+                      <a:tailEnd type="none" w="med" len="med"/>
+                    </a:lnT>
+                    <a:lnB w="12700" cap="flat" cmpd="sng" algn="ctr">
+                      <a:solidFill>
+                        <a:srgbClr val="000000"/>
+                      </a:solidFill>
+                      <a:prstDash val="solid"/>
+                      <a:round/>
+                      <a:headEnd type="none" w="med" len="med"/>
+                      <a:tailEnd type="none" w="med" len="med"/>
+                    </a:lnB>
+                    <a:solidFill>
+                      <a:srgbClr val="DBE5F1"/>
+                    </a:solidFill>
+                  </a:tcPr>
+                </a:tc>
+                <a:tc>
+                  <a:txBody>
+                    <a:bodyPr/>
+                    <a:lstStyle/>
+                    <a:p>
+                      <a:pPr marL="0" marR="0" algn="ctr">
+                        <a:lnSpc>
+                          <a:spcPct val="115000"/>
+                        </a:lnSpc>
+                        <a:spcBef>
+                          <a:spcPts val="0"/>
+                        </a:spcBef>
+                        <a:spcAft>
+                          <a:spcPts val="0"/>
+                        </a:spcAft>
+                      </a:pPr>
+                      <a:r>
+                        <a:rPr lang="en-US" sz="3200" dirty="0">
+                          <a:latin typeface="Calibri"/>
+                          <a:ea typeface="Calibri"/>
+                          <a:cs typeface="Times New Roman"/>
+                        </a:rPr>
+                        <a:t>0</a:t>
+                      </a:r>
+                    </a:p>
+                  </a:txBody>
+                  <a:tcPr marL="68580" marR="68580" marT="0" marB="0">
+                    <a:lnL w="12700" cap="flat" cmpd="sng" algn="ctr">
+                      <a:solidFill>
+                        <a:srgbClr val="000000"/>
+                      </a:solidFill>
+                      <a:prstDash val="solid"/>
+                      <a:round/>
+                      <a:headEnd type="none" w="med" len="med"/>
+                      <a:tailEnd type="none" w="med" len="med"/>
+                    </a:lnL>
+                    <a:lnR w="12700" cap="flat" cmpd="sng" algn="ctr">
+                      <a:solidFill>
+                        <a:srgbClr val="000000"/>
+                      </a:solidFill>
+                      <a:prstDash val="solid"/>
+                      <a:round/>
+                      <a:headEnd type="none" w="med" len="med"/>
+                      <a:tailEnd type="none" w="med" len="med"/>
+                    </a:lnR>
+                    <a:lnT w="12700" cap="flat" cmpd="sng" algn="ctr">
+                      <a:solidFill>
+                        <a:srgbClr val="000000"/>
+                      </a:solidFill>
+                      <a:prstDash val="solid"/>
+                      <a:round/>
+                      <a:headEnd type="none" w="med" len="med"/>
+                      <a:tailEnd type="none" w="med" len="med"/>
+                    </a:lnT>
+                    <a:lnB w="12700" cap="flat" cmpd="sng" algn="ctr">
+                      <a:solidFill>
+                        <a:srgbClr val="000000"/>
+                      </a:solidFill>
+                      <a:prstDash val="solid"/>
+                      <a:round/>
+                      <a:headEnd type="none" w="med" len="med"/>
+                      <a:tailEnd type="none" w="med" len="med"/>
+                    </a:lnB>
+                  </a:tcPr>
+                </a:tc>
+                <a:tc>
+                  <a:txBody>
+                    <a:bodyPr/>
+                    <a:lstStyle/>
+                    <a:p>
+                      <a:pPr marL="0" marR="0" algn="ctr">
+                        <a:lnSpc>
+                          <a:spcPct val="115000"/>
+                        </a:lnSpc>
+                        <a:spcBef>
+                          <a:spcPts val="0"/>
+                        </a:spcBef>
+                        <a:spcAft>
+                          <a:spcPts val="0"/>
+                        </a:spcAft>
+                      </a:pPr>
+                      <a:r>
+                        <a:rPr lang="en-US" sz="3200" dirty="0">
+                          <a:latin typeface="Calibri"/>
+                          <a:ea typeface="Calibri"/>
+                          <a:cs typeface="Times New Roman"/>
+                        </a:rPr>
+                        <a:t>1</a:t>
+                      </a:r>
+                    </a:p>
+                  </a:txBody>
+                  <a:tcPr marL="68580" marR="68580" marT="0" marB="0">
+                    <a:lnL w="12700" cap="flat" cmpd="sng" algn="ctr">
+                      <a:solidFill>
+                        <a:srgbClr val="000000"/>
+                      </a:solidFill>
+                      <a:prstDash val="solid"/>
+                      <a:round/>
+                      <a:headEnd type="none" w="med" len="med"/>
+                      <a:tailEnd type="none" w="med" len="med"/>
+                    </a:lnL>
+                    <a:lnR w="12700" cap="flat" cmpd="sng" algn="ctr">
+                      <a:solidFill>
+                        <a:srgbClr val="000000"/>
+                      </a:solidFill>
+                      <a:prstDash val="solid"/>
+                      <a:round/>
+                      <a:headEnd type="none" w="med" len="med"/>
+                      <a:tailEnd type="none" w="med" len="med"/>
+                    </a:lnR>
+                    <a:lnT w="12700" cap="flat" cmpd="sng" algn="ctr">
+                      <a:solidFill>
+                        <a:srgbClr val="000000"/>
+                      </a:solidFill>
+                      <a:prstDash val="solid"/>
+                      <a:round/>
+                      <a:headEnd type="none" w="med" len="med"/>
+                      <a:tailEnd type="none" w="med" len="med"/>
+                    </a:lnT>
+                    <a:lnB w="12700" cap="flat" cmpd="sng" algn="ctr">
+                      <a:solidFill>
+                        <a:srgbClr val="000000"/>
+                      </a:solidFill>
+                      <a:prstDash val="solid"/>
+                      <a:round/>
+                      <a:headEnd type="none" w="med" len="med"/>
+                      <a:tailEnd type="none" w="med" len="med"/>
+                    </a:lnB>
+                  </a:tcPr>
+                </a:tc>
+                <a:tc>
+                  <a:txBody>
+                    <a:bodyPr/>
+                    <a:lstStyle/>
+                    <a:p>
+                      <a:pPr marL="0" marR="0" algn="ctr">
+                        <a:lnSpc>
+                          <a:spcPct val="115000"/>
+                        </a:lnSpc>
+                        <a:spcBef>
+                          <a:spcPts val="0"/>
+                        </a:spcBef>
+                        <a:spcAft>
+                          <a:spcPts val="0"/>
+                        </a:spcAft>
+                      </a:pPr>
+                      <a:r>
+                        <a:rPr lang="en-US" sz="3200" dirty="0">
+                          <a:latin typeface="Calibri"/>
+                          <a:ea typeface="Calibri"/>
+                          <a:cs typeface="Times New Roman"/>
+                        </a:rPr>
+                        <a:t>1</a:t>
+                      </a:r>
+                    </a:p>
+                  </a:txBody>
+                  <a:tcPr marL="68580" marR="68580" marT="0" marB="0">
+                    <a:lnL w="12700" cap="flat" cmpd="sng" algn="ctr">
+                      <a:solidFill>
+                        <a:srgbClr val="000000"/>
+                      </a:solidFill>
+                      <a:prstDash val="solid"/>
+                      <a:round/>
+                      <a:headEnd type="none" w="med" len="med"/>
+                      <a:tailEnd type="none" w="med" len="med"/>
+                    </a:lnL>
+                    <a:lnR w="12700" cap="flat" cmpd="sng" algn="ctr">
+                      <a:solidFill>
+                        <a:srgbClr val="000000"/>
+                      </a:solidFill>
+                      <a:prstDash val="solid"/>
+                      <a:round/>
+                      <a:headEnd type="none" w="med" len="med"/>
+                      <a:tailEnd type="none" w="med" len="med"/>
+                    </a:lnR>
+                    <a:lnT w="12700" cap="flat" cmpd="sng" algn="ctr">
+                      <a:solidFill>
+                        <a:srgbClr val="000000"/>
+                      </a:solidFill>
+                      <a:prstDash val="solid"/>
+                      <a:round/>
+                      <a:headEnd type="none" w="med" len="med"/>
+                      <a:tailEnd type="none" w="med" len="med"/>
+                    </a:lnT>
+                    <a:lnB w="12700" cap="flat" cmpd="sng" algn="ctr">
+                      <a:solidFill>
+                        <a:srgbClr val="000000"/>
+                      </a:solidFill>
+                      <a:prstDash val="solid"/>
+                      <a:round/>
+                      <a:headEnd type="none" w="med" len="med"/>
+                      <a:tailEnd type="none" w="med" len="med"/>
+                    </a:lnB>
+                  </a:tcPr>
+                </a:tc>
+                <a:extLst>
+                  <a:ext uri="{0D108BD9-81ED-4DB2-BD59-A6C34878D82A}">
+                    <a16:rowId xmlns:a16="http://schemas.microsoft.com/office/drawing/2014/main" val="10003"/>
+                  </a:ext>
+                </a:extLst>
+              </a:tr>
+            </a:tbl>
+          </a:graphicData>
+        </a:graphic>
+      </p:graphicFrame>
+      <p:grpSp>
+        <p:nvGrpSpPr>
+          <p:cNvPr id="7" name="Group 6" descr="An undirected graph with edges {(A,B), (A,C)}&#10;Adjacency list:&#10;A B, C&#10;B A&#10;C A">
+            <a:extLst>
+              <a:ext uri="{FF2B5EF4-FFF2-40B4-BE49-F238E27FC236}">
+                <a16:creationId xmlns:a16="http://schemas.microsoft.com/office/drawing/2014/main" id="{BA32440C-8045-FAE9-B364-243B9D25E2E6}"/>
+              </a:ext>
+            </a:extLst>
+          </p:cNvPr>
+          <p:cNvGrpSpPr/>
+          <p:nvPr/>
+        </p:nvGrpSpPr>
+        <p:grpSpPr>
+          <a:xfrm>
+            <a:off x="1066800" y="3191573"/>
+            <a:ext cx="1996533" cy="2383108"/>
+            <a:chOff x="1066800" y="3191573"/>
+            <a:chExt cx="1996533" cy="2383108"/>
+          </a:xfrm>
+        </p:grpSpPr>
+        <p:sp>
+          <p:nvSpPr>
+            <p:cNvPr id="2" name="Oval 1">
+              <a:extLst>
+                <a:ext uri="{FF2B5EF4-FFF2-40B4-BE49-F238E27FC236}">
+                  <a16:creationId xmlns:a16="http://schemas.microsoft.com/office/drawing/2014/main" id="{C85E9774-08D9-ED9C-BEE1-B4F57C61493B}"/>
+                </a:ext>
+              </a:extLst>
+            </p:cNvPr>
+            <p:cNvSpPr/>
+            <p:nvPr/>
+          </p:nvSpPr>
+          <p:spPr bwMode="auto">
+            <a:xfrm>
+              <a:off x="1066800" y="3917416"/>
+              <a:ext cx="716466" cy="716466"/>
+            </a:xfrm>
+            <a:prstGeom prst="ellipse">
+              <a:avLst/>
+            </a:prstGeom>
+            <a:solidFill>
+              <a:schemeClr val="accent1"/>
+            </a:solidFill>
+            <a:ln w="9525" cap="flat" cmpd="sng" algn="ctr">
+              <a:solidFill>
+                <a:schemeClr val="tx1"/>
+              </a:solidFill>
+              <a:prstDash val="solid"/>
+              <a:round/>
+              <a:headEnd type="none" w="med" len="med"/>
+              <a:tailEnd type="none" w="med" len="med"/>
+            </a:ln>
+            <a:effectLst/>
+          </p:spPr>
+          <p:txBody>
+            <a:bodyPr vert="horz" wrap="square" lIns="91440" tIns="45720" rIns="91440" bIns="45720" numCol="1" rtlCol="0" anchor="t" anchorCtr="0" compatLnSpc="1">
+              <a:prstTxWarp prst="textNoShape">
+                <a:avLst/>
+              </a:prstTxWarp>
+            </a:bodyPr>
+            <a:lstStyle/>
+            <a:p>
+              <a:pPr marL="0" marR="0" indent="0" algn="ctr" defTabSz="914400" rtl="0" eaLnBrk="0" fontAlgn="base" latinLnBrk="0" hangingPunct="0">
+                <a:lnSpc>
+                  <a:spcPct val="100000"/>
+                </a:lnSpc>
+                <a:spcBef>
+                  <a:spcPct val="0"/>
+                </a:spcBef>
+                <a:spcAft>
+                  <a:spcPts val="1800"/>
+                </a:spcAft>
+                <a:buClrTx/>
+                <a:buSzTx/>
+                <a:buFontTx/>
+                <a:buNone/>
+                <a:tabLst/>
+              </a:pPr>
+              <a:r>
+                <a:rPr kumimoji="0" lang="en-US" sz="3200" b="1" i="0" u="none" strike="noStrike" cap="none" normalizeH="0" baseline="0" dirty="0">
+                  <a:ln>
+                    <a:noFill/>
+                  </a:ln>
+                  <a:solidFill>
+                    <a:schemeClr val="tx1"/>
+                  </a:solidFill>
+                  <a:effectLst/>
+                  <a:latin typeface="Tahoma" panose="020B0604030504040204" pitchFamily="34" charset="0"/>
+                  <a:ea typeface="Tahoma" panose="020B0604030504040204" pitchFamily="34" charset="0"/>
+                  <a:cs typeface="Tahoma" panose="020B0604030504040204" pitchFamily="34" charset="0"/>
+                </a:rPr>
+                <a:t>A</a:t>
+              </a:r>
+            </a:p>
+          </p:txBody>
+        </p:sp>
+        <p:sp>
+          <p:nvSpPr>
+            <p:cNvPr id="3" name="Oval 2">
+              <a:extLst>
+                <a:ext uri="{FF2B5EF4-FFF2-40B4-BE49-F238E27FC236}">
+                  <a16:creationId xmlns:a16="http://schemas.microsoft.com/office/drawing/2014/main" id="{D7FEB91B-AE61-ED2F-28D1-6985B816DD9B}"/>
+                </a:ext>
+              </a:extLst>
+            </p:cNvPr>
+            <p:cNvSpPr/>
+            <p:nvPr/>
+          </p:nvSpPr>
+          <p:spPr bwMode="auto">
+            <a:xfrm>
+              <a:off x="2141034" y="4858215"/>
+              <a:ext cx="716466" cy="716466"/>
+            </a:xfrm>
+            <a:prstGeom prst="ellipse">
+              <a:avLst/>
+            </a:prstGeom>
+            <a:solidFill>
+              <a:schemeClr val="accent1"/>
+            </a:solidFill>
+            <a:ln w="9525" cap="flat" cmpd="sng" algn="ctr">
+              <a:solidFill>
+                <a:schemeClr val="tx1"/>
+              </a:solidFill>
+              <a:prstDash val="solid"/>
+              <a:round/>
+              <a:headEnd type="none" w="med" len="med"/>
+              <a:tailEnd type="none" w="med" len="med"/>
+            </a:ln>
+            <a:effectLst/>
+          </p:spPr>
+          <p:txBody>
+            <a:bodyPr vert="horz" wrap="square" lIns="91440" tIns="45720" rIns="91440" bIns="45720" numCol="1" rtlCol="0" anchor="t" anchorCtr="0" compatLnSpc="1">
+              <a:prstTxWarp prst="textNoShape">
+                <a:avLst/>
+              </a:prstTxWarp>
+            </a:bodyPr>
+            <a:lstStyle/>
+            <a:p>
+              <a:pPr marL="0" marR="0" indent="0" algn="ctr" defTabSz="914400" rtl="0" eaLnBrk="0" fontAlgn="base" latinLnBrk="0" hangingPunct="0">
+                <a:lnSpc>
+                  <a:spcPct val="100000"/>
+                </a:lnSpc>
+                <a:spcBef>
+                  <a:spcPct val="0"/>
+                </a:spcBef>
+                <a:spcAft>
+                  <a:spcPts val="1800"/>
+                </a:spcAft>
+                <a:buClrTx/>
+                <a:buSzTx/>
+                <a:buFontTx/>
+                <a:buNone/>
+                <a:tabLst/>
+              </a:pPr>
+              <a:r>
+                <a:rPr kumimoji="0" lang="en-US" sz="3200" b="1" i="0" u="none" strike="noStrike" cap="none" normalizeH="0" baseline="0" dirty="0">
+                  <a:ln>
+                    <a:noFill/>
+                  </a:ln>
+                  <a:solidFill>
+                    <a:schemeClr val="tx1"/>
+                  </a:solidFill>
+                  <a:effectLst/>
+                  <a:latin typeface="Tahoma" panose="020B0604030504040204" pitchFamily="34" charset="0"/>
+                  <a:ea typeface="Tahoma" panose="020B0604030504040204" pitchFamily="34" charset="0"/>
+                  <a:cs typeface="Tahoma" panose="020B0604030504040204" pitchFamily="34" charset="0"/>
+                </a:rPr>
+                <a:t>C</a:t>
+              </a:r>
+            </a:p>
+          </p:txBody>
+        </p:sp>
+        <p:sp>
+          <p:nvSpPr>
+            <p:cNvPr id="4" name="Oval 3">
+              <a:extLst>
+                <a:ext uri="{FF2B5EF4-FFF2-40B4-BE49-F238E27FC236}">
+                  <a16:creationId xmlns:a16="http://schemas.microsoft.com/office/drawing/2014/main" id="{3F19D3C6-635E-EC81-9A02-7F05D8A8507D}"/>
+                </a:ext>
+              </a:extLst>
+            </p:cNvPr>
+            <p:cNvSpPr/>
+            <p:nvPr/>
+          </p:nvSpPr>
+          <p:spPr bwMode="auto">
+            <a:xfrm>
+              <a:off x="2346867" y="3191573"/>
+              <a:ext cx="716466" cy="716466"/>
+            </a:xfrm>
+            <a:prstGeom prst="ellipse">
+              <a:avLst/>
+            </a:prstGeom>
+            <a:solidFill>
+              <a:schemeClr val="accent1"/>
+            </a:solidFill>
+            <a:ln w="9525" cap="flat" cmpd="sng" algn="ctr">
+              <a:solidFill>
+                <a:schemeClr val="tx1"/>
+              </a:solidFill>
+              <a:prstDash val="solid"/>
+              <a:round/>
+              <a:headEnd type="none" w="med" len="med"/>
+              <a:tailEnd type="none" w="med" len="med"/>
+            </a:ln>
+            <a:effectLst/>
+          </p:spPr>
+          <p:txBody>
+            <a:bodyPr vert="horz" wrap="square" lIns="91440" tIns="45720" rIns="91440" bIns="45720" numCol="1" rtlCol="0" anchor="t" anchorCtr="0" compatLnSpc="1">
+              <a:prstTxWarp prst="textNoShape">
+                <a:avLst/>
+              </a:prstTxWarp>
+            </a:bodyPr>
+            <a:lstStyle/>
+            <a:p>
+              <a:pPr marL="0" marR="0" indent="0" algn="ctr" defTabSz="914400" rtl="0" eaLnBrk="0" fontAlgn="base" latinLnBrk="0" hangingPunct="0">
+                <a:lnSpc>
+                  <a:spcPct val="100000"/>
+                </a:lnSpc>
+                <a:spcBef>
+                  <a:spcPct val="0"/>
+                </a:spcBef>
+                <a:spcAft>
+                  <a:spcPts val="1800"/>
+                </a:spcAft>
+                <a:buClrTx/>
+                <a:buSzTx/>
+                <a:buFontTx/>
+                <a:buNone/>
+                <a:tabLst/>
+              </a:pPr>
+              <a:r>
+                <a:rPr kumimoji="0" lang="en-US" sz="3200" b="1" i="0" u="none" strike="noStrike" cap="none" normalizeH="0" baseline="0" dirty="0">
+                  <a:ln>
+                    <a:noFill/>
+                  </a:ln>
+                  <a:solidFill>
+                    <a:schemeClr val="tx1"/>
+                  </a:solidFill>
+                  <a:effectLst/>
+                  <a:latin typeface="Tahoma" panose="020B0604030504040204" pitchFamily="34" charset="0"/>
+                  <a:ea typeface="Tahoma" panose="020B0604030504040204" pitchFamily="34" charset="0"/>
+                  <a:cs typeface="Tahoma" panose="020B0604030504040204" pitchFamily="34" charset="0"/>
+                </a:rPr>
+                <a:t>B</a:t>
+              </a:r>
+            </a:p>
+          </p:txBody>
+        </p:sp>
+        <p:cxnSp>
+          <p:nvCxnSpPr>
+            <p:cNvPr id="6" name="Straight Connector 5">
+              <a:extLst>
+                <a:ext uri="{FF2B5EF4-FFF2-40B4-BE49-F238E27FC236}">
+                  <a16:creationId xmlns:a16="http://schemas.microsoft.com/office/drawing/2014/main" id="{5B5D722A-8B6A-88F8-8FAA-D83AB1703276}"/>
+                </a:ext>
+              </a:extLst>
+            </p:cNvPr>
+            <p:cNvCxnSpPr>
+              <a:stCxn id="2" idx="7"/>
+              <a:endCxn id="4" idx="3"/>
+            </p:cNvCxnSpPr>
+            <p:nvPr/>
+          </p:nvCxnSpPr>
+          <p:spPr bwMode="auto">
+            <a:xfrm flipV="1">
+              <a:off x="1678342" y="3803115"/>
+              <a:ext cx="773449" cy="219225"/>
+            </a:xfrm>
+            <a:prstGeom prst="line">
+              <a:avLst/>
+            </a:prstGeom>
+            <a:solidFill>
+              <a:schemeClr val="accent1"/>
+            </a:solidFill>
+            <a:ln w="19050" cap="flat" cmpd="sng" algn="ctr">
+              <a:solidFill>
+                <a:schemeClr val="tx1"/>
+              </a:solidFill>
+              <a:prstDash val="solid"/>
+              <a:round/>
+              <a:headEnd type="none" w="med" len="med"/>
+              <a:tailEnd type="none" w="med" len="med"/>
+            </a:ln>
+            <a:effectLst/>
+          </p:spPr>
+        </p:cxnSp>
+        <p:cxnSp>
+          <p:nvCxnSpPr>
+            <p:cNvPr id="9" name="Straight Connector 8">
+              <a:extLst>
+                <a:ext uri="{FF2B5EF4-FFF2-40B4-BE49-F238E27FC236}">
+                  <a16:creationId xmlns:a16="http://schemas.microsoft.com/office/drawing/2014/main" id="{0FFB90CF-6B3C-6E04-D809-BD7235379C24}"/>
+                </a:ext>
+              </a:extLst>
+            </p:cNvPr>
+            <p:cNvCxnSpPr>
+              <a:stCxn id="3" idx="1"/>
+              <a:endCxn id="2" idx="5"/>
+            </p:cNvCxnSpPr>
+            <p:nvPr/>
+          </p:nvCxnSpPr>
+          <p:spPr bwMode="auto">
+            <a:xfrm flipH="1" flipV="1">
+              <a:off x="1678342" y="4528958"/>
+              <a:ext cx="567616" cy="434181"/>
+            </a:xfrm>
+            <a:prstGeom prst="line">
+              <a:avLst/>
+            </a:prstGeom>
+            <a:solidFill>
+              <a:schemeClr val="accent1"/>
+            </a:solidFill>
+            <a:ln w="19050" cap="flat" cmpd="sng" algn="ctr">
+              <a:solidFill>
+                <a:schemeClr val="tx1"/>
+              </a:solidFill>
+              <a:prstDash val="solid"/>
+              <a:round/>
+              <a:headEnd type="none" w="med" len="med"/>
+              <a:tailEnd type="none" w="med" len="med"/>
+            </a:ln>
+            <a:effectLst/>
+          </p:spPr>
+        </p:cxnSp>
+      </p:grpSp>
+      <p:sp>
+        <p:nvSpPr>
+          <p:cNvPr id="5" name="Rectangle 7">
+            <a:extLst>
+              <a:ext uri="{FF2B5EF4-FFF2-40B4-BE49-F238E27FC236}">
+                <a16:creationId xmlns:a16="http://schemas.microsoft.com/office/drawing/2014/main" id="{EDE92B70-3417-D5D3-5E9E-D1F0D49B83AC}"/>
+              </a:ext>
+            </a:extLst>
+          </p:cNvPr>
+          <p:cNvSpPr>
+            <a:spLocks noChangeArrowheads="1"/>
+          </p:cNvSpPr>
+          <p:nvPr/>
+        </p:nvSpPr>
+        <p:spPr bwMode="auto">
+          <a:xfrm>
+            <a:off x="6947018" y="1769752"/>
+            <a:ext cx="487318" cy="646331"/>
+          </a:xfrm>
+          <a:prstGeom prst="rect">
+            <a:avLst/>
+          </a:prstGeom>
+          <a:noFill/>
+          <a:ln>
+            <a:noFill/>
+          </a:ln>
+          <a:extLst>
+            <a:ext uri="{909E8E84-426E-40DD-AFC4-6F175D3DCCD1}">
+              <a14:hiddenFill xmlns:a14="http://schemas.microsoft.com/office/drawing/2010/main">
+                <a:solidFill>
+                  <a:srgbClr val="FFFFFF"/>
+                </a:solidFill>
+              </a14:hiddenFill>
+            </a:ext>
+            <a:ext uri="{91240B29-F687-4F45-9708-019B960494DF}">
+              <a14:hiddenLine xmlns:a14="http://schemas.microsoft.com/office/drawing/2010/main" w="9525">
+                <a:solidFill>
+                  <a:srgbClr val="000000"/>
+                </a:solidFill>
+                <a:miter lim="800000"/>
+                <a:headEnd/>
+                <a:tailEnd/>
+              </a14:hiddenLine>
+            </a:ext>
+          </a:extLst>
+        </p:spPr>
+        <p:txBody>
+          <a:bodyPr wrap="square">
+            <a:spAutoFit/>
+          </a:bodyPr>
+          <a:lstStyle>
+            <a:lvl1pPr>
+              <a:spcBef>
+                <a:spcPct val="20000"/>
+              </a:spcBef>
+              <a:buClr>
+                <a:schemeClr val="hlink"/>
+              </a:buClr>
+              <a:buSzPct val="60000"/>
+              <a:buFont typeface="Monotype Sorts"/>
+              <a:buChar char="l"/>
+              <a:defRPr kumimoji="1" sz="3200">
+                <a:solidFill>
+                  <a:schemeClr val="tx1"/>
+                </a:solidFill>
+                <a:latin typeface="Arial" panose="020B0604020202020204" pitchFamily="34" charset="0"/>
+              </a:defRPr>
+            </a:lvl1pPr>
+            <a:lvl2pPr marL="742950" indent="-285750">
+              <a:spcBef>
+                <a:spcPct val="20000"/>
+              </a:spcBef>
+              <a:buChar char="–"/>
+              <a:defRPr kumimoji="1" sz="2800">
+                <a:solidFill>
+                  <a:schemeClr val="tx1"/>
+                </a:solidFill>
+                <a:latin typeface="Arial" panose="020B0604020202020204" pitchFamily="34" charset="0"/>
+              </a:defRPr>
+            </a:lvl2pPr>
+            <a:lvl3pPr marL="1143000" indent="-228600">
+              <a:spcBef>
+                <a:spcPct val="20000"/>
+              </a:spcBef>
+              <a:buChar char="•"/>
+              <a:defRPr kumimoji="1" sz="2400">
+                <a:solidFill>
+                  <a:schemeClr val="tx1"/>
+                </a:solidFill>
+                <a:latin typeface="Arial" panose="020B0604020202020204" pitchFamily="34" charset="0"/>
+              </a:defRPr>
+            </a:lvl3pPr>
+            <a:lvl4pPr marL="1600200" indent="-228600">
+              <a:spcBef>
+                <a:spcPct val="20000"/>
+              </a:spcBef>
+              <a:buChar char="–"/>
+              <a:defRPr kumimoji="1" sz="2000">
+                <a:solidFill>
+                  <a:schemeClr val="tx1"/>
+                </a:solidFill>
+                <a:latin typeface="Arial" panose="020B0604020202020204" pitchFamily="34" charset="0"/>
+              </a:defRPr>
+            </a:lvl4pPr>
+            <a:lvl5pPr marL="2057400" indent="-228600">
+              <a:spcBef>
+                <a:spcPct val="20000"/>
+              </a:spcBef>
+              <a:buChar char="»"/>
+              <a:defRPr kumimoji="1" sz="2000">
+                <a:solidFill>
+                  <a:schemeClr val="tx1"/>
+                </a:solidFill>
+                <a:latin typeface="Arial" panose="020B0604020202020204" pitchFamily="34" charset="0"/>
+              </a:defRPr>
+            </a:lvl5pPr>
+            <a:lvl6pPr marL="2514600" indent="-228600" eaLnBrk="0" fontAlgn="base" hangingPunct="0">
+              <a:spcBef>
+                <a:spcPct val="20000"/>
+              </a:spcBef>
+              <a:spcAft>
+                <a:spcPct val="0"/>
+              </a:spcAft>
+              <a:buChar char="»"/>
+              <a:defRPr kumimoji="1" sz="2000">
+                <a:solidFill>
+                  <a:schemeClr val="tx1"/>
+                </a:solidFill>
+                <a:latin typeface="Arial" panose="020B0604020202020204" pitchFamily="34" charset="0"/>
+              </a:defRPr>
+            </a:lvl6pPr>
+            <a:lvl7pPr marL="2971800" indent="-228600" eaLnBrk="0" fontAlgn="base" hangingPunct="0">
+              <a:spcBef>
+                <a:spcPct val="20000"/>
+              </a:spcBef>
+              <a:spcAft>
+                <a:spcPct val="0"/>
+              </a:spcAft>
+              <a:buChar char="»"/>
+              <a:defRPr kumimoji="1" sz="2000">
+                <a:solidFill>
+                  <a:schemeClr val="tx1"/>
+                </a:solidFill>
+                <a:latin typeface="Arial" panose="020B0604020202020204" pitchFamily="34" charset="0"/>
+              </a:defRPr>
+            </a:lvl7pPr>
+            <a:lvl8pPr marL="3429000" indent="-228600" eaLnBrk="0" fontAlgn="base" hangingPunct="0">
+              <a:spcBef>
+                <a:spcPct val="20000"/>
+              </a:spcBef>
+              <a:spcAft>
+                <a:spcPct val="0"/>
+              </a:spcAft>
+              <a:buChar char="»"/>
+              <a:defRPr kumimoji="1" sz="2000">
+                <a:solidFill>
+                  <a:schemeClr val="tx1"/>
+                </a:solidFill>
+                <a:latin typeface="Arial" panose="020B0604020202020204" pitchFamily="34" charset="0"/>
+              </a:defRPr>
+            </a:lvl8pPr>
+            <a:lvl9pPr marL="3886200" indent="-228600" eaLnBrk="0" fontAlgn="base" hangingPunct="0">
+              <a:spcBef>
+                <a:spcPct val="20000"/>
+              </a:spcBef>
+              <a:spcAft>
+                <a:spcPct val="0"/>
+              </a:spcAft>
+              <a:buChar char="»"/>
+              <a:defRPr kumimoji="1" sz="2000">
+                <a:solidFill>
+                  <a:schemeClr val="tx1"/>
+                </a:solidFill>
+                <a:latin typeface="Arial" panose="020B0604020202020204" pitchFamily="34" charset="0"/>
+              </a:defRPr>
+            </a:lvl9pPr>
+          </a:lstStyle>
+          <a:p>
+            <a:pPr eaLnBrk="1" hangingPunct="1">
+              <a:spcBef>
+                <a:spcPct val="0"/>
+              </a:spcBef>
+              <a:buClrTx/>
+              <a:buSzTx/>
+              <a:buFontTx/>
+              <a:buNone/>
+            </a:pPr>
+            <a:r>
+              <a:rPr kumimoji="0" lang="en-US" altLang="en-US" sz="3600" b="1" dirty="0">
+                <a:solidFill>
+                  <a:srgbClr val="2D5CB9"/>
+                </a:solidFill>
+                <a:latin typeface="Times New Roman" panose="02020603050405020304" pitchFamily="18" charset="0"/>
+              </a:rPr>
+              <a:t>6</a:t>
+            </a:r>
+          </a:p>
+        </p:txBody>
+      </p:sp>
+    </p:spTree>
+    <p:extLst>
+      <p:ext uri="{BB962C8B-B14F-4D97-AF65-F5344CB8AC3E}">
+        <p14:creationId xmlns:p14="http://schemas.microsoft.com/office/powerpoint/2010/main" val="4165886577"/>
+      </p:ext>
+    </p:extLst>
+  </p:cSld>
+  <p:clrMapOvr>
+    <a:masterClrMapping/>
+  </p:clrMapOvr>
+  <p:timing>
+    <p:tnLst>
+      <p:par>
+        <p:cTn id="1" dur="indefinite" restart="never" nodeType="tmRoot">
+          <p:childTnLst>
+            <p:seq concurrent="1" nextAc="seek">
+              <p:cTn id="2" dur="indefinite" nodeType="mainSeq">
+                <p:childTnLst>
+                  <p:par>
+                    <p:cTn id="3" fill="hold">
+                      <p:stCondLst>
+                        <p:cond delay="indefinite"/>
+                      </p:stCondLst>
+                      <p:childTnLst>
+                        <p:par>
+                          <p:cTn id="4" fill="hold">
+                            <p:stCondLst>
+                              <p:cond delay="0"/>
+                            </p:stCondLst>
+                            <p:childTnLst>
+                              <p:par>
+                                <p:cTn id="5" presetID="21" presetClass="entr" presetSubtype="1" fill="hold" grpId="0" nodeType="clickEffect">
+                                  <p:stCondLst>
+                                    <p:cond delay="0"/>
+                                  </p:stCondLst>
+                                  <p:childTnLst>
+                                    <p:set>
+                                      <p:cBhvr>
+                                        <p:cTn id="6" dur="1" fill="hold">
+                                          <p:stCondLst>
+                                            <p:cond delay="0"/>
+                                          </p:stCondLst>
+                                        </p:cTn>
+                                        <p:tgtEl>
+                                          <p:spTgt spid="5"/>
+                                        </p:tgtEl>
+                                        <p:attrNameLst>
+                                          <p:attrName>style.visibility</p:attrName>
+                                        </p:attrNameLst>
+                                      </p:cBhvr>
+                                      <p:to>
+                                        <p:strVal val="visible"/>
+                                      </p:to>
+                                    </p:set>
+                                    <p:animEffect transition="in" filter="wheel(1)">
+                                      <p:cBhvr>
+                                        <p:cTn id="7" dur="1000"/>
+                                        <p:tgtEl>
+                                          <p:spTgt spid="5"/>
+                                        </p:tgtEl>
+                                      </p:cBhvr>
+                                    </p:animEffect>
+                                  </p:childTnLst>
+                                </p:cTn>
+                              </p:par>
+                            </p:childTnLst>
+                          </p:cTn>
+                        </p:par>
+                      </p:childTnLst>
+                    </p:cTn>
+                  </p:par>
+                </p:childTnLst>
+              </p:cTn>
+              <p:prevCondLst>
+                <p:cond evt="onPrev" delay="0">
+                  <p:tgtEl>
+                    <p:sldTgt/>
+                  </p:tgtEl>
+                </p:cond>
+              </p:prevCondLst>
+              <p:nextCondLst>
+                <p:cond evt="onNext" delay="0">
+                  <p:tgtEl>
+                    <p:sldTgt/>
+                  </p:tgtEl>
+                </p:cond>
+              </p:nextCondLst>
+            </p:seq>
+          </p:childTnLst>
+        </p:cTn>
+      </p:par>
+    </p:tnLst>
+    <p:bldLst>
+      <p:bldP spid="5" grpId="0"/>
+    </p:bldLst>
+  </p:timing>
+</p:sld>
+</file>
+
+<file path=ppt/slides/slide25.xml><?xml version="1.0" encoding="utf-8"?>
 <p:sld xmlns:a="http://schemas.openxmlformats.org/drawingml/2006/main" xmlns:r="http://schemas.openxmlformats.org/officeDocument/2006/relationships" xmlns:p="http://schemas.openxmlformats.org/presentationml/2006/main">
   <p:cSld>
     <p:spTree>
